--- a/docs/slides/wk-02-2026-01-22-anatomy.pptx
+++ b/docs/slides/wk-02-2026-01-22-anatomy.pptx
@@ -45,6 +45,37 @@
     <p:sldId id="293" r:id="rId39"/>
     <p:sldId id="294" r:id="rId40"/>
     <p:sldId id="295" r:id="rId41"/>
+    <p:sldId id="296" r:id="rId42"/>
+    <p:sldId id="297" r:id="rId43"/>
+    <p:sldId id="298" r:id="rId44"/>
+    <p:sldId id="299" r:id="rId45"/>
+    <p:sldId id="300" r:id="rId46"/>
+    <p:sldId id="301" r:id="rId47"/>
+    <p:sldId id="302" r:id="rId48"/>
+    <p:sldId id="303" r:id="rId49"/>
+    <p:sldId id="304" r:id="rId50"/>
+    <p:sldId id="305" r:id="rId51"/>
+    <p:sldId id="306" r:id="rId52"/>
+    <p:sldId id="307" r:id="rId53"/>
+    <p:sldId id="308" r:id="rId54"/>
+    <p:sldId id="309" r:id="rId55"/>
+    <p:sldId id="310" r:id="rId56"/>
+    <p:sldId id="311" r:id="rId57"/>
+    <p:sldId id="312" r:id="rId58"/>
+    <p:sldId id="313" r:id="rId59"/>
+    <p:sldId id="314" r:id="rId60"/>
+    <p:sldId id="315" r:id="rId61"/>
+    <p:sldId id="316" r:id="rId62"/>
+    <p:sldId id="317" r:id="rId63"/>
+    <p:sldId id="318" r:id="rId64"/>
+    <p:sldId id="319" r:id="rId65"/>
+    <p:sldId id="320" r:id="rId66"/>
+    <p:sldId id="321" r:id="rId67"/>
+    <p:sldId id="322" r:id="rId68"/>
+    <p:sldId id="323" r:id="rId69"/>
+    <p:sldId id="324" r:id="rId70"/>
+    <p:sldId id="325" r:id="rId71"/>
+    <p:sldId id="326" r:id="rId72"/>
   </p:sldIdLst>
   <p:sldSz cx="9144000" cy="5143500" type="screen16x9"/>
   <p:notesSz cx="6858000" cy="9144000"/>
@@ -160,6 +191,78 @@
     </p:ext>
   </p:extLst>
 </p:presentation>
+</file>
+
+<file path=ppt/media/image11.txt>Please set a user-agent and respect our robot policy https://w.wiki/4wJS. See also https://phabricator.wikimedia.org/T400119.
+
+</file>
+
+<file path=ppt/media/image12.txt>Please set a user-agent and respect our robot policy https://w.wiki/4wJS. See also https://phabricator.wikimedia.org/T400119.
+
+</file>
+
+<file path=ppt/media/image13.txt>Please set a user-agent and respect our robot policy https://w.wiki/4wJS. See also https://phabricator.wikimedia.org/T400119.
+
+</file>
+
+<file path=ppt/media/image14.txt>Please set a user-agent and respect our robot policy https://w.wiki/4wJS. See also https://phabricator.wikimedia.org/T400119.
+
+</file>
+
+<file path=ppt/media/image16.txt>Please set a user-agent and respect our robot policy https://w.wiki/4wJS. See also https://phabricator.wikimedia.org/T400119.
+
+</file>
+
+<file path=ppt/media/image18.txt>Please set a user-agent and respect our robot policy https://w.wiki/4wJS. See also https://phabricator.wikimedia.org/T400119.
+
+</file>
+
+<file path=ppt/media/image22.txt>Please set a user-agent and respect our robot policy https://w.wiki/4wJS. See also https://phabricator.wikimedia.org/T400119.
+
+</file>
+
+<file path=ppt/media/image26.txt>Please set a user-agent and respect our robot policy https://w.wiki/4wJS. See also https://phabricator.wikimedia.org/T400119.
+
+</file>
+
+<file path=ppt/media/image28.txt>Please set a user-agent and respect our robot policy https://w.wiki/4wJS. See also https://phabricator.wikimedia.org/T400119.
+
+</file>
+
+<file path=ppt/media/image29.txt>Please set a user-agent and respect our robot policy https://w.wiki/4wJS. See also https://phabricator.wikimedia.org/T400119.
+
+</file>
+
+<file path=ppt/media/image3.txt>Please set a user-agent and respect our robot policy https://w.wiki/4wJS. See also https://phabricator.wikimedia.org/T400119.
+
+</file>
+
+<file path=ppt/media/image30.txt>Please set a user-agent and respect our robot policy https://w.wiki/4wJS. See also https://phabricator.wikimedia.org/T400119.
+
+</file>
+
+<file path=ppt/media/image35.txt>Please set a user-agent and respect our robot policy https://w.wiki/4wJS. See also https://phabricator.wikimedia.org/T400119.
+
+</file>
+
+<file path=ppt/media/image36.txt>Please set a user-agent and respect our robot policy https://w.wiki/4wJS. See also https://phabricator.wikimedia.org/T400119.
+
+</file>
+
+<file path=ppt/media/image38.txt>Please set a user-agent and respect our robot policy https://w.wiki/4wJS. See also https://phabricator.wikimedia.org/T400119.
+
+</file>
+
+<file path=ppt/media/image39.txt>Please set a user-agent and respect our robot policy https://w.wiki/4wJS. See also https://phabricator.wikimedia.org/T400119.
+
+</file>
+
+<file path=ppt/media/image5.txt>Please set a user-agent and respect our robot policy https://w.wiki/4wJS. See also https://phabricator.wikimedia.org/T400119.
+
+</file>
+
+<file path=ppt/media/image8.txt>Please set a user-agent and respect our robot policy https://w.wiki/4wJS. See also https://phabricator.wikimedia.org/T400119.
+
 </file>
 
 <file path=ppt/media/image9.txt>Please set a user-agent and respect our robot policy https://w.wiki/4wJS. See also https://phabricator.wikimedia.org/T400119.
@@ -3235,34 +3338,6 @@
             <a:pPr lvl="0"/>
             <a:r>
               <a:rPr/>
-              <a:t>Outputs to</a:t>
-            </a:r>
-          </a:p>
-          <a:p>
-            <a:pPr lvl="1"/>
-            <a:r>
-              <a:rPr/>
-              <a:t>World</a:t>
-            </a:r>
-          </a:p>
-          <a:p>
-            <a:pPr lvl="1"/>
-            <a:r>
-              <a:rPr/>
-              <a:t>Body</a:t>
-            </a:r>
-          </a:p>
-          <a:p>
-            <a:pPr lvl="1"/>
-            <a:r>
-              <a:rPr/>
-              <a:t>Brain</a:t>
-            </a:r>
-          </a:p>
-          <a:p>
-            <a:pPr lvl="0"/>
-            <a:r>
-              <a:rPr/>
               <a:t>What computations occur where?</a:t>
             </a:r>
           </a:p>
@@ -3466,7 +3541,7 @@
             </a:pPr>
             <a:r>
               <a:rPr/>
-              <a:t>Directional terms</a:t>
+              <a:t>Terms</a:t>
             </a:r>
           </a:p>
         </p:txBody>
@@ -3564,67 +3639,58 @@
             </a:pPr>
             <a:r>
               <a:rPr/>
-              <a:t>Central vs. Peripheral Nervous System</a:t>
-            </a:r>
-          </a:p>
-        </p:txBody>
-      </p:sp>
-      <p:pic>
-        <p:nvPicPr>
-          <p:cNvPr descr="../include/img/harriet-bw-237w.jpg" id="0" name="Picture 1"/>
-          <p:cNvPicPr>
-            <a:picLocks noGrp="1" noChangeAspect="1"/>
-          </p:cNvPicPr>
-          <p:nvPr/>
-        </p:nvPicPr>
-        <p:blipFill>
-          <a:blip r:embed="rId2"/>
-          <a:stretch>
-            <a:fillRect/>
-          </a:stretch>
-        </p:blipFill>
-        <p:spPr bwMode="auto">
-          <a:xfrm>
-            <a:off x="3429000" y="1193800"/>
-            <a:ext cx="2273300" cy="2882900"/>
-          </a:xfrm>
-          <a:prstGeom prst="rect">
-            <a:avLst/>
-          </a:prstGeom>
-          <a:noFill/>
-          <a:ln w="9525">
-            <a:noFill/>
-            <a:headEnd/>
-            <a:tailEnd/>
-          </a:ln>
-        </p:spPr>
-      </p:pic>
-      <p:sp>
-        <p:nvSpPr>
-          <p:cNvPr id="1" name="TextBox 3"/>
-          <p:cNvSpPr txBox="1"/>
-          <p:nvPr/>
-        </p:nvSpPr>
-        <p:spPr>
-          <a:xfrm>
-            <a:off x="457200" y="4076700"/>
-            <a:ext cx="8229600" cy="508000"/>
-          </a:xfrm>
-          <a:prstGeom prst="rect">
-            <a:avLst/>
-          </a:prstGeom>
-          <a:noFill/>
-        </p:spPr>
-        <p:txBody>
-          <a:bodyPr/>
-          <a:lstStyle/>
-          <a:p>
-            <a:pPr lvl="0" indent="0" marL="0" algn="ctr">
-              <a:buNone/>
-            </a:pPr>
-            <a:r>
-              <a:rPr/>
-              <a:t>Nervous system of Harriet Cole, see McNaughton (2018)</a:t>
+              <a:t>Nervous system</a:t>
+            </a:r>
+          </a:p>
+        </p:txBody>
+      </p:sp>
+      <p:sp>
+        <p:nvSpPr>
+          <p:cNvPr id="3" name="Content Placeholder 2"/>
+          <p:cNvSpPr>
+            <a:spLocks noGrp="1"/>
+          </p:cNvSpPr>
+          <p:nvPr>
+            <p:ph idx="1"/>
+          </p:nvPr>
+        </p:nvSpPr>
+        <p:spPr/>
+        <p:txBody>
+          <a:bodyPr/>
+          <a:lstStyle/>
+          <a:p>
+            <a:pPr lvl="0"/>
+            <a:r>
+              <a:rPr/>
+              <a:t>Central Nervous System (CNS)</a:t>
+            </a:r>
+          </a:p>
+          <a:p>
+            <a:pPr lvl="1"/>
+            <a:r>
+              <a:rPr/>
+              <a:t>Encased in bone</a:t>
+            </a:r>
+          </a:p>
+          <a:p>
+            <a:pPr lvl="1"/>
+            <a:r>
+              <a:rPr/>
+              <a:t>Brain</a:t>
+            </a:r>
+          </a:p>
+          <a:p>
+            <a:pPr lvl="1"/>
+            <a:r>
+              <a:rPr/>
+              <a:t>Spinal cord</a:t>
+            </a:r>
+          </a:p>
+          <a:p>
+            <a:pPr lvl="0"/>
+            <a:r>
+              <a:rPr/>
+              <a:t>Peripheral Nervous System (PNS)</a:t>
             </a:r>
           </a:p>
         </p:txBody>
@@ -3651,6 +3717,154 @@
           <a:chExt cx="0" cy="0"/>
         </a:xfrm>
       </p:grpSpPr>
+      <p:pic>
+        <p:nvPicPr>
+          <p:cNvPr descr="../include/img/harriet-bw-237w.jpg" id="0" name="Picture 1"/>
+          <p:cNvPicPr>
+            <a:picLocks noGrp="1" noChangeAspect="1"/>
+          </p:cNvPicPr>
+          <p:nvPr/>
+        </p:nvPicPr>
+        <p:blipFill>
+          <a:blip r:embed="rId2"/>
+          <a:stretch>
+            <a:fillRect/>
+          </a:stretch>
+        </p:blipFill>
+        <p:spPr bwMode="auto">
+          <a:xfrm>
+            <a:off x="1333500" y="1193800"/>
+            <a:ext cx="2273300" cy="2882900"/>
+          </a:xfrm>
+          <a:prstGeom prst="rect">
+            <a:avLst/>
+          </a:prstGeom>
+          <a:noFill/>
+          <a:ln w="9525">
+            <a:noFill/>
+            <a:headEnd/>
+            <a:tailEnd/>
+          </a:ln>
+        </p:spPr>
+      </p:pic>
+      <p:sp>
+        <p:nvSpPr>
+          <p:cNvPr id="1" name="TextBox 3"/>
+          <p:cNvSpPr txBox="1"/>
+          <p:nvPr/>
+        </p:nvSpPr>
+        <p:spPr>
+          <a:xfrm>
+            <a:off x="457200" y="4076700"/>
+            <a:ext cx="4038600" cy="508000"/>
+          </a:xfrm>
+          <a:prstGeom prst="rect">
+            <a:avLst/>
+          </a:prstGeom>
+          <a:noFill/>
+        </p:spPr>
+        <p:txBody>
+          <a:bodyPr/>
+          <a:lstStyle/>
+          <a:p>
+            <a:pPr lvl="0" indent="0" marL="0" algn="ctr">
+              <a:buNone/>
+            </a:pPr>
+            <a:r>
+              <a:rPr/>
+              <a:t>Nervous system of Harriet Cole, see McNaughton (2018)</a:t>
+            </a:r>
+          </a:p>
+        </p:txBody>
+      </p:sp>
+      <p:pic>
+        <p:nvPicPr>
+          <p:cNvPr descr="https://upload.wikimedia.org/wikipedia/commons/thumb/b/b2/TE-Nervous_system_diagram.svg/1280px-TE-Nervous_system_diagram.svg.png" id="0" name="Picture 1"/>
+          <p:cNvPicPr>
+            <a:picLocks noGrp="1" noChangeAspect="1"/>
+          </p:cNvPicPr>
+          <p:nvPr/>
+        </p:nvPicPr>
+        <p:blipFill>
+          <a:blip r:embed="rId3"/>
+          <a:stretch>
+            <a:fillRect/>
+          </a:stretch>
+        </p:blipFill>
+        <p:spPr bwMode="auto">
+          <a:xfrm>
+            <a:off x="4648200" y="1295400"/>
+            <a:ext cx="4038600" cy="2692400"/>
+          </a:xfrm>
+          <a:prstGeom prst="rect">
+            <a:avLst/>
+          </a:prstGeom>
+          <a:noFill/>
+          <a:ln w="9525">
+            <a:noFill/>
+            <a:headEnd/>
+            <a:tailEnd/>
+          </a:ln>
+        </p:spPr>
+      </p:pic>
+      <p:sp>
+        <p:nvSpPr>
+          <p:cNvPr id="1" name="TextBox 3"/>
+          <p:cNvSpPr txBox="1"/>
+          <p:nvPr/>
+        </p:nvSpPr>
+        <p:spPr>
+          <a:xfrm>
+            <a:off x="4648200" y="4076700"/>
+            <a:ext cx="4038600" cy="508000"/>
+          </a:xfrm>
+          <a:prstGeom prst="rect">
+            <a:avLst/>
+          </a:prstGeom>
+          <a:noFill/>
+        </p:spPr>
+        <p:txBody>
+          <a:bodyPr/>
+          <a:lstStyle/>
+          <a:p>
+            <a:pPr lvl="0" indent="0" marL="0" algn="ctr">
+              <a:buNone/>
+            </a:pPr>
+            <a:r>
+              <a:rPr/>
+              <a:t>By Own work, CC BY 3.0, </a:t>
+            </a:r>
+            <a:r>
+              <a:rPr>
+                <a:hlinkClick r:id="rId4"/>
+              </a:rPr>
+              <a:t>https://commons.wikimedia.org/w/index.php?curid=10187018</a:t>
+            </a:r>
+          </a:p>
+        </p:txBody>
+      </p:sp>
+    </p:spTree>
+  </p:cSld>
+</p:sld>
+</file>
+
+<file path=ppt/slides/slide16.xml><?xml version="1.0" encoding="utf-8"?>
+<p:sld xmlns:a="http://schemas.openxmlformats.org/drawingml/2006/main" xmlns:r="http://schemas.openxmlformats.org/officeDocument/2006/relationships" xmlns:p="http://schemas.openxmlformats.org/presentationml/2006/main">
+  <p:cSld>
+    <p:spTree>
+      <p:nvGrpSpPr>
+        <p:cNvPr id="1" name=""/>
+        <p:cNvGrpSpPr/>
+        <p:nvPr/>
+      </p:nvGrpSpPr>
+      <p:grpSpPr>
+        <a:xfrm>
+          <a:off x="0" y="0"/>
+          <a:ext cx="0" cy="0"/>
+          <a:chOff x="0" y="0"/>
+          <a:chExt cx="0" cy="0"/>
+        </a:xfrm>
+      </p:grpSpPr>
       <p:sp>
         <p:nvSpPr>
           <p:cNvPr id="2" name="Title 1"/>
@@ -3671,7 +3885,7 @@
             </a:pPr>
             <a:r>
               <a:rPr/>
-              <a:t>Organization of the CNS</a:t>
+              <a:t>CNS Organization</a:t>
             </a:r>
           </a:p>
         </p:txBody>
@@ -3927,7 +4141,7 @@
 </p:sld>
 </file>
 
-<file path=ppt/slides/slide16.xml><?xml version="1.0" encoding="utf-8"?>
+<file path=ppt/slides/slide17.xml><?xml version="1.0" encoding="utf-8"?>
 <p:sld xmlns:a="http://schemas.openxmlformats.org/drawingml/2006/main" xmlns:r="http://schemas.openxmlformats.org/officeDocument/2006/relationships" xmlns:p="http://schemas.openxmlformats.org/presentationml/2006/main">
   <p:cSld>
     <p:spTree>
@@ -4145,7 +4359,7 @@
 </p:sld>
 </file>
 
-<file path=ppt/slides/slide17.xml><?xml version="1.0" encoding="utf-8"?>
+<file path=ppt/slides/slide18.xml><?xml version="1.0" encoding="utf-8"?>
 <p:sld xmlns:a="http://schemas.openxmlformats.org/drawingml/2006/main" xmlns:r="http://schemas.openxmlformats.org/officeDocument/2006/relationships" xmlns:p="http://schemas.openxmlformats.org/presentationml/2006/main">
   <p:cSld>
     <p:spTree>
@@ -4325,7 +4539,7 @@
 </p:sld>
 </file>
 
-<file path=ppt/slides/slide18.xml><?xml version="1.0" encoding="utf-8"?>
+<file path=ppt/slides/slide19.xml><?xml version="1.0" encoding="utf-8"?>
 <p:sld xmlns:a="http://schemas.openxmlformats.org/drawingml/2006/main" xmlns:r="http://schemas.openxmlformats.org/officeDocument/2006/relationships" xmlns:p="http://schemas.openxmlformats.org/presentationml/2006/main">
   <p:cSld>
     <p:spTree>
@@ -4561,113 +4775,6 @@
 </p:sld>
 </file>
 
-<file path=ppt/slides/slide19.xml><?xml version="1.0" encoding="utf-8"?>
-<p:sld xmlns:a="http://schemas.openxmlformats.org/drawingml/2006/main" xmlns:r="http://schemas.openxmlformats.org/officeDocument/2006/relationships" xmlns:p="http://schemas.openxmlformats.org/presentationml/2006/main">
-  <p:cSld>
-    <p:spTree>
-      <p:nvGrpSpPr>
-        <p:cNvPr id="1" name=""/>
-        <p:cNvGrpSpPr/>
-        <p:nvPr/>
-      </p:nvGrpSpPr>
-      <p:grpSpPr>
-        <a:xfrm>
-          <a:off x="0" y="0"/>
-          <a:ext cx="0" cy="0"/>
-          <a:chOff x="0" y="0"/>
-          <a:chExt cx="0" cy="0"/>
-        </a:xfrm>
-      </p:grpSpPr>
-      <p:sp>
-        <p:nvSpPr>
-          <p:cNvPr id="4" name="Text Placeholder 3"/>
-          <p:cNvSpPr>
-            <a:spLocks noGrp="1"/>
-          </p:cNvSpPr>
-          <p:nvPr>
-            <p:ph idx="2" sz="half" type="body"/>
-          </p:nvPr>
-        </p:nvSpPr>
-        <p:spPr/>
-        <p:txBody>
-          <a:bodyPr/>
-          <a:lstStyle/>
-          <a:p>
-            <a:pPr lvl="0" indent="0" marL="0">
-              <a:buNone/>
-            </a:pPr>
-            <a:r>
-              <a:rPr/>
-              <a:t>Forebrain, midbrain, hindbrain terminology derives from embryonic stages in CNS development.</a:t>
-            </a:r>
-          </a:p>
-        </p:txBody>
-      </p:sp>
-      <p:pic>
-        <p:nvPicPr>
-          <p:cNvPr descr="../include/img/6_week_embryo_brain.jpg" id="0" name="Picture 1"/>
-          <p:cNvPicPr>
-            <a:picLocks noGrp="1" noChangeAspect="1"/>
-          </p:cNvPicPr>
-          <p:nvPr/>
-        </p:nvPicPr>
-        <p:blipFill>
-          <a:blip r:embed="rId2"/>
-          <a:stretch>
-            <a:fillRect/>
-          </a:stretch>
-        </p:blipFill>
-        <p:spPr bwMode="auto">
-          <a:xfrm>
-            <a:off x="3568700" y="254000"/>
-            <a:ext cx="5105400" cy="3759200"/>
-          </a:xfrm>
-          <a:prstGeom prst="rect">
-            <a:avLst/>
-          </a:prstGeom>
-          <a:noFill/>
-          <a:ln w="9525">
-            <a:noFill/>
-            <a:headEnd/>
-            <a:tailEnd/>
-          </a:ln>
-        </p:spPr>
-      </p:pic>
-      <p:sp>
-        <p:nvSpPr>
-          <p:cNvPr id="1" name="TextBox 3"/>
-          <p:cNvSpPr txBox="1"/>
-          <p:nvPr/>
-        </p:nvSpPr>
-        <p:spPr>
-          <a:xfrm>
-            <a:off x="3568700" y="4076700"/>
-            <a:ext cx="5105400" cy="508000"/>
-          </a:xfrm>
-          <a:prstGeom prst="rect">
-            <a:avLst/>
-          </a:prstGeom>
-          <a:noFill/>
-        </p:spPr>
-        <p:txBody>
-          <a:bodyPr/>
-          <a:lstStyle/>
-          <a:p>
-            <a:pPr lvl="0" indent="0" marL="0" algn="ctr">
-              <a:buNone/>
-            </a:pPr>
-            <a:r>
-              <a:rPr/>
-              <a:t>Embryonic human brain from Wikipedia</a:t>
-            </a:r>
-          </a:p>
-        </p:txBody>
-      </p:sp>
-    </p:spTree>
-  </p:cSld>
-</p:sld>
-</file>
-
 <file path=ppt/slides/slide2.xml><?xml version="1.0" encoding="utf-8"?>
 <p:sld xmlns:a="http://schemas.openxmlformats.org/drawingml/2006/main" xmlns:r="http://schemas.openxmlformats.org/officeDocument/2006/relationships" xmlns:p="http://schemas.openxmlformats.org/presentationml/2006/main">
   <p:cSld>
@@ -4737,69 +4844,9 @@
           <a:chExt cx="0" cy="0"/>
         </a:xfrm>
       </p:grpSpPr>
-      <p:sp>
-        <p:nvSpPr>
-          <p:cNvPr id="2" name="Title 1"/>
-          <p:cNvSpPr>
-            <a:spLocks noGrp="1"/>
-          </p:cNvSpPr>
-          <p:nvPr>
-            <p:ph type="title"/>
-          </p:nvPr>
-        </p:nvSpPr>
-        <p:spPr>
-          <a:xfrm>
-            <a:off x="457201" y="204787"/>
-            <a:ext cx="3008313" cy="871538"/>
-          </a:xfrm>
-        </p:spPr>
-        <p:txBody>
-          <a:bodyPr/>
-          <a:lstStyle/>
-          <a:p>
-            <a:pPr lvl="0" indent="0" marL="0">
-              <a:buNone/>
-            </a:pPr>
-            <a:r>
-              <a:rPr/>
-              <a:t>Cerebrum</a:t>
-            </a:r>
-          </a:p>
-        </p:txBody>
-      </p:sp>
-      <p:sp>
-        <p:nvSpPr>
-          <p:cNvPr id="4" name="Text Placeholder 3"/>
-          <p:cNvSpPr>
-            <a:spLocks noGrp="1"/>
-          </p:cNvSpPr>
-          <p:nvPr>
-            <p:ph idx="2" sz="half" type="body"/>
-          </p:nvPr>
-        </p:nvSpPr>
-        <p:spPr/>
-        <p:txBody>
-          <a:bodyPr/>
-          <a:lstStyle/>
-          <a:p>
-            <a:pPr lvl="0"/>
-            <a:r>
-              <a:rPr/>
-              <a:t>(Cerebral) cortex</a:t>
-            </a:r>
-          </a:p>
-          <a:p>
-            <a:pPr lvl="0"/>
-            <a:r>
-              <a:rPr/>
-              <a:t>Subcortical (below the cortex) structures</a:t>
-            </a:r>
-          </a:p>
-        </p:txBody>
-      </p:sp>
       <p:pic>
         <p:nvPicPr>
-          <p:cNvPr descr="../include/img/medial-labelled.png" id="0" name="Picture 1"/>
+          <p:cNvPr descr="../include/img/6_week_embryo_brain.jpg" id="0" name="Picture 1"/>
           <p:cNvPicPr>
             <a:picLocks noGrp="1" noChangeAspect="1"/>
           </p:cNvPicPr>
@@ -4813,8 +4860,8 @@
         </p:blipFill>
         <p:spPr bwMode="auto">
           <a:xfrm>
-            <a:off x="4191000" y="203200"/>
-            <a:ext cx="3873500" cy="3873500"/>
+            <a:off x="520700" y="1193800"/>
+            <a:ext cx="3911600" cy="2882900"/>
           </a:xfrm>
           <a:prstGeom prst="rect">
             <a:avLst/>
@@ -4835,8 +4882,8 @@
         </p:nvSpPr>
         <p:spPr>
           <a:xfrm>
-            <a:off x="3568700" y="4076700"/>
-            <a:ext cx="5105400" cy="508000"/>
+            <a:off x="457200" y="4076700"/>
+            <a:ext cx="4038600" cy="508000"/>
           </a:xfrm>
           <a:prstGeom prst="rect">
             <a:avLst/>
@@ -4852,7 +4899,67 @@
             </a:pPr>
             <a:r>
               <a:rPr/>
-              <a:t>Labelled MRI including thalamus and hypothalamus</a:t>
+              <a:t>Embryonic human brain from Wikipedia</a:t>
+            </a:r>
+          </a:p>
+        </p:txBody>
+      </p:sp>
+      <p:pic>
+        <p:nvPicPr>
+          <p:cNvPr descr="https://upload.wikimedia.org/wikipedia/commons/thumb/5/54/EmbryonicBrain.svg/1200px-EmbryonicBrain.svg.png" id="0" name="Picture 1"/>
+          <p:cNvPicPr>
+            <a:picLocks noGrp="1" noChangeAspect="1"/>
+          </p:cNvPicPr>
+          <p:nvPr/>
+        </p:nvPicPr>
+        <p:blipFill>
+          <a:blip r:embed="rId3"/>
+          <a:stretch>
+            <a:fillRect/>
+          </a:stretch>
+        </p:blipFill>
+        <p:spPr bwMode="auto">
+          <a:xfrm>
+            <a:off x="4648200" y="1295400"/>
+            <a:ext cx="4038600" cy="2692400"/>
+          </a:xfrm>
+          <a:prstGeom prst="rect">
+            <a:avLst/>
+          </a:prstGeom>
+          <a:noFill/>
+          <a:ln w="9525">
+            <a:noFill/>
+            <a:headEnd/>
+            <a:tailEnd/>
+          </a:ln>
+        </p:spPr>
+      </p:pic>
+      <p:sp>
+        <p:nvSpPr>
+          <p:cNvPr id="1" name="TextBox 3"/>
+          <p:cNvSpPr txBox="1"/>
+          <p:nvPr/>
+        </p:nvSpPr>
+        <p:spPr>
+          <a:xfrm>
+            <a:off x="4648200" y="4076700"/>
+            <a:ext cx="4038600" cy="508000"/>
+          </a:xfrm>
+          <a:prstGeom prst="rect">
+            <a:avLst/>
+          </a:prstGeom>
+          <a:noFill/>
+        </p:spPr>
+        <p:txBody>
+          <a:bodyPr/>
+          <a:lstStyle/>
+          <a:p>
+            <a:pPr lvl="0" indent="0" marL="0" algn="ctr">
+              <a:buNone/>
+            </a:pPr>
+            <a:r>
+              <a:rPr/>
+              <a:t>Cross section of embryonic brain from Wikipedia</a:t>
             </a:r>
           </a:p>
         </p:txBody>
@@ -4881,31 +4988,6 @@
       </p:grpSpPr>
       <p:sp>
         <p:nvSpPr>
-          <p:cNvPr id="2" name="Title 1"/>
-          <p:cNvSpPr>
-            <a:spLocks noGrp="1"/>
-          </p:cNvSpPr>
-          <p:nvPr>
-            <p:ph type="title"/>
-          </p:nvPr>
-        </p:nvSpPr>
-        <p:spPr/>
-        <p:txBody>
-          <a:bodyPr/>
-          <a:lstStyle/>
-          <a:p>
-            <a:pPr lvl="0" indent="0" marL="0">
-              <a:buNone/>
-            </a:pPr>
-            <a:r>
-              <a:rPr/>
-              <a:t>(Cerebral) cortex</a:t>
-            </a:r>
-          </a:p>
-        </p:txBody>
-      </p:sp>
-      <p:sp>
-        <p:nvSpPr>
           <p:cNvPr id="3" name="Content Placeholder 2"/>
           <p:cNvSpPr>
             <a:spLocks noGrp="1"/>
@@ -4922,30 +5004,7 @@
             <a:pPr lvl="0"/>
             <a:r>
               <a:rPr/>
-              <a:t>Lobes, marked by sulci/fissures, adjacency to bones of skull</a:t>
-            </a:r>
-          </a:p>
-          <a:p>
-            <a:pPr lvl="0"/>
-            <a:r>
-              <a:rPr/>
-              <a:t>Functional areas marked by gyri &amp; sulci</a:t>
-            </a:r>
-          </a:p>
-          <a:p>
-            <a:pPr lvl="0"/>
-            <a:r>
-              <a:rPr>
-                <a:hlinkClick r:id="rId2"/>
-              </a:rPr>
-              <a:t>Brodmann Areas</a:t>
-            </a:r>
-          </a:p>
-          <a:p>
-            <a:pPr lvl="1"/>
-            <a:r>
-              <a:rPr/>
-              <a:t>Microstructural (cellular composition) features</a:t>
+              <a:t>Forebrain, midbrain, hindbrain terminology derives from embryonic stages in CNS development.</a:t>
             </a:r>
           </a:p>
         </p:txBody>
@@ -4974,12 +5033,37 @@
       </p:grpSpPr>
       <p:sp>
         <p:nvSpPr>
+          <p:cNvPr id="2" name="Title 1"/>
+          <p:cNvSpPr>
+            <a:spLocks noGrp="1"/>
+          </p:cNvSpPr>
+          <p:nvPr>
+            <p:ph type="title"/>
+          </p:nvPr>
+        </p:nvSpPr>
+        <p:spPr/>
+        <p:txBody>
+          <a:bodyPr/>
+          <a:lstStyle/>
+          <a:p>
+            <a:pPr lvl="0" indent="0" marL="0">
+              <a:buNone/>
+            </a:pPr>
+            <a:r>
+              <a:rPr/>
+              <a:t>Cerebrum</a:t>
+            </a:r>
+          </a:p>
+        </p:txBody>
+      </p:sp>
+      <p:sp>
+        <p:nvSpPr>
           <p:cNvPr id="3" name="Content Placeholder 2"/>
           <p:cNvSpPr>
             <a:spLocks noGrp="1"/>
           </p:cNvSpPr>
           <p:nvPr>
-            <p:ph idx="1"/>
+            <p:ph idx="1" sz="half"/>
           </p:nvPr>
         </p:nvSpPr>
         <p:spPr/>
@@ -4990,42 +5074,74 @@
             <a:pPr lvl="0"/>
             <a:r>
               <a:rPr/>
-              <a:t>Most lobes host primary sensory or motor area</a:t>
-            </a:r>
-          </a:p>
-          <a:p>
-            <a:pPr lvl="1"/>
-            <a:r>
-              <a:rPr/>
-              <a:t>Frontal: Motor cortex</a:t>
-            </a:r>
-          </a:p>
-          <a:p>
-            <a:pPr lvl="1"/>
-            <a:r>
-              <a:rPr/>
-              <a:t>Temporal: Auditory cortex</a:t>
-            </a:r>
-          </a:p>
-          <a:p>
-            <a:pPr lvl="1"/>
-            <a:r>
-              <a:rPr/>
-              <a:t>Parietal: Somatosensory cortex</a:t>
-            </a:r>
-          </a:p>
-          <a:p>
-            <a:pPr lvl="1"/>
-            <a:r>
-              <a:rPr/>
-              <a:t>Occipital: Visual cortex</a:t>
-            </a:r>
-          </a:p>
-          <a:p>
-            <a:pPr lvl="1"/>
-            <a:r>
-              <a:rPr/>
-              <a:t>Insula: Gustatory</a:t>
+              <a:t>(Cerebral) cortex</a:t>
+            </a:r>
+          </a:p>
+          <a:p>
+            <a:pPr lvl="0"/>
+            <a:r>
+              <a:rPr/>
+              <a:t>Subcortical (below the cortex) structures</a:t>
+            </a:r>
+          </a:p>
+        </p:txBody>
+      </p:sp>
+      <p:pic>
+        <p:nvPicPr>
+          <p:cNvPr descr="../include/img/medial-labelled.png" id="0" name="Picture 1"/>
+          <p:cNvPicPr>
+            <a:picLocks noGrp="1" noChangeAspect="1"/>
+          </p:cNvPicPr>
+          <p:nvPr/>
+        </p:nvPicPr>
+        <p:blipFill>
+          <a:blip r:embed="rId2"/>
+          <a:stretch>
+            <a:fillRect/>
+          </a:stretch>
+        </p:blipFill>
+        <p:spPr bwMode="auto">
+          <a:xfrm>
+            <a:off x="5232400" y="1193800"/>
+            <a:ext cx="2882900" cy="2882900"/>
+          </a:xfrm>
+          <a:prstGeom prst="rect">
+            <a:avLst/>
+          </a:prstGeom>
+          <a:noFill/>
+          <a:ln w="9525">
+            <a:noFill/>
+            <a:headEnd/>
+            <a:tailEnd/>
+          </a:ln>
+        </p:spPr>
+      </p:pic>
+      <p:sp>
+        <p:nvSpPr>
+          <p:cNvPr id="1" name="TextBox 3"/>
+          <p:cNvSpPr txBox="1"/>
+          <p:nvPr/>
+        </p:nvSpPr>
+        <p:spPr>
+          <a:xfrm>
+            <a:off x="4648200" y="4076700"/>
+            <a:ext cx="4038600" cy="508000"/>
+          </a:xfrm>
+          <a:prstGeom prst="rect">
+            <a:avLst/>
+          </a:prstGeom>
+          <a:noFill/>
+        </p:spPr>
+        <p:txBody>
+          <a:bodyPr/>
+          <a:lstStyle/>
+          <a:p>
+            <a:pPr lvl="0" indent="0" marL="0" algn="ctr">
+              <a:buNone/>
+            </a:pPr>
+            <a:r>
+              <a:rPr/>
+              <a:t>Labelled MRI including thalamus and hypothalamus</a:t>
             </a:r>
           </a:p>
         </p:txBody>
@@ -5072,7 +5188,7 @@
             </a:pPr>
             <a:r>
               <a:rPr/>
-              <a:t>Input/output</a:t>
+              <a:t>Cerebral Cortex: Landmarks</a:t>
             </a:r>
           </a:p>
         </p:txBody>
@@ -5084,7 +5200,7 @@
             <a:spLocks noGrp="1"/>
           </p:cNvSpPr>
           <p:nvPr>
-            <p:ph idx="1"/>
+            <p:ph idx="1" sz="half"/>
           </p:nvPr>
         </p:nvSpPr>
         <p:spPr/>
@@ -5095,20 +5211,547 @@
             <a:pPr lvl="0"/>
             <a:r>
               <a:rPr/>
-              <a:t>Via cranial nerves (in CNS)</a:t>
+              <a:t>Cerebral hemispheres</a:t>
             </a:r>
           </a:p>
           <a:p>
             <a:pPr lvl="0"/>
             <a:r>
               <a:rPr/>
-              <a:t>Via spinal nerves (in PNS)</a:t>
+              <a:t>Bumps</a:t>
+            </a:r>
+          </a:p>
+          <a:p>
+            <a:pPr lvl="1"/>
+            <a:r>
+              <a:rPr/>
+              <a:t>Gyrus or gyri</a:t>
+            </a:r>
+          </a:p>
+          <a:p>
+            <a:pPr lvl="0"/>
+            <a:r>
+              <a:rPr/>
+              <a:t>Grooves</a:t>
+            </a:r>
+          </a:p>
+          <a:p>
+            <a:pPr lvl="1"/>
+            <a:r>
+              <a:rPr/>
+              <a:t>Sulcus or sulci: shallow</a:t>
+            </a:r>
+          </a:p>
+          <a:p>
+            <a:pPr lvl="1"/>
+            <a:r>
+              <a:rPr/>
+              <a:t>Fissure: deep</a:t>
+            </a:r>
+          </a:p>
+          <a:p>
+            <a:pPr lvl="0"/>
+            <a:r>
+              <a:rPr/>
+              <a:t>Medial longitudinal fissure</a:t>
+            </a:r>
+          </a:p>
+          <a:p>
+            <a:pPr lvl="0"/>
+            <a:r>
+              <a:rPr/>
+              <a:t>Corpus callosum</a:t>
+            </a:r>
+          </a:p>
+        </p:txBody>
+      </p:sp>
+      <p:pic>
+        <p:nvPicPr>
+          <p:cNvPr descr="https://i0.wp.com/www.anatomyqa.com/wp-content/uploads/2017/07/Picture1-2.png?resize=599%2C312" id="0" name="Picture 1"/>
+          <p:cNvPicPr>
+            <a:picLocks noGrp="1" noChangeAspect="1"/>
+          </p:cNvPicPr>
+          <p:nvPr/>
+        </p:nvPicPr>
+        <p:blipFill>
+          <a:blip r:embed="rId2"/>
+          <a:stretch>
+            <a:fillRect/>
+          </a:stretch>
+        </p:blipFill>
+        <p:spPr bwMode="auto">
+          <a:xfrm>
+            <a:off x="4648200" y="1587500"/>
+            <a:ext cx="4038600" cy="2108200"/>
+          </a:xfrm>
+          <a:prstGeom prst="rect">
+            <a:avLst/>
+          </a:prstGeom>
+          <a:noFill/>
+          <a:ln w="9525">
+            <a:noFill/>
+            <a:headEnd/>
+            <a:tailEnd/>
+          </a:ln>
+        </p:spPr>
+      </p:pic>
+      <p:sp>
+        <p:nvSpPr>
+          <p:cNvPr id="1" name="TextBox 3"/>
+          <p:cNvSpPr txBox="1"/>
+          <p:nvPr/>
+        </p:nvSpPr>
+        <p:spPr>
+          <a:xfrm>
+            <a:off x="4648200" y="4076700"/>
+            <a:ext cx="4038600" cy="508000"/>
+          </a:xfrm>
+          <a:prstGeom prst="rect">
+            <a:avLst/>
+          </a:prstGeom>
+          <a:noFill/>
+        </p:spPr>
+        <p:txBody>
+          <a:bodyPr/>
+          <a:lstStyle/>
+          <a:p>
+            <a:pPr lvl="0" indent="0" marL="0" algn="ctr">
+              <a:buNone/>
+            </a:pPr>
+            <a:r>
+              <a:rPr/>
+              <a:t>From www.anatomyqa.com</a:t>
             </a:r>
           </a:p>
         </p:txBody>
       </p:sp>
     </p:spTree>
   </p:cSld>
+  <p:timing>
+    <p:tnLst>
+      <p:par>
+        <p:cTn id="1" dur="indefinite" restart="never" nodeType="tmRoot">
+          <p:childTnLst>
+            <p:seq concurrent="1" nextAc="seek">
+              <p:cTn id="2" dur="indefinite" nodeType="mainSeq">
+                <p:childTnLst>
+                  <p:par>
+                    <p:cTn id="3" fill="hold">
+                      <p:stCondLst>
+                        <p:cond delay="indefinite"/>
+                      </p:stCondLst>
+                      <p:childTnLst>
+                        <p:par>
+                          <p:cTn id="4" fill="hold">
+                            <p:stCondLst>
+                              <p:cond delay="0"/>
+                            </p:stCondLst>
+                            <p:childTnLst>
+                              <p:par>
+                                <p:cTn id="5" presetID="1" presetClass="entr" presetSubtype="0" fill="hold" grpId="0" nodeType="clickEffect">
+                                  <p:stCondLst>
+                                    <p:cond delay="0"/>
+                                  </p:stCondLst>
+                                  <p:childTnLst>
+                                    <p:set>
+                                      <p:cBhvr>
+                                        <p:cTn id="6" dur="1" fill="hold">
+                                          <p:stCondLst>
+                                            <p:cond delay="0"/>
+                                          </p:stCondLst>
+                                        </p:cTn>
+                                        <p:tgtEl>
+                                          <p:spTgt spid="3">
+                                            <p:txEl>
+                                              <p:pRg st="0" end="0"/>
+                                            </p:txEl>
+                                          </p:spTgt>
+                                        </p:tgtEl>
+                                        <p:attrNameLst>
+                                          <p:attrName>style.visibility</p:attrName>
+                                        </p:attrNameLst>
+                                      </p:cBhvr>
+                                      <p:to>
+                                        <p:strVal val="visible"/>
+                                      </p:to>
+                                    </p:set>
+                                  </p:childTnLst>
+                                </p:cTn>
+                              </p:par>
+                            </p:childTnLst>
+                          </p:cTn>
+                        </p:par>
+                      </p:childTnLst>
+                    </p:cTn>
+                  </p:par>
+                  <p:par>
+                    <p:cTn id="7" fill="hold">
+                      <p:stCondLst>
+                        <p:cond delay="indefinite"/>
+                      </p:stCondLst>
+                      <p:childTnLst>
+                        <p:par>
+                          <p:cTn id="8" fill="hold">
+                            <p:stCondLst>
+                              <p:cond delay="0"/>
+                            </p:stCondLst>
+                            <p:childTnLst>
+                              <p:par>
+                                <p:cTn id="9" presetID="1" presetClass="entr" presetSubtype="0" fill="hold" grpId="0" nodeType="clickEffect">
+                                  <p:stCondLst>
+                                    <p:cond delay="0"/>
+                                  </p:stCondLst>
+                                  <p:childTnLst>
+                                    <p:set>
+                                      <p:cBhvr>
+                                        <p:cTn id="10" dur="1" fill="hold">
+                                          <p:stCondLst>
+                                            <p:cond delay="0"/>
+                                          </p:stCondLst>
+                                        </p:cTn>
+                                        <p:tgtEl>
+                                          <p:spTgt spid="3">
+                                            <p:txEl>
+                                              <p:pRg st="1" end="1"/>
+                                            </p:txEl>
+                                          </p:spTgt>
+                                        </p:tgtEl>
+                                        <p:attrNameLst>
+                                          <p:attrName>style.visibility</p:attrName>
+                                        </p:attrNameLst>
+                                      </p:cBhvr>
+                                      <p:to>
+                                        <p:strVal val="visible"/>
+                                      </p:to>
+                                    </p:set>
+                                  </p:childTnLst>
+                                </p:cTn>
+                              </p:par>
+                            </p:childTnLst>
+                          </p:cTn>
+                        </p:par>
+                      </p:childTnLst>
+                    </p:cTn>
+                  </p:par>
+                  <p:par>
+                    <p:cTn id="11" fill="hold">
+                      <p:stCondLst>
+                        <p:cond delay="indefinite"/>
+                      </p:stCondLst>
+                      <p:childTnLst>
+                        <p:par>
+                          <p:cTn id="12" fill="hold">
+                            <p:stCondLst>
+                              <p:cond delay="0"/>
+                            </p:stCondLst>
+                            <p:childTnLst>
+                              <p:par>
+                                <p:cTn id="13" presetID="1" presetClass="entr" presetSubtype="0" fill="hold" grpId="0" nodeType="clickEffect">
+                                  <p:stCondLst>
+                                    <p:cond delay="0"/>
+                                  </p:stCondLst>
+                                  <p:childTnLst>
+                                    <p:set>
+                                      <p:cBhvr>
+                                        <p:cTn id="14" dur="1" fill="hold">
+                                          <p:stCondLst>
+                                            <p:cond delay="0"/>
+                                          </p:stCondLst>
+                                        </p:cTn>
+                                        <p:tgtEl>
+                                          <p:spTgt spid="3">
+                                            <p:txEl>
+                                              <p:pRg st="2" end="2"/>
+                                            </p:txEl>
+                                          </p:spTgt>
+                                        </p:tgtEl>
+                                        <p:attrNameLst>
+                                          <p:attrName>style.visibility</p:attrName>
+                                        </p:attrNameLst>
+                                      </p:cBhvr>
+                                      <p:to>
+                                        <p:strVal val="visible"/>
+                                      </p:to>
+                                    </p:set>
+                                  </p:childTnLst>
+                                </p:cTn>
+                              </p:par>
+                            </p:childTnLst>
+                          </p:cTn>
+                        </p:par>
+                      </p:childTnLst>
+                    </p:cTn>
+                  </p:par>
+                  <p:par>
+                    <p:cTn id="15" fill="hold">
+                      <p:stCondLst>
+                        <p:cond delay="indefinite"/>
+                      </p:stCondLst>
+                      <p:childTnLst>
+                        <p:par>
+                          <p:cTn id="16" fill="hold">
+                            <p:stCondLst>
+                              <p:cond delay="0"/>
+                            </p:stCondLst>
+                            <p:childTnLst>
+                              <p:par>
+                                <p:cTn id="17" presetID="1" presetClass="entr" presetSubtype="0" fill="hold" grpId="0" nodeType="clickEffect">
+                                  <p:stCondLst>
+                                    <p:cond delay="0"/>
+                                  </p:stCondLst>
+                                  <p:childTnLst>
+                                    <p:set>
+                                      <p:cBhvr>
+                                        <p:cTn id="18" dur="1" fill="hold">
+                                          <p:stCondLst>
+                                            <p:cond delay="0"/>
+                                          </p:stCondLst>
+                                        </p:cTn>
+                                        <p:tgtEl>
+                                          <p:spTgt spid="3">
+                                            <p:txEl>
+                                              <p:pRg st="3" end="3"/>
+                                            </p:txEl>
+                                          </p:spTgt>
+                                        </p:tgtEl>
+                                        <p:attrNameLst>
+                                          <p:attrName>style.visibility</p:attrName>
+                                        </p:attrNameLst>
+                                      </p:cBhvr>
+                                      <p:to>
+                                        <p:strVal val="visible"/>
+                                      </p:to>
+                                    </p:set>
+                                  </p:childTnLst>
+                                </p:cTn>
+                              </p:par>
+                            </p:childTnLst>
+                          </p:cTn>
+                        </p:par>
+                      </p:childTnLst>
+                    </p:cTn>
+                  </p:par>
+                  <p:par>
+                    <p:cTn id="19" fill="hold">
+                      <p:stCondLst>
+                        <p:cond delay="indefinite"/>
+                      </p:stCondLst>
+                      <p:childTnLst>
+                        <p:par>
+                          <p:cTn id="20" fill="hold">
+                            <p:stCondLst>
+                              <p:cond delay="0"/>
+                            </p:stCondLst>
+                            <p:childTnLst>
+                              <p:par>
+                                <p:cTn id="21" presetID="1" presetClass="entr" presetSubtype="0" fill="hold" grpId="0" nodeType="clickEffect">
+                                  <p:stCondLst>
+                                    <p:cond delay="0"/>
+                                  </p:stCondLst>
+                                  <p:childTnLst>
+                                    <p:set>
+                                      <p:cBhvr>
+                                        <p:cTn id="22" dur="1" fill="hold">
+                                          <p:stCondLst>
+                                            <p:cond delay="0"/>
+                                          </p:stCondLst>
+                                        </p:cTn>
+                                        <p:tgtEl>
+                                          <p:spTgt spid="3">
+                                            <p:txEl>
+                                              <p:pRg st="4" end="4"/>
+                                            </p:txEl>
+                                          </p:spTgt>
+                                        </p:tgtEl>
+                                        <p:attrNameLst>
+                                          <p:attrName>style.visibility</p:attrName>
+                                        </p:attrNameLst>
+                                      </p:cBhvr>
+                                      <p:to>
+                                        <p:strVal val="visible"/>
+                                      </p:to>
+                                    </p:set>
+                                  </p:childTnLst>
+                                </p:cTn>
+                              </p:par>
+                            </p:childTnLst>
+                          </p:cTn>
+                        </p:par>
+                      </p:childTnLst>
+                    </p:cTn>
+                  </p:par>
+                  <p:par>
+                    <p:cTn id="23" fill="hold">
+                      <p:stCondLst>
+                        <p:cond delay="indefinite"/>
+                      </p:stCondLst>
+                      <p:childTnLst>
+                        <p:par>
+                          <p:cTn id="24" fill="hold">
+                            <p:stCondLst>
+                              <p:cond delay="0"/>
+                            </p:stCondLst>
+                            <p:childTnLst>
+                              <p:par>
+                                <p:cTn id="25" presetID="1" presetClass="entr" presetSubtype="0" fill="hold" grpId="0" nodeType="clickEffect">
+                                  <p:stCondLst>
+                                    <p:cond delay="0"/>
+                                  </p:stCondLst>
+                                  <p:childTnLst>
+                                    <p:set>
+                                      <p:cBhvr>
+                                        <p:cTn id="26" dur="1" fill="hold">
+                                          <p:stCondLst>
+                                            <p:cond delay="0"/>
+                                          </p:stCondLst>
+                                        </p:cTn>
+                                        <p:tgtEl>
+                                          <p:spTgt spid="3">
+                                            <p:txEl>
+                                              <p:pRg st="5" end="5"/>
+                                            </p:txEl>
+                                          </p:spTgt>
+                                        </p:tgtEl>
+                                        <p:attrNameLst>
+                                          <p:attrName>style.visibility</p:attrName>
+                                        </p:attrNameLst>
+                                      </p:cBhvr>
+                                      <p:to>
+                                        <p:strVal val="visible"/>
+                                      </p:to>
+                                    </p:set>
+                                  </p:childTnLst>
+                                </p:cTn>
+                              </p:par>
+                            </p:childTnLst>
+                          </p:cTn>
+                        </p:par>
+                      </p:childTnLst>
+                    </p:cTn>
+                  </p:par>
+                  <p:par>
+                    <p:cTn id="27" fill="hold">
+                      <p:stCondLst>
+                        <p:cond delay="indefinite"/>
+                      </p:stCondLst>
+                      <p:childTnLst>
+                        <p:par>
+                          <p:cTn id="28" fill="hold">
+                            <p:stCondLst>
+                              <p:cond delay="0"/>
+                            </p:stCondLst>
+                            <p:childTnLst>
+                              <p:par>
+                                <p:cTn id="29" presetID="1" presetClass="entr" presetSubtype="0" fill="hold" grpId="0" nodeType="clickEffect">
+                                  <p:stCondLst>
+                                    <p:cond delay="0"/>
+                                  </p:stCondLst>
+                                  <p:childTnLst>
+                                    <p:set>
+                                      <p:cBhvr>
+                                        <p:cTn id="30" dur="1" fill="hold">
+                                          <p:stCondLst>
+                                            <p:cond delay="0"/>
+                                          </p:stCondLst>
+                                        </p:cTn>
+                                        <p:tgtEl>
+                                          <p:spTgt spid="3">
+                                            <p:txEl>
+                                              <p:pRg st="6" end="6"/>
+                                            </p:txEl>
+                                          </p:spTgt>
+                                        </p:tgtEl>
+                                        <p:attrNameLst>
+                                          <p:attrName>style.visibility</p:attrName>
+                                        </p:attrNameLst>
+                                      </p:cBhvr>
+                                      <p:to>
+                                        <p:strVal val="visible"/>
+                                      </p:to>
+                                    </p:set>
+                                  </p:childTnLst>
+                                </p:cTn>
+                              </p:par>
+                            </p:childTnLst>
+                          </p:cTn>
+                        </p:par>
+                      </p:childTnLst>
+                    </p:cTn>
+                  </p:par>
+                  <p:par>
+                    <p:cTn id="31" fill="hold">
+                      <p:stCondLst>
+                        <p:cond delay="indefinite"/>
+                      </p:stCondLst>
+                      <p:childTnLst>
+                        <p:par>
+                          <p:cTn id="32" fill="hold">
+                            <p:stCondLst>
+                              <p:cond delay="0"/>
+                            </p:stCondLst>
+                            <p:childTnLst>
+                              <p:par>
+                                <p:cTn id="33" presetID="1" presetClass="entr" presetSubtype="0" fill="hold" grpId="0" nodeType="clickEffect">
+                                  <p:stCondLst>
+                                    <p:cond delay="0"/>
+                                  </p:stCondLst>
+                                  <p:childTnLst>
+                                    <p:set>
+                                      <p:cBhvr>
+                                        <p:cTn id="34" dur="1" fill="hold">
+                                          <p:stCondLst>
+                                            <p:cond delay="0"/>
+                                          </p:stCondLst>
+                                        </p:cTn>
+                                        <p:tgtEl>
+                                          <p:spTgt spid="3">
+                                            <p:txEl>
+                                              <p:pRg st="7" end="7"/>
+                                            </p:txEl>
+                                          </p:spTgt>
+                                        </p:tgtEl>
+                                        <p:attrNameLst>
+                                          <p:attrName>style.visibility</p:attrName>
+                                        </p:attrNameLst>
+                                      </p:cBhvr>
+                                      <p:to>
+                                        <p:strVal val="visible"/>
+                                      </p:to>
+                                    </p:set>
+                                  </p:childTnLst>
+                                </p:cTn>
+                              </p:par>
+                            </p:childTnLst>
+                          </p:cTn>
+                        </p:par>
+                      </p:childTnLst>
+                    </p:cTn>
+                  </p:par>
+                </p:childTnLst>
+              </p:cTn>
+              <p:prevCondLst>
+                <p:cond evt="onPrev" delay="0">
+                  <p:tgtEl>
+                    <p:sldTgt/>
+                  </p:tgtEl>
+                </p:cond>
+              </p:prevCondLst>
+              <p:nextCondLst>
+                <p:cond evt="onNext" delay="0">
+                  <p:tgtEl>
+                    <p:sldTgt/>
+                  </p:tgtEl>
+                </p:cond>
+              </p:nextCondLst>
+            </p:seq>
+          </p:childTnLst>
+        </p:cTn>
+      </p:par>
+    </p:tnLst>
+    <p:bldLst>
+      <p:bldP spid="3" grpId="0" uiExpand="1" build="p"/>
+    </p:bldLst>
+  </p:timing>
 </p:sld>
 </file>
 
@@ -5129,6 +5772,4675 @@
           <a:chExt cx="0" cy="0"/>
         </a:xfrm>
       </p:grpSpPr>
+      <p:sp>
+        <p:nvSpPr>
+          <p:cNvPr id="2" name="Title 1"/>
+          <p:cNvSpPr>
+            <a:spLocks noGrp="1"/>
+          </p:cNvSpPr>
+          <p:nvPr>
+            <p:ph type="title"/>
+          </p:nvPr>
+        </p:nvSpPr>
+        <p:spPr/>
+        <p:txBody>
+          <a:bodyPr/>
+          <a:lstStyle/>
+          <a:p>
+            <a:pPr lvl="0" indent="0" marL="0">
+              <a:buNone/>
+            </a:pPr>
+            <a:r>
+              <a:rPr/>
+              <a:t>Cerebral cortex: Lobes</a:t>
+            </a:r>
+          </a:p>
+        </p:txBody>
+      </p:sp>
+      <p:sp>
+        <p:nvSpPr>
+          <p:cNvPr id="3" name="Content Placeholder 2"/>
+          <p:cNvSpPr>
+            <a:spLocks noGrp="1"/>
+          </p:cNvSpPr>
+          <p:nvPr>
+            <p:ph idx="1" sz="half"/>
+          </p:nvPr>
+        </p:nvSpPr>
+        <p:spPr/>
+        <p:txBody>
+          <a:bodyPr/>
+          <a:lstStyle/>
+          <a:p>
+            <a:pPr lvl="0"/>
+            <a:r>
+              <a:rPr/>
+              <a:t>Lateral (sagittal) view</a:t>
+            </a:r>
+          </a:p>
+          <a:p>
+            <a:pPr lvl="0"/>
+            <a:r>
+              <a:rPr/>
+              <a:t>Lobes</a:t>
+            </a:r>
+          </a:p>
+          <a:p>
+            <a:pPr lvl="1"/>
+            <a:r>
+              <a:rPr/>
+              <a:t>Frontal</a:t>
+            </a:r>
+          </a:p>
+          <a:p>
+            <a:pPr lvl="1"/>
+            <a:r>
+              <a:rPr/>
+              <a:t>Temporal</a:t>
+            </a:r>
+          </a:p>
+          <a:p>
+            <a:pPr lvl="1"/>
+            <a:r>
+              <a:rPr/>
+              <a:t>Parietal</a:t>
+            </a:r>
+          </a:p>
+          <a:p>
+            <a:pPr lvl="1"/>
+            <a:r>
+              <a:rPr/>
+              <a:t>Occipital</a:t>
+            </a:r>
+          </a:p>
+        </p:txBody>
+      </p:sp>
+      <p:pic>
+        <p:nvPicPr>
+          <p:cNvPr descr="https://upload.wikimedia.org/wikipedia/commons/4/46/LobesCaptsLateral.png" id="0" name="Picture 1"/>
+          <p:cNvPicPr>
+            <a:picLocks noGrp="1" noChangeAspect="1"/>
+          </p:cNvPicPr>
+          <p:nvPr/>
+        </p:nvPicPr>
+        <p:blipFill>
+          <a:blip r:embed="rId2"/>
+          <a:stretch>
+            <a:fillRect/>
+          </a:stretch>
+        </p:blipFill>
+        <p:spPr bwMode="auto">
+          <a:xfrm>
+            <a:off x="4648200" y="1295400"/>
+            <a:ext cx="4038600" cy="2692400"/>
+          </a:xfrm>
+          <a:prstGeom prst="rect">
+            <a:avLst/>
+          </a:prstGeom>
+          <a:noFill/>
+          <a:ln w="9525">
+            <a:noFill/>
+            <a:headEnd/>
+            <a:tailEnd/>
+          </a:ln>
+        </p:spPr>
+      </p:pic>
+      <p:sp>
+        <p:nvSpPr>
+          <p:cNvPr id="1" name="TextBox 3"/>
+          <p:cNvSpPr txBox="1"/>
+          <p:nvPr/>
+        </p:nvSpPr>
+        <p:spPr>
+          <a:xfrm>
+            <a:off x="4648200" y="4076700"/>
+            <a:ext cx="4038600" cy="508000"/>
+          </a:xfrm>
+          <a:prstGeom prst="rect">
+            <a:avLst/>
+          </a:prstGeom>
+          <a:noFill/>
+        </p:spPr>
+        <p:txBody>
+          <a:bodyPr/>
+          <a:lstStyle/>
+          <a:p>
+            <a:pPr lvl="0" indent="0" marL="0" algn="ctr">
+              <a:buNone/>
+            </a:pPr>
+            <a:r>
+              <a:rPr/>
+              <a:t>By Sebastian023, CC BY-SA 3.0, https://commons.wikimedia.org/w/index.php?curid=21020857</a:t>
+            </a:r>
+          </a:p>
+        </p:txBody>
+      </p:sp>
+    </p:spTree>
+  </p:cSld>
+</p:sld>
+</file>
+
+<file path=ppt/slides/slide25.xml><?xml version="1.0" encoding="utf-8"?>
+<p:sld xmlns:a="http://schemas.openxmlformats.org/drawingml/2006/main" xmlns:r="http://schemas.openxmlformats.org/officeDocument/2006/relationships" xmlns:p="http://schemas.openxmlformats.org/presentationml/2006/main">
+  <p:cSld>
+    <p:spTree>
+      <p:nvGrpSpPr>
+        <p:cNvPr id="1" name=""/>
+        <p:cNvGrpSpPr/>
+        <p:nvPr/>
+      </p:nvGrpSpPr>
+      <p:grpSpPr>
+        <a:xfrm>
+          <a:off x="0" y="0"/>
+          <a:ext cx="0" cy="0"/>
+          <a:chOff x="0" y="0"/>
+          <a:chExt cx="0" cy="0"/>
+        </a:xfrm>
+      </p:grpSpPr>
+      <p:sp>
+        <p:nvSpPr>
+          <p:cNvPr id="2" name="Title 1"/>
+          <p:cNvSpPr>
+            <a:spLocks noGrp="1"/>
+          </p:cNvSpPr>
+          <p:nvPr>
+            <p:ph type="title"/>
+          </p:nvPr>
+        </p:nvSpPr>
+        <p:spPr/>
+        <p:txBody>
+          <a:bodyPr/>
+          <a:lstStyle/>
+          <a:p>
+            <a:pPr lvl="0" indent="0" marL="0">
+              <a:buNone/>
+            </a:pPr>
+            <a:r>
+              <a:rPr/>
+              <a:t>Cerebral cortex: Lobes</a:t>
+            </a:r>
+          </a:p>
+        </p:txBody>
+      </p:sp>
+      <p:pic>
+        <p:nvPicPr>
+          <p:cNvPr descr="https://upload.wikimedia.org/wikipedia/commons/thumb/6/6e/Human_skull_side_simplified_%28bones%29.svg/1200px-Human_skull_side_simplified_%28bones%29.svg.png" id="0" name="Picture 1"/>
+          <p:cNvPicPr>
+            <a:picLocks noGrp="1" noChangeAspect="1"/>
+          </p:cNvPicPr>
+          <p:nvPr/>
+        </p:nvPicPr>
+        <p:blipFill>
+          <a:blip r:embed="rId2"/>
+          <a:stretch>
+            <a:fillRect/>
+          </a:stretch>
+        </p:blipFill>
+        <p:spPr bwMode="auto">
+          <a:xfrm>
+            <a:off x="457200" y="1295400"/>
+            <a:ext cx="4038600" cy="2692400"/>
+          </a:xfrm>
+          <a:prstGeom prst="rect">
+            <a:avLst/>
+          </a:prstGeom>
+          <a:noFill/>
+          <a:ln w="9525">
+            <a:noFill/>
+            <a:headEnd/>
+            <a:tailEnd/>
+          </a:ln>
+        </p:spPr>
+      </p:pic>
+      <p:sp>
+        <p:nvSpPr>
+          <p:cNvPr id="1" name="TextBox 3"/>
+          <p:cNvSpPr txBox="1"/>
+          <p:nvPr/>
+        </p:nvSpPr>
+        <p:spPr>
+          <a:xfrm>
+            <a:off x="457200" y="4076700"/>
+            <a:ext cx="4038600" cy="508000"/>
+          </a:xfrm>
+          <a:prstGeom prst="rect">
+            <a:avLst/>
+          </a:prstGeom>
+          <a:noFill/>
+        </p:spPr>
+        <p:txBody>
+          <a:bodyPr/>
+          <a:lstStyle/>
+          <a:p>
+            <a:pPr lvl="0" indent="0" marL="0" algn="ctr">
+              <a:buNone/>
+            </a:pPr>
+            <a:r>
+              <a:rPr/>
+              <a:t>Bones of the skull from Wikipedia</a:t>
+            </a:r>
+          </a:p>
+        </p:txBody>
+      </p:sp>
+      <p:pic>
+        <p:nvPicPr>
+          <p:cNvPr descr="http://40.media.tumblr.com/tumblr_m1kpkr7Wsq1rn6pqko1_500.jpg" id="0" name="Picture 1"/>
+          <p:cNvPicPr>
+            <a:picLocks noGrp="1" noChangeAspect="1"/>
+          </p:cNvPicPr>
+          <p:nvPr/>
+        </p:nvPicPr>
+        <p:blipFill>
+          <a:blip r:embed="rId3"/>
+          <a:stretch>
+            <a:fillRect/>
+          </a:stretch>
+        </p:blipFill>
+        <p:spPr bwMode="auto">
+          <a:xfrm>
+            <a:off x="5334000" y="1193800"/>
+            <a:ext cx="2654300" cy="2882900"/>
+          </a:xfrm>
+          <a:prstGeom prst="rect">
+            <a:avLst/>
+          </a:prstGeom>
+          <a:noFill/>
+          <a:ln w="9525">
+            <a:noFill/>
+            <a:headEnd/>
+            <a:tailEnd/>
+          </a:ln>
+        </p:spPr>
+      </p:pic>
+      <p:sp>
+        <p:nvSpPr>
+          <p:cNvPr id="1" name="TextBox 3"/>
+          <p:cNvSpPr txBox="1"/>
+          <p:nvPr/>
+        </p:nvSpPr>
+        <p:spPr>
+          <a:xfrm>
+            <a:off x="4648200" y="4076700"/>
+            <a:ext cx="4038600" cy="508000"/>
+          </a:xfrm>
+          <a:prstGeom prst="rect">
+            <a:avLst/>
+          </a:prstGeom>
+          <a:noFill/>
+        </p:spPr>
+        <p:txBody>
+          <a:bodyPr/>
+          <a:lstStyle/>
+          <a:p>
+            <a:pPr lvl="0" indent="0" marL="0" algn="ctr">
+              <a:buNone/>
+            </a:pPr>
+            <a:r>
+              <a:rPr/>
+              <a:t>Alternative view of the relationship between bones of the skull and lobes of the cerebral cortex</a:t>
+            </a:r>
+          </a:p>
+        </p:txBody>
+      </p:sp>
+    </p:spTree>
+  </p:cSld>
+</p:sld>
+</file>
+
+<file path=ppt/slides/slide26.xml><?xml version="1.0" encoding="utf-8"?>
+<p:sld xmlns:a="http://schemas.openxmlformats.org/drawingml/2006/main" xmlns:r="http://schemas.openxmlformats.org/officeDocument/2006/relationships" xmlns:p="http://schemas.openxmlformats.org/presentationml/2006/main">
+  <p:cSld>
+    <p:spTree>
+      <p:nvGrpSpPr>
+        <p:cNvPr id="1" name=""/>
+        <p:cNvGrpSpPr/>
+        <p:nvPr/>
+      </p:nvGrpSpPr>
+      <p:grpSpPr>
+        <a:xfrm>
+          <a:off x="0" y="0"/>
+          <a:ext cx="0" cy="0"/>
+          <a:chOff x="0" y="0"/>
+          <a:chExt cx="0" cy="0"/>
+        </a:xfrm>
+      </p:grpSpPr>
+      <p:sp>
+        <p:nvSpPr>
+          <p:cNvPr id="2" name="Title 1"/>
+          <p:cNvSpPr>
+            <a:spLocks noGrp="1"/>
+          </p:cNvSpPr>
+          <p:nvPr>
+            <p:ph type="title"/>
+          </p:nvPr>
+        </p:nvSpPr>
+        <p:spPr/>
+        <p:txBody>
+          <a:bodyPr/>
+          <a:lstStyle/>
+          <a:p>
+            <a:pPr lvl="0" indent="0" marL="0">
+              <a:buNone/>
+            </a:pPr>
+            <a:r>
+              <a:rPr/>
+              <a:t>Cerebral cortex: Lobes</a:t>
+            </a:r>
+          </a:p>
+        </p:txBody>
+      </p:sp>
+      <p:sp>
+        <p:nvSpPr>
+          <p:cNvPr id="3" name="Content Placeholder 2"/>
+          <p:cNvSpPr>
+            <a:spLocks noGrp="1"/>
+          </p:cNvSpPr>
+          <p:nvPr>
+            <p:ph idx="1" sz="half"/>
+          </p:nvPr>
+        </p:nvSpPr>
+        <p:spPr/>
+        <p:txBody>
+          <a:bodyPr/>
+          <a:lstStyle/>
+          <a:p>
+            <a:pPr lvl="0"/>
+            <a:r>
+              <a:rPr/>
+              <a:t>Frontal: Motor cortex (M1)</a:t>
+            </a:r>
+          </a:p>
+          <a:p>
+            <a:pPr lvl="0"/>
+            <a:r>
+              <a:rPr/>
+              <a:t>Temporal: Auditory cortex (A1)</a:t>
+            </a:r>
+          </a:p>
+          <a:p>
+            <a:pPr lvl="0"/>
+            <a:r>
+              <a:rPr/>
+              <a:t>Parietal: Somatosensory cortex (S1)</a:t>
+            </a:r>
+          </a:p>
+          <a:p>
+            <a:pPr lvl="0"/>
+            <a:r>
+              <a:rPr/>
+              <a:t>Occipital: Visual cortex (V1)</a:t>
+            </a:r>
+          </a:p>
+          <a:p>
+            <a:pPr lvl="0"/>
+            <a:r>
+              <a:rPr/>
+              <a:t>Insula: Gustatory</a:t>
+            </a:r>
+          </a:p>
+        </p:txBody>
+      </p:sp>
+      <p:pic>
+        <p:nvPicPr>
+          <p:cNvPr descr="https://upload.wikimedia.org/wikipedia/commons/4/46/LobesCaptsLateral.png" id="0" name="Picture 1"/>
+          <p:cNvPicPr>
+            <a:picLocks noGrp="1" noChangeAspect="1"/>
+          </p:cNvPicPr>
+          <p:nvPr/>
+        </p:nvPicPr>
+        <p:blipFill>
+          <a:blip r:embed="rId2"/>
+          <a:stretch>
+            <a:fillRect/>
+          </a:stretch>
+        </p:blipFill>
+        <p:spPr bwMode="auto">
+          <a:xfrm>
+            <a:off x="4648200" y="1295400"/>
+            <a:ext cx="4038600" cy="2692400"/>
+          </a:xfrm>
+          <a:prstGeom prst="rect">
+            <a:avLst/>
+          </a:prstGeom>
+          <a:noFill/>
+          <a:ln w="9525">
+            <a:noFill/>
+            <a:headEnd/>
+            <a:tailEnd/>
+          </a:ln>
+        </p:spPr>
+      </p:pic>
+      <p:sp>
+        <p:nvSpPr>
+          <p:cNvPr id="1" name="TextBox 3"/>
+          <p:cNvSpPr txBox="1"/>
+          <p:nvPr/>
+        </p:nvSpPr>
+        <p:spPr>
+          <a:xfrm>
+            <a:off x="4648200" y="4076700"/>
+            <a:ext cx="4038600" cy="508000"/>
+          </a:xfrm>
+          <a:prstGeom prst="rect">
+            <a:avLst/>
+          </a:prstGeom>
+          <a:noFill/>
+        </p:spPr>
+        <p:txBody>
+          <a:bodyPr/>
+          <a:lstStyle/>
+          <a:p>
+            <a:pPr lvl="0" indent="0" marL="0" algn="ctr">
+              <a:buNone/>
+            </a:pPr>
+            <a:r>
+              <a:rPr/>
+              <a:t>By Sebastian023, CC BY-SA 3.0, https://commons.wikimedia.org/w/index.php?curid=21020857</a:t>
+            </a:r>
+          </a:p>
+        </p:txBody>
+      </p:sp>
+    </p:spTree>
+  </p:cSld>
+</p:sld>
+</file>
+
+<file path=ppt/slides/slide27.xml><?xml version="1.0" encoding="utf-8"?>
+<p:sld xmlns:a="http://schemas.openxmlformats.org/drawingml/2006/main" xmlns:r="http://schemas.openxmlformats.org/officeDocument/2006/relationships" xmlns:p="http://schemas.openxmlformats.org/presentationml/2006/main">
+  <p:cSld>
+    <p:spTree>
+      <p:nvGrpSpPr>
+        <p:cNvPr id="1" name=""/>
+        <p:cNvGrpSpPr/>
+        <p:nvPr/>
+      </p:nvGrpSpPr>
+      <p:grpSpPr>
+        <a:xfrm>
+          <a:off x="0" y="0"/>
+          <a:ext cx="0" cy="0"/>
+          <a:chOff x="0" y="0"/>
+          <a:chExt cx="0" cy="0"/>
+        </a:xfrm>
+      </p:grpSpPr>
+      <p:sp>
+        <p:nvSpPr>
+          <p:cNvPr id="2" name="Title 1"/>
+          <p:cNvSpPr>
+            <a:spLocks noGrp="1"/>
+          </p:cNvSpPr>
+          <p:nvPr>
+            <p:ph type="title"/>
+          </p:nvPr>
+        </p:nvSpPr>
+        <p:spPr/>
+        <p:txBody>
+          <a:bodyPr/>
+          <a:lstStyle/>
+          <a:p>
+            <a:pPr lvl="0" indent="0" marL="0">
+              <a:buNone/>
+            </a:pPr>
+            <a:r>
+              <a:rPr/>
+              <a:t>Cerebral cortex: M1</a:t>
+            </a:r>
+          </a:p>
+        </p:txBody>
+      </p:sp>
+      <p:pic>
+        <p:nvPicPr>
+          <p:cNvPr descr="https://upload.wikimedia.org/wikipedia/commons/3/33/Human_motor_cortex.jpg" id="0" name="Picture 1"/>
+          <p:cNvPicPr>
+            <a:picLocks noGrp="1" noChangeAspect="1"/>
+          </p:cNvPicPr>
+          <p:nvPr/>
+        </p:nvPicPr>
+        <p:blipFill>
+          <a:blip r:embed="rId2"/>
+          <a:stretch>
+            <a:fillRect/>
+          </a:stretch>
+        </p:blipFill>
+        <p:spPr bwMode="auto">
+          <a:xfrm>
+            <a:off x="2413000" y="1193800"/>
+            <a:ext cx="4318000" cy="2882900"/>
+          </a:xfrm>
+          <a:prstGeom prst="rect">
+            <a:avLst/>
+          </a:prstGeom>
+          <a:noFill/>
+          <a:ln w="9525">
+            <a:noFill/>
+            <a:headEnd/>
+            <a:tailEnd/>
+          </a:ln>
+        </p:spPr>
+      </p:pic>
+      <p:sp>
+        <p:nvSpPr>
+          <p:cNvPr id="1" name="TextBox 3"/>
+          <p:cNvSpPr txBox="1"/>
+          <p:nvPr/>
+        </p:nvSpPr>
+        <p:spPr>
+          <a:xfrm>
+            <a:off x="457200" y="4076700"/>
+            <a:ext cx="8229600" cy="508000"/>
+          </a:xfrm>
+          <a:prstGeom prst="rect">
+            <a:avLst/>
+          </a:prstGeom>
+          <a:noFill/>
+        </p:spPr>
+        <p:txBody>
+          <a:bodyPr/>
+          <a:lstStyle/>
+          <a:p>
+            <a:pPr lvl="0" indent="0" marL="0" algn="ctr">
+              <a:buNone/>
+            </a:pPr>
+            <a:r>
+              <a:rPr/>
+              <a:t>By Cortex sensorimoteur1.jpg: Pancratderivative work: Iamozy - Own work, This file was derived from: Cortex sensorimoteur1.jpg:, CC BY-SA 3.0, https://commons.wikimedia.org/w/index.php?curid=33981076</a:t>
+            </a:r>
+          </a:p>
+        </p:txBody>
+      </p:sp>
+    </p:spTree>
+  </p:cSld>
+</p:sld>
+</file>
+
+<file path=ppt/slides/slide28.xml><?xml version="1.0" encoding="utf-8"?>
+<p:sld xmlns:a="http://schemas.openxmlformats.org/drawingml/2006/main" xmlns:r="http://schemas.openxmlformats.org/officeDocument/2006/relationships" xmlns:p="http://schemas.openxmlformats.org/presentationml/2006/main">
+  <p:cSld>
+    <p:spTree>
+      <p:nvGrpSpPr>
+        <p:cNvPr id="1" name=""/>
+        <p:cNvGrpSpPr/>
+        <p:nvPr/>
+      </p:nvGrpSpPr>
+      <p:grpSpPr>
+        <a:xfrm>
+          <a:off x="0" y="0"/>
+          <a:ext cx="0" cy="0"/>
+          <a:chOff x="0" y="0"/>
+          <a:chExt cx="0" cy="0"/>
+        </a:xfrm>
+      </p:grpSpPr>
+      <p:sp>
+        <p:nvSpPr>
+          <p:cNvPr id="2" name="Title 1"/>
+          <p:cNvSpPr>
+            <a:spLocks noGrp="1"/>
+          </p:cNvSpPr>
+          <p:nvPr>
+            <p:ph type="title"/>
+          </p:nvPr>
+        </p:nvSpPr>
+        <p:spPr/>
+        <p:txBody>
+          <a:bodyPr/>
+          <a:lstStyle/>
+          <a:p>
+            <a:pPr lvl="0" indent="0" marL="0">
+              <a:buNone/>
+            </a:pPr>
+            <a:r>
+              <a:rPr/>
+              <a:t>Cerebral cortex: A1</a:t>
+            </a:r>
+          </a:p>
+        </p:txBody>
+      </p:sp>
+      <p:pic>
+        <p:nvPicPr>
+          <p:cNvPr descr="https://upload.wikimedia.org/wikipedia/commons/thumb/e/ec/Auditory_Cortex_Frequency_Mapping.svg/2560px-Auditory_Cortex_Frequency_Mapping.svg.png" id="0" name="Picture 1"/>
+          <p:cNvPicPr>
+            <a:picLocks noGrp="1" noChangeAspect="1"/>
+          </p:cNvPicPr>
+          <p:nvPr/>
+        </p:nvPicPr>
+        <p:blipFill>
+          <a:blip r:embed="rId2"/>
+          <a:stretch>
+            <a:fillRect/>
+          </a:stretch>
+        </p:blipFill>
+        <p:spPr bwMode="auto">
+          <a:xfrm>
+            <a:off x="2413000" y="1193800"/>
+            <a:ext cx="4318000" cy="2882900"/>
+          </a:xfrm>
+          <a:prstGeom prst="rect">
+            <a:avLst/>
+          </a:prstGeom>
+          <a:noFill/>
+          <a:ln w="9525">
+            <a:noFill/>
+            <a:headEnd/>
+            <a:tailEnd/>
+          </a:ln>
+        </p:spPr>
+      </p:pic>
+      <p:sp>
+        <p:nvSpPr>
+          <p:cNvPr id="1" name="TextBox 3"/>
+          <p:cNvSpPr txBox="1"/>
+          <p:nvPr/>
+        </p:nvSpPr>
+        <p:spPr>
+          <a:xfrm>
+            <a:off x="457200" y="4076700"/>
+            <a:ext cx="8229600" cy="508000"/>
+          </a:xfrm>
+          <a:prstGeom prst="rect">
+            <a:avLst/>
+          </a:prstGeom>
+          <a:noFill/>
+        </p:spPr>
+        <p:txBody>
+          <a:bodyPr/>
+          <a:lstStyle/>
+          <a:p>
+            <a:pPr lvl="0" indent="0" marL="0" algn="ctr">
+              <a:buNone/>
+            </a:pPr>
+            <a:r>
+              <a:rPr/>
+              <a:t>By Chittka L, Brockmann - Perception Space—The Final Frontier, A PLoS Biology Vol. 3, No. 4, e137 doi:10.1371/journal.pbio.0030137 ([1]/[2]), vectorised by Inductiveload, CC BY-SA 2.5, https://commons.wikimedia.org/w/index.php?curid=5958918</a:t>
+            </a:r>
+          </a:p>
+        </p:txBody>
+      </p:sp>
+    </p:spTree>
+  </p:cSld>
+</p:sld>
+</file>
+
+<file path=ppt/slides/slide29.xml><?xml version="1.0" encoding="utf-8"?>
+<p:sld xmlns:a="http://schemas.openxmlformats.org/drawingml/2006/main" xmlns:r="http://schemas.openxmlformats.org/officeDocument/2006/relationships" xmlns:p="http://schemas.openxmlformats.org/presentationml/2006/main">
+  <p:cSld>
+    <p:spTree>
+      <p:nvGrpSpPr>
+        <p:cNvPr id="1" name=""/>
+        <p:cNvGrpSpPr/>
+        <p:nvPr/>
+      </p:nvGrpSpPr>
+      <p:grpSpPr>
+        <a:xfrm>
+          <a:off x="0" y="0"/>
+          <a:ext cx="0" cy="0"/>
+          <a:chOff x="0" y="0"/>
+          <a:chExt cx="0" cy="0"/>
+        </a:xfrm>
+      </p:grpSpPr>
+      <p:sp>
+        <p:nvSpPr>
+          <p:cNvPr id="2" name="Title 1"/>
+          <p:cNvSpPr>
+            <a:spLocks noGrp="1"/>
+          </p:cNvSpPr>
+          <p:nvPr>
+            <p:ph type="title"/>
+          </p:nvPr>
+        </p:nvSpPr>
+        <p:spPr/>
+        <p:txBody>
+          <a:bodyPr/>
+          <a:lstStyle/>
+          <a:p>
+            <a:pPr lvl="0" indent="0" marL="0">
+              <a:buNone/>
+            </a:pPr>
+            <a:r>
+              <a:rPr/>
+              <a:t>Cerebral cortex: S1</a:t>
+            </a:r>
+          </a:p>
+        </p:txBody>
+      </p:sp>
+      <p:pic>
+        <p:nvPicPr>
+          <p:cNvPr descr="https://upload.wikimedia.org/wikipedia/commons/6/66/Postcentral_gyrus.png" id="0" name="Picture 1"/>
+          <p:cNvPicPr>
+            <a:picLocks noGrp="1" noChangeAspect="1"/>
+          </p:cNvPicPr>
+          <p:nvPr/>
+        </p:nvPicPr>
+        <p:blipFill>
+          <a:blip r:embed="rId2"/>
+          <a:stretch>
+            <a:fillRect/>
+          </a:stretch>
+        </p:blipFill>
+        <p:spPr bwMode="auto">
+          <a:xfrm>
+            <a:off x="2413000" y="1193800"/>
+            <a:ext cx="4318000" cy="2882900"/>
+          </a:xfrm>
+          <a:prstGeom prst="rect">
+            <a:avLst/>
+          </a:prstGeom>
+          <a:noFill/>
+          <a:ln w="9525">
+            <a:noFill/>
+            <a:headEnd/>
+            <a:tailEnd/>
+          </a:ln>
+        </p:spPr>
+      </p:pic>
+      <p:sp>
+        <p:nvSpPr>
+          <p:cNvPr id="1" name="TextBox 3"/>
+          <p:cNvSpPr txBox="1"/>
+          <p:nvPr/>
+        </p:nvSpPr>
+        <p:spPr>
+          <a:xfrm>
+            <a:off x="457200" y="4076700"/>
+            <a:ext cx="8229600" cy="508000"/>
+          </a:xfrm>
+          <a:prstGeom prst="rect">
+            <a:avLst/>
+          </a:prstGeom>
+          <a:noFill/>
+        </p:spPr>
+        <p:txBody>
+          <a:bodyPr/>
+          <a:lstStyle/>
+          <a:p>
+            <a:pPr lvl="0" indent="0" marL="0" algn="ctr">
+              <a:buNone/>
+            </a:pPr>
+            <a:r>
+              <a:rPr/>
+              <a:t>By Jimhutchins (talk) - The original image was uploaded on en.wikipedia as en:Image:Postcentral_gyrus.png, CC BY-SA 3.0, https://commons.wikimedia.org/w/index.php?curid=4481990</a:t>
+            </a:r>
+          </a:p>
+        </p:txBody>
+      </p:sp>
+    </p:spTree>
+  </p:cSld>
+</p:sld>
+</file>
+
+<file path=ppt/slides/slide3.xml><?xml version="1.0" encoding="utf-8"?>
+<p:sld xmlns:a="http://schemas.openxmlformats.org/drawingml/2006/main" xmlns:r="http://schemas.openxmlformats.org/officeDocument/2006/relationships" xmlns:p="http://schemas.openxmlformats.org/presentationml/2006/main">
+  <p:cSld>
+    <p:spTree>
+      <p:nvGrpSpPr>
+        <p:cNvPr id="1" name=""/>
+        <p:cNvGrpSpPr/>
+        <p:nvPr/>
+      </p:nvGrpSpPr>
+      <p:grpSpPr>
+        <a:xfrm>
+          <a:off x="0" y="0"/>
+          <a:ext cx="0" cy="0"/>
+          <a:chOff x="0" y="0"/>
+          <a:chExt cx="0" cy="0"/>
+        </a:xfrm>
+      </p:grpSpPr>
+      <p:sp>
+        <p:nvSpPr>
+          <p:cNvPr id="3" name="Content Placeholder 2"/>
+          <p:cNvSpPr>
+            <a:spLocks noGrp="1"/>
+          </p:cNvSpPr>
+          <p:nvPr>
+            <p:ph idx="1"/>
+          </p:nvPr>
+        </p:nvSpPr>
+        <p:spPr/>
+        <p:txBody>
+          <a:bodyPr/>
+          <a:lstStyle/>
+          <a:p>
+            <a:pPr lvl="0" indent="0" marL="0">
+              <a:buNone/>
+            </a:pPr>
+            <a:r>
+              <a:rPr>
+                <a:hlinkClick r:id="rId2"/>
+              </a:rPr>
+              <a:t>https://www.youtube.com/embed/snO68aJTOpM</a:t>
+            </a:r>
+          </a:p>
+          <a:p>
+            <a:pPr lvl="0" indent="0" marL="0">
+              <a:buNone/>
+            </a:pPr>
+            <a:r>
+              <a:rPr/>
+              <a:t>– ctdalilah (2006)</a:t>
+            </a:r>
+          </a:p>
+        </p:txBody>
+      </p:sp>
+    </p:spTree>
+  </p:cSld>
+</p:sld>
+</file>
+
+<file path=ppt/slides/slide30.xml><?xml version="1.0" encoding="utf-8"?>
+<p:sld xmlns:a="http://schemas.openxmlformats.org/drawingml/2006/main" xmlns:r="http://schemas.openxmlformats.org/officeDocument/2006/relationships" xmlns:p="http://schemas.openxmlformats.org/presentationml/2006/main">
+  <p:cSld>
+    <p:spTree>
+      <p:nvGrpSpPr>
+        <p:cNvPr id="1" name=""/>
+        <p:cNvGrpSpPr/>
+        <p:nvPr/>
+      </p:nvGrpSpPr>
+      <p:grpSpPr>
+        <a:xfrm>
+          <a:off x="0" y="0"/>
+          <a:ext cx="0" cy="0"/>
+          <a:chOff x="0" y="0"/>
+          <a:chExt cx="0" cy="0"/>
+        </a:xfrm>
+      </p:grpSpPr>
+      <p:sp>
+        <p:nvSpPr>
+          <p:cNvPr id="2" name="Title 1"/>
+          <p:cNvSpPr>
+            <a:spLocks noGrp="1"/>
+          </p:cNvSpPr>
+          <p:nvPr>
+            <p:ph type="title"/>
+          </p:nvPr>
+        </p:nvSpPr>
+        <p:spPr/>
+        <p:txBody>
+          <a:bodyPr/>
+          <a:lstStyle/>
+          <a:p>
+            <a:pPr lvl="0" indent="0" marL="0">
+              <a:buNone/>
+            </a:pPr>
+            <a:r>
+              <a:rPr/>
+              <a:t>Cerebral cortex: V1</a:t>
+            </a:r>
+          </a:p>
+        </p:txBody>
+      </p:sp>
+      <p:pic>
+        <p:nvPicPr>
+          <p:cNvPr descr="https://upload.wikimedia.org/wikipedia/commons/3/33/Brodmann_Cytoarchitectonics_17.png" id="0" name="Picture 1"/>
+          <p:cNvPicPr>
+            <a:picLocks noGrp="1" noChangeAspect="1"/>
+          </p:cNvPicPr>
+          <p:nvPr/>
+        </p:nvPicPr>
+        <p:blipFill>
+          <a:blip r:embed="rId2"/>
+          <a:stretch>
+            <a:fillRect/>
+          </a:stretch>
+        </p:blipFill>
+        <p:spPr bwMode="auto">
+          <a:xfrm>
+            <a:off x="2413000" y="1193800"/>
+            <a:ext cx="4318000" cy="2882900"/>
+          </a:xfrm>
+          <a:prstGeom prst="rect">
+            <a:avLst/>
+          </a:prstGeom>
+          <a:noFill/>
+          <a:ln w="9525">
+            <a:noFill/>
+            <a:headEnd/>
+            <a:tailEnd/>
+          </a:ln>
+        </p:spPr>
+      </p:pic>
+      <p:sp>
+        <p:nvSpPr>
+          <p:cNvPr id="1" name="TextBox 3"/>
+          <p:cNvSpPr txBox="1"/>
+          <p:nvPr/>
+        </p:nvSpPr>
+        <p:spPr>
+          <a:xfrm>
+            <a:off x="457200" y="4076700"/>
+            <a:ext cx="8229600" cy="508000"/>
+          </a:xfrm>
+          <a:prstGeom prst="rect">
+            <a:avLst/>
+          </a:prstGeom>
+          <a:noFill/>
+        </p:spPr>
+        <p:txBody>
+          <a:bodyPr/>
+          <a:lstStyle/>
+          <a:p>
+            <a:pPr lvl="0" indent="0" marL="0" algn="ctr">
+              <a:buNone/>
+            </a:pPr>
+            <a:r>
+              <a:rPr/>
+              <a:t>By Brodmann - File:Brodmann_Cytoarchitectonics.PNG, Public Domain, https://commons.wikimedia.org/w/index.php?curid=8221432</a:t>
+            </a:r>
+          </a:p>
+        </p:txBody>
+      </p:sp>
+    </p:spTree>
+  </p:cSld>
+</p:sld>
+</file>
+
+<file path=ppt/slides/slide31.xml><?xml version="1.0" encoding="utf-8"?>
+<p:sld xmlns:a="http://schemas.openxmlformats.org/drawingml/2006/main" xmlns:r="http://schemas.openxmlformats.org/officeDocument/2006/relationships" xmlns:p="http://schemas.openxmlformats.org/presentationml/2006/main">
+  <p:cSld>
+    <p:spTree>
+      <p:nvGrpSpPr>
+        <p:cNvPr id="1" name=""/>
+        <p:cNvGrpSpPr/>
+        <p:nvPr/>
+      </p:nvGrpSpPr>
+      <p:grpSpPr>
+        <a:xfrm>
+          <a:off x="0" y="0"/>
+          <a:ext cx="0" cy="0"/>
+          <a:chOff x="0" y="0"/>
+          <a:chExt cx="0" cy="0"/>
+        </a:xfrm>
+      </p:grpSpPr>
+      <p:sp>
+        <p:nvSpPr>
+          <p:cNvPr id="2" name="Title 1"/>
+          <p:cNvSpPr>
+            <a:spLocks noGrp="1"/>
+          </p:cNvSpPr>
+          <p:nvPr>
+            <p:ph type="title"/>
+          </p:nvPr>
+        </p:nvSpPr>
+        <p:spPr/>
+        <p:txBody>
+          <a:bodyPr/>
+          <a:lstStyle/>
+          <a:p>
+            <a:pPr lvl="0" indent="0" marL="0">
+              <a:buNone/>
+            </a:pPr>
+            <a:r>
+              <a:rPr/>
+              <a:t>Cerebral cortex: Insula</a:t>
+            </a:r>
+          </a:p>
+        </p:txBody>
+      </p:sp>
+      <p:sp>
+        <p:nvSpPr>
+          <p:cNvPr id="3" name="Content Placeholder 2"/>
+          <p:cNvSpPr>
+            <a:spLocks noGrp="1"/>
+          </p:cNvSpPr>
+          <p:nvPr>
+            <p:ph idx="1" sz="half"/>
+          </p:nvPr>
+        </p:nvSpPr>
+        <p:spPr/>
+        <p:txBody>
+          <a:bodyPr/>
+          <a:lstStyle/>
+          <a:p>
+            <a:pPr lvl="0"/>
+            <a:r>
+              <a:rPr/>
+              <a:t>Primary gustatory cortex</a:t>
+            </a:r>
+          </a:p>
+          <a:p>
+            <a:pPr lvl="0"/>
+            <a:r>
+              <a:rPr/>
+              <a:t>Self-awareness, interpersonal experiences, motor control, interoception</a:t>
+            </a:r>
+          </a:p>
+        </p:txBody>
+      </p:sp>
+      <p:pic>
+        <p:nvPicPr>
+          <p:cNvPr descr="https://ars.els-cdn.com/content/image/1-s2.0-S0166223617300176-gr1.jpg" id="0" name="Picture 1"/>
+          <p:cNvPicPr>
+            <a:picLocks noGrp="1" noChangeAspect="1"/>
+          </p:cNvPicPr>
+          <p:nvPr/>
+        </p:nvPicPr>
+        <p:blipFill>
+          <a:blip r:embed="rId2"/>
+          <a:stretch>
+            <a:fillRect/>
+          </a:stretch>
+        </p:blipFill>
+        <p:spPr bwMode="auto">
+          <a:xfrm>
+            <a:off x="4876800" y="1193800"/>
+            <a:ext cx="3568700" cy="2882900"/>
+          </a:xfrm>
+          <a:prstGeom prst="rect">
+            <a:avLst/>
+          </a:prstGeom>
+          <a:noFill/>
+          <a:ln w="9525">
+            <a:noFill/>
+            <a:headEnd/>
+            <a:tailEnd/>
+          </a:ln>
+        </p:spPr>
+      </p:pic>
+      <p:sp>
+        <p:nvSpPr>
+          <p:cNvPr id="1" name="TextBox 3"/>
+          <p:cNvSpPr txBox="1"/>
+          <p:nvPr/>
+        </p:nvSpPr>
+        <p:spPr>
+          <a:xfrm>
+            <a:off x="4648200" y="4076700"/>
+            <a:ext cx="4038600" cy="508000"/>
+          </a:xfrm>
+          <a:prstGeom prst="rect">
+            <a:avLst/>
+          </a:prstGeom>
+          <a:noFill/>
+        </p:spPr>
+        <p:txBody>
+          <a:bodyPr/>
+          <a:lstStyle/>
+          <a:p>
+            <a:pPr lvl="0" indent="0" marL="0" algn="ctr">
+              <a:buNone/>
+            </a:pPr>
+            <a:r>
+              <a:rPr/>
+              <a:t>Namkung et al. (2017) Figure 1</a:t>
+            </a:r>
+          </a:p>
+        </p:txBody>
+      </p:sp>
+    </p:spTree>
+  </p:cSld>
+</p:sld>
+</file>
+
+<file path=ppt/slides/slide32.xml><?xml version="1.0" encoding="utf-8"?>
+<p:sld xmlns:a="http://schemas.openxmlformats.org/drawingml/2006/main" xmlns:r="http://schemas.openxmlformats.org/officeDocument/2006/relationships" xmlns:p="http://schemas.openxmlformats.org/presentationml/2006/main">
+  <p:cSld>
+    <p:spTree>
+      <p:nvGrpSpPr>
+        <p:cNvPr id="1" name=""/>
+        <p:cNvGrpSpPr/>
+        <p:nvPr/>
+      </p:nvGrpSpPr>
+      <p:grpSpPr>
+        <a:xfrm>
+          <a:off x="0" y="0"/>
+          <a:ext cx="0" cy="0"/>
+          <a:chOff x="0" y="0"/>
+          <a:chExt cx="0" cy="0"/>
+        </a:xfrm>
+      </p:grpSpPr>
+      <p:sp>
+        <p:nvSpPr>
+          <p:cNvPr id="2" name="Title 1"/>
+          <p:cNvSpPr>
+            <a:spLocks noGrp="1"/>
+          </p:cNvSpPr>
+          <p:nvPr>
+            <p:ph type="title"/>
+          </p:nvPr>
+        </p:nvSpPr>
+        <p:spPr/>
+        <p:txBody>
+          <a:bodyPr/>
+          <a:lstStyle/>
+          <a:p>
+            <a:pPr lvl="0" indent="0" marL="0">
+              <a:buNone/>
+            </a:pPr>
+            <a:r>
+              <a:rPr/>
+              <a:t>Cerebral cortex: Brodmann areas</a:t>
+            </a:r>
+          </a:p>
+        </p:txBody>
+      </p:sp>
+      <p:sp>
+        <p:nvSpPr>
+          <p:cNvPr id="3" name="Content Placeholder 2"/>
+          <p:cNvSpPr>
+            <a:spLocks noGrp="1"/>
+          </p:cNvSpPr>
+          <p:nvPr>
+            <p:ph idx="1" sz="half"/>
+          </p:nvPr>
+        </p:nvSpPr>
+        <p:spPr/>
+        <p:txBody>
+          <a:bodyPr/>
+          <a:lstStyle/>
+          <a:p>
+            <a:pPr lvl="0"/>
+            <a:r>
+              <a:rPr>
+                <a:hlinkClick r:id="rId2"/>
+              </a:rPr>
+              <a:t>Korbinian Brodmann</a:t>
+            </a:r>
+          </a:p>
+          <a:p>
+            <a:pPr lvl="0"/>
+            <a:r>
+              <a:rPr/>
+              <a:t>Cytoarchitecture</a:t>
+            </a:r>
+          </a:p>
+          <a:p>
+            <a:pPr lvl="0"/>
+            <a:r>
+              <a:rPr/>
+              <a:t>Examples</a:t>
+            </a:r>
+          </a:p>
+          <a:p>
+            <a:pPr lvl="1"/>
+            <a:r>
+              <a:rPr/>
+              <a:t>BA 41 &amp; 42: audition; BA 44 &amp; 45: Broca’s area</a:t>
+            </a:r>
+          </a:p>
+          <a:p>
+            <a:pPr lvl="1"/>
+            <a:r>
+              <a:rPr/>
+              <a:t>BA 17, 18: vision</a:t>
+            </a:r>
+          </a:p>
+        </p:txBody>
+      </p:sp>
+      <p:pic>
+        <p:nvPicPr>
+          <p:cNvPr descr="https://upload.wikimedia.org/wikipedia/commons/0/09/Brodmann-areas.png" id="0" name="Picture 1"/>
+          <p:cNvPicPr>
+            <a:picLocks noGrp="1" noChangeAspect="1"/>
+          </p:cNvPicPr>
+          <p:nvPr/>
+        </p:nvPicPr>
+        <p:blipFill>
+          <a:blip r:embed="rId3"/>
+          <a:stretch>
+            <a:fillRect/>
+          </a:stretch>
+        </p:blipFill>
+        <p:spPr bwMode="auto">
+          <a:xfrm>
+            <a:off x="4648200" y="1295400"/>
+            <a:ext cx="4038600" cy="2692400"/>
+          </a:xfrm>
+          <a:prstGeom prst="rect">
+            <a:avLst/>
+          </a:prstGeom>
+          <a:noFill/>
+          <a:ln w="9525">
+            <a:noFill/>
+            <a:headEnd/>
+            <a:tailEnd/>
+          </a:ln>
+        </p:spPr>
+      </p:pic>
+      <p:sp>
+        <p:nvSpPr>
+          <p:cNvPr id="1" name="TextBox 3"/>
+          <p:cNvSpPr txBox="1"/>
+          <p:nvPr/>
+        </p:nvSpPr>
+        <p:spPr>
+          <a:xfrm>
+            <a:off x="4648200" y="4076700"/>
+            <a:ext cx="4038600" cy="508000"/>
+          </a:xfrm>
+          <a:prstGeom prst="rect">
+            <a:avLst/>
+          </a:prstGeom>
+          <a:noFill/>
+        </p:spPr>
+        <p:txBody>
+          <a:bodyPr/>
+          <a:lstStyle/>
+          <a:p>
+            <a:pPr lvl="0" indent="0" marL="0" algn="ctr">
+              <a:buNone/>
+            </a:pPr>
+            <a:r>
+              <a:rPr/>
+              <a:t>Brodmann areas</a:t>
+            </a:r>
+          </a:p>
+        </p:txBody>
+      </p:sp>
+    </p:spTree>
+  </p:cSld>
+</p:sld>
+</file>
+
+<file path=ppt/slides/slide33.xml><?xml version="1.0" encoding="utf-8"?>
+<p:sld xmlns:a="http://schemas.openxmlformats.org/drawingml/2006/main" xmlns:r="http://schemas.openxmlformats.org/officeDocument/2006/relationships" xmlns:p="http://schemas.openxmlformats.org/presentationml/2006/main">
+  <p:cSld>
+    <p:spTree>
+      <p:nvGrpSpPr>
+        <p:cNvPr id="1" name=""/>
+        <p:cNvGrpSpPr/>
+        <p:nvPr/>
+      </p:nvGrpSpPr>
+      <p:grpSpPr>
+        <a:xfrm>
+          <a:off x="0" y="0"/>
+          <a:ext cx="0" cy="0"/>
+          <a:chOff x="0" y="0"/>
+          <a:chExt cx="0" cy="0"/>
+        </a:xfrm>
+      </p:grpSpPr>
+      <p:sp>
+        <p:nvSpPr>
+          <p:cNvPr id="2" name="Title 1"/>
+          <p:cNvSpPr>
+            <a:spLocks noGrp="1"/>
+          </p:cNvSpPr>
+          <p:nvPr>
+            <p:ph type="title"/>
+          </p:nvPr>
+        </p:nvSpPr>
+        <p:spPr/>
+        <p:txBody>
+          <a:bodyPr/>
+          <a:lstStyle/>
+          <a:p>
+            <a:pPr lvl="0" indent="0" marL="0">
+              <a:buNone/>
+            </a:pPr>
+            <a:r>
+              <a:rPr/>
+              <a:t>Cerebrum: Subcortical</a:t>
+            </a:r>
+          </a:p>
+        </p:txBody>
+      </p:sp>
+      <p:sp>
+        <p:nvSpPr>
+          <p:cNvPr id="3" name="Content Placeholder 2"/>
+          <p:cNvSpPr>
+            <a:spLocks noGrp="1"/>
+          </p:cNvSpPr>
+          <p:nvPr>
+            <p:ph idx="1"/>
+          </p:nvPr>
+        </p:nvSpPr>
+        <p:spPr/>
+        <p:txBody>
+          <a:bodyPr/>
+          <a:lstStyle/>
+          <a:p>
+            <a:pPr lvl="0"/>
+            <a:r>
+              <a:rPr/>
+              <a:t>Basal ganglia</a:t>
+            </a:r>
+          </a:p>
+          <a:p>
+            <a:pPr lvl="0"/>
+            <a:r>
+              <a:rPr/>
+              <a:t>Hippocampus</a:t>
+            </a:r>
+          </a:p>
+          <a:p>
+            <a:pPr lvl="0"/>
+            <a:r>
+              <a:rPr/>
+              <a:t>Amygdala</a:t>
+            </a:r>
+          </a:p>
+        </p:txBody>
+      </p:sp>
+    </p:spTree>
+  </p:cSld>
+</p:sld>
+</file>
+
+<file path=ppt/slides/slide34.xml><?xml version="1.0" encoding="utf-8"?>
+<p:sld xmlns:a="http://schemas.openxmlformats.org/drawingml/2006/main" xmlns:r="http://schemas.openxmlformats.org/officeDocument/2006/relationships" xmlns:p="http://schemas.openxmlformats.org/presentationml/2006/main">
+  <p:cSld>
+    <p:spTree>
+      <p:nvGrpSpPr>
+        <p:cNvPr id="1" name=""/>
+        <p:cNvGrpSpPr/>
+        <p:nvPr/>
+      </p:nvGrpSpPr>
+      <p:grpSpPr>
+        <a:xfrm>
+          <a:off x="0" y="0"/>
+          <a:ext cx="0" cy="0"/>
+          <a:chOff x="0" y="0"/>
+          <a:chExt cx="0" cy="0"/>
+        </a:xfrm>
+      </p:grpSpPr>
+      <p:sp>
+        <p:nvSpPr>
+          <p:cNvPr id="2" name="Title 1"/>
+          <p:cNvSpPr>
+            <a:spLocks noGrp="1"/>
+          </p:cNvSpPr>
+          <p:nvPr>
+            <p:ph type="title"/>
+          </p:nvPr>
+        </p:nvSpPr>
+        <p:spPr/>
+        <p:txBody>
+          <a:bodyPr/>
+          <a:lstStyle/>
+          <a:p>
+            <a:pPr lvl="0" indent="0" marL="0">
+              <a:buNone/>
+            </a:pPr>
+            <a:r>
+              <a:rPr/>
+              <a:t>Basal ganglia</a:t>
+            </a:r>
+          </a:p>
+        </p:txBody>
+      </p:sp>
+      <p:sp>
+        <p:nvSpPr>
+          <p:cNvPr id="3" name="Content Placeholder 2"/>
+          <p:cNvSpPr>
+            <a:spLocks noGrp="1"/>
+          </p:cNvSpPr>
+          <p:nvPr>
+            <p:ph idx="1" sz="half"/>
+          </p:nvPr>
+        </p:nvSpPr>
+        <p:spPr/>
+        <p:txBody>
+          <a:bodyPr/>
+          <a:lstStyle/>
+          <a:p>
+            <a:pPr lvl="0"/>
+            <a:r>
+              <a:rPr/>
+              <a:t>Striatum</a:t>
+            </a:r>
+          </a:p>
+          <a:p>
+            <a:pPr lvl="1"/>
+            <a:r>
+              <a:rPr/>
+              <a:t>Caudate nucleus</a:t>
+            </a:r>
+          </a:p>
+          <a:p>
+            <a:pPr lvl="1"/>
+            <a:r>
+              <a:rPr/>
+              <a:t>Putamen</a:t>
+            </a:r>
+          </a:p>
+          <a:p>
+            <a:pPr lvl="0"/>
+            <a:r>
+              <a:rPr/>
+              <a:t>Globus pallidus</a:t>
+            </a:r>
+          </a:p>
+          <a:p>
+            <a:pPr lvl="0"/>
+            <a:r>
+              <a:rPr/>
+              <a:t>Subthalamic nucleus</a:t>
+            </a:r>
+          </a:p>
+          <a:p>
+            <a:pPr lvl="0"/>
+            <a:r>
+              <a:rPr/>
+              <a:t>Substantia nigra (tegmentum)</a:t>
+            </a:r>
+          </a:p>
+        </p:txBody>
+      </p:sp>
+      <p:pic>
+        <p:nvPicPr>
+          <p:cNvPr descr="https://fhs122anatomyelab.files.wordpress.com/2014/05/basal-ganglia.jpg?w=524&amp;h=393" id="0" name="Picture 1"/>
+          <p:cNvPicPr>
+            <a:picLocks noGrp="1" noChangeAspect="1"/>
+          </p:cNvPicPr>
+          <p:nvPr/>
+        </p:nvPicPr>
+        <p:blipFill>
+          <a:blip r:embed="rId2"/>
+          <a:stretch>
+            <a:fillRect/>
+          </a:stretch>
+        </p:blipFill>
+        <p:spPr bwMode="auto">
+          <a:xfrm>
+            <a:off x="4749800" y="1193800"/>
+            <a:ext cx="3848100" cy="2882900"/>
+          </a:xfrm>
+          <a:prstGeom prst="rect">
+            <a:avLst/>
+          </a:prstGeom>
+          <a:noFill/>
+          <a:ln w="9525">
+            <a:noFill/>
+            <a:headEnd/>
+            <a:tailEnd/>
+          </a:ln>
+        </p:spPr>
+      </p:pic>
+      <p:sp>
+        <p:nvSpPr>
+          <p:cNvPr id="1" name="TextBox 3"/>
+          <p:cNvSpPr txBox="1"/>
+          <p:nvPr/>
+        </p:nvSpPr>
+        <p:spPr>
+          <a:xfrm>
+            <a:off x="4648200" y="4076700"/>
+            <a:ext cx="4038600" cy="508000"/>
+          </a:xfrm>
+          <a:prstGeom prst="rect">
+            <a:avLst/>
+          </a:prstGeom>
+          <a:noFill/>
+        </p:spPr>
+        <p:txBody>
+          <a:bodyPr/>
+          <a:lstStyle/>
+          <a:p>
+            <a:pPr lvl="0" indent="0" marL="0" algn="ctr">
+              <a:buNone/>
+            </a:pPr>
+            <a:r>
+              <a:rPr/>
+              <a:t>MRI of the basal ganglia</a:t>
+            </a:r>
+          </a:p>
+        </p:txBody>
+      </p:sp>
+    </p:spTree>
+  </p:cSld>
+</p:sld>
+</file>
+
+<file path=ppt/slides/slide35.xml><?xml version="1.0" encoding="utf-8"?>
+<p:sld xmlns:a="http://schemas.openxmlformats.org/drawingml/2006/main" xmlns:r="http://schemas.openxmlformats.org/officeDocument/2006/relationships" xmlns:p="http://schemas.openxmlformats.org/presentationml/2006/main">
+  <p:cSld>
+    <p:spTree>
+      <p:nvGrpSpPr>
+        <p:cNvPr id="1" name=""/>
+        <p:cNvGrpSpPr/>
+        <p:nvPr/>
+      </p:nvGrpSpPr>
+      <p:grpSpPr>
+        <a:xfrm>
+          <a:off x="0" y="0"/>
+          <a:ext cx="0" cy="0"/>
+          <a:chOff x="0" y="0"/>
+          <a:chExt cx="0" cy="0"/>
+        </a:xfrm>
+      </p:grpSpPr>
+      <p:sp>
+        <p:nvSpPr>
+          <p:cNvPr id="2" name="Title 1"/>
+          <p:cNvSpPr>
+            <a:spLocks noGrp="1"/>
+          </p:cNvSpPr>
+          <p:nvPr>
+            <p:ph type="title"/>
+          </p:nvPr>
+        </p:nvSpPr>
+        <p:spPr/>
+        <p:txBody>
+          <a:bodyPr/>
+          <a:lstStyle/>
+          <a:p>
+            <a:pPr lvl="0" indent="0" marL="0">
+              <a:buNone/>
+            </a:pPr>
+            <a:r>
+              <a:rPr/>
+              <a:t>Basal ganglia</a:t>
+            </a:r>
+          </a:p>
+        </p:txBody>
+      </p:sp>
+      <p:pic>
+        <p:nvPicPr>
+          <p:cNvPr descr="https://upload.wikimedia.org/wikipedia/commons/8/8c/Cortical_surface_with_an_overlay_of_the_basal_ganglia_and_thalamus.jpg" id="0" name="Picture 1"/>
+          <p:cNvPicPr>
+            <a:picLocks noGrp="1" noChangeAspect="1"/>
+          </p:cNvPicPr>
+          <p:nvPr/>
+        </p:nvPicPr>
+        <p:blipFill>
+          <a:blip r:embed="rId2"/>
+          <a:stretch>
+            <a:fillRect/>
+          </a:stretch>
+        </p:blipFill>
+        <p:spPr bwMode="auto">
+          <a:xfrm>
+            <a:off x="2413000" y="1193800"/>
+            <a:ext cx="4318000" cy="2882900"/>
+          </a:xfrm>
+          <a:prstGeom prst="rect">
+            <a:avLst/>
+          </a:prstGeom>
+          <a:noFill/>
+          <a:ln w="9525">
+            <a:noFill/>
+            <a:headEnd/>
+            <a:tailEnd/>
+          </a:ln>
+        </p:spPr>
+      </p:pic>
+      <p:sp>
+        <p:nvSpPr>
+          <p:cNvPr id="1" name="TextBox 3"/>
+          <p:cNvSpPr txBox="1"/>
+          <p:nvPr/>
+        </p:nvSpPr>
+        <p:spPr>
+          <a:xfrm>
+            <a:off x="457200" y="4076700"/>
+            <a:ext cx="8229600" cy="508000"/>
+          </a:xfrm>
+          <a:prstGeom prst="rect">
+            <a:avLst/>
+          </a:prstGeom>
+          <a:noFill/>
+        </p:spPr>
+        <p:txBody>
+          <a:bodyPr/>
+          <a:lstStyle/>
+          <a:p>
+            <a:pPr lvl="0" indent="0" marL="0" algn="ctr">
+              <a:buNone/>
+            </a:pPr>
+            <a:r>
+              <a:rPr/>
+              <a:t>https://upload.wikimedia.org/wikipedia/commons/8/8c/Cortical_surface_with_an_overlay_of_the_basal_ganglia_and_thalamus.jpg</a:t>
+            </a:r>
+          </a:p>
+        </p:txBody>
+      </p:sp>
+    </p:spTree>
+  </p:cSld>
+</p:sld>
+</file>
+
+<file path=ppt/slides/slide36.xml><?xml version="1.0" encoding="utf-8"?>
+<p:sld xmlns:a="http://schemas.openxmlformats.org/drawingml/2006/main" xmlns:r="http://schemas.openxmlformats.org/officeDocument/2006/relationships" xmlns:p="http://schemas.openxmlformats.org/presentationml/2006/main">
+  <p:cSld>
+    <p:spTree>
+      <p:nvGrpSpPr>
+        <p:cNvPr id="1" name=""/>
+        <p:cNvGrpSpPr/>
+        <p:nvPr/>
+      </p:nvGrpSpPr>
+      <p:grpSpPr>
+        <a:xfrm>
+          <a:off x="0" y="0"/>
+          <a:ext cx="0" cy="0"/>
+          <a:chOff x="0" y="0"/>
+          <a:chExt cx="0" cy="0"/>
+        </a:xfrm>
+      </p:grpSpPr>
+      <p:sp>
+        <p:nvSpPr>
+          <p:cNvPr id="2" name="Title 1"/>
+          <p:cNvSpPr>
+            <a:spLocks noGrp="1"/>
+          </p:cNvSpPr>
+          <p:nvPr>
+            <p:ph type="title"/>
+          </p:nvPr>
+        </p:nvSpPr>
+        <p:spPr/>
+        <p:txBody>
+          <a:bodyPr/>
+          <a:lstStyle/>
+          <a:p>
+            <a:pPr lvl="0" indent="0" marL="0">
+              <a:buNone/>
+            </a:pPr>
+            <a:r>
+              <a:rPr/>
+              <a:t>Hippocampus</a:t>
+            </a:r>
+          </a:p>
+        </p:txBody>
+      </p:sp>
+      <p:sp>
+        <p:nvSpPr>
+          <p:cNvPr id="3" name="Content Placeholder 2"/>
+          <p:cNvSpPr>
+            <a:spLocks noGrp="1"/>
+          </p:cNvSpPr>
+          <p:nvPr>
+            <p:ph idx="1" sz="half"/>
+          </p:nvPr>
+        </p:nvSpPr>
+        <p:spPr/>
+        <p:txBody>
+          <a:bodyPr/>
+          <a:lstStyle/>
+          <a:p>
+            <a:pPr lvl="0"/>
+            <a:r>
+              <a:rPr/>
+              <a:t>Hippocampus means “sea horse”</a:t>
+            </a:r>
+          </a:p>
+          <a:p>
+            <a:pPr lvl="0"/>
+            <a:r>
+              <a:rPr/>
+              <a:t>Fornix (axon fiber bundle) projects to (mammillary bodies of) hypothalamus</a:t>
+            </a:r>
+          </a:p>
+        </p:txBody>
+      </p:sp>
+      <p:pic>
+        <p:nvPicPr>
+          <p:cNvPr descr="https://images.theconversation.com/files/60945/original/qrtd9rv8-1412620559.JPG?ixlib=rb-1.1.0&amp;q=45&amp;auto=format&amp;w=1000&amp;fit=clip" id="0" name="Picture 1"/>
+          <p:cNvPicPr>
+            <a:picLocks noGrp="1" noChangeAspect="1"/>
+          </p:cNvPicPr>
+          <p:nvPr/>
+        </p:nvPicPr>
+        <p:blipFill>
+          <a:blip r:embed="rId2"/>
+          <a:stretch>
+            <a:fillRect/>
+          </a:stretch>
+        </p:blipFill>
+        <p:spPr bwMode="auto">
+          <a:xfrm>
+            <a:off x="4737100" y="1193800"/>
+            <a:ext cx="3848100" cy="2882900"/>
+          </a:xfrm>
+          <a:prstGeom prst="rect">
+            <a:avLst/>
+          </a:prstGeom>
+          <a:noFill/>
+          <a:ln w="9525">
+            <a:noFill/>
+            <a:headEnd/>
+            <a:tailEnd/>
+          </a:ln>
+        </p:spPr>
+      </p:pic>
+      <p:sp>
+        <p:nvSpPr>
+          <p:cNvPr id="1" name="TextBox 3"/>
+          <p:cNvSpPr txBox="1"/>
+          <p:nvPr/>
+        </p:nvSpPr>
+        <p:spPr>
+          <a:xfrm>
+            <a:off x="4648200" y="4076700"/>
+            <a:ext cx="4038600" cy="508000"/>
+          </a:xfrm>
+          <a:prstGeom prst="rect">
+            <a:avLst/>
+          </a:prstGeom>
+          <a:noFill/>
+        </p:spPr>
+        <p:txBody>
+          <a:bodyPr/>
+          <a:lstStyle/>
+          <a:p>
+            <a:pPr lvl="0" indent="0" marL="0" algn="ctr">
+              <a:buNone/>
+            </a:pPr>
+            <a:r>
+              <a:rPr/>
+              <a:t>Hippocampus and Sea Horse</a:t>
+            </a:r>
+          </a:p>
+        </p:txBody>
+      </p:sp>
+    </p:spTree>
+  </p:cSld>
+</p:sld>
+</file>
+
+<file path=ppt/slides/slide37.xml><?xml version="1.0" encoding="utf-8"?>
+<p:sld xmlns:a="http://schemas.openxmlformats.org/drawingml/2006/main" xmlns:r="http://schemas.openxmlformats.org/officeDocument/2006/relationships" xmlns:p="http://schemas.openxmlformats.org/presentationml/2006/main">
+  <p:cSld>
+    <p:spTree>
+      <p:nvGrpSpPr>
+        <p:cNvPr id="1" name=""/>
+        <p:cNvGrpSpPr/>
+        <p:nvPr/>
+      </p:nvGrpSpPr>
+      <p:grpSpPr>
+        <a:xfrm>
+          <a:off x="0" y="0"/>
+          <a:ext cx="0" cy="0"/>
+          <a:chOff x="0" y="0"/>
+          <a:chExt cx="0" cy="0"/>
+        </a:xfrm>
+      </p:grpSpPr>
+      <p:sp>
+        <p:nvSpPr>
+          <p:cNvPr id="2" name="Title 1"/>
+          <p:cNvSpPr>
+            <a:spLocks noGrp="1"/>
+          </p:cNvSpPr>
+          <p:nvPr>
+            <p:ph type="title"/>
+          </p:nvPr>
+        </p:nvSpPr>
+        <p:spPr/>
+        <p:txBody>
+          <a:bodyPr/>
+          <a:lstStyle/>
+          <a:p>
+            <a:pPr lvl="0" indent="0" marL="0">
+              <a:buNone/>
+            </a:pPr>
+            <a:r>
+              <a:rPr/>
+              <a:t>Hippocampus</a:t>
+            </a:r>
+          </a:p>
+        </p:txBody>
+      </p:sp>
+      <p:sp>
+        <p:nvSpPr>
+          <p:cNvPr id="3" name="Content Placeholder 2"/>
+          <p:cNvSpPr>
+            <a:spLocks noGrp="1"/>
+          </p:cNvSpPr>
+          <p:nvPr>
+            <p:ph idx="1" sz="half"/>
+          </p:nvPr>
+        </p:nvSpPr>
+        <p:spPr/>
+        <p:txBody>
+          <a:bodyPr/>
+          <a:lstStyle/>
+          <a:p>
+            <a:pPr lvl="0"/>
+            <a:r>
+              <a:rPr/>
+              <a:t>Initial storage of memories for specific facts (semantic memory) or events (episodic memory)</a:t>
+            </a:r>
+          </a:p>
+          <a:p>
+            <a:pPr lvl="0"/>
+            <a:r>
+              <a:rPr/>
+              <a:t>Place memory in non-human animals (&amp; humans?)</a:t>
+            </a:r>
+          </a:p>
+        </p:txBody>
+      </p:sp>
+      <p:pic>
+        <p:nvPicPr>
+          <p:cNvPr descr="http://www.neuro24.de/hip0006.jpg" id="0" name="Picture 1"/>
+          <p:cNvPicPr>
+            <a:picLocks noGrp="1" noChangeAspect="1"/>
+          </p:cNvPicPr>
+          <p:nvPr/>
+        </p:nvPicPr>
+        <p:blipFill>
+          <a:blip r:embed="rId2"/>
+          <a:stretch>
+            <a:fillRect/>
+          </a:stretch>
+        </p:blipFill>
+        <p:spPr bwMode="auto">
+          <a:xfrm>
+            <a:off x="5232400" y="1193800"/>
+            <a:ext cx="2882900" cy="2882900"/>
+          </a:xfrm>
+          <a:prstGeom prst="rect">
+            <a:avLst/>
+          </a:prstGeom>
+          <a:noFill/>
+          <a:ln w="9525">
+            <a:noFill/>
+            <a:headEnd/>
+            <a:tailEnd/>
+          </a:ln>
+        </p:spPr>
+      </p:pic>
+      <p:sp>
+        <p:nvSpPr>
+          <p:cNvPr id="1" name="TextBox 3"/>
+          <p:cNvSpPr txBox="1"/>
+          <p:nvPr/>
+        </p:nvSpPr>
+        <p:spPr>
+          <a:xfrm>
+            <a:off x="4648200" y="4076700"/>
+            <a:ext cx="4038600" cy="508000"/>
+          </a:xfrm>
+          <a:prstGeom prst="rect">
+            <a:avLst/>
+          </a:prstGeom>
+          <a:noFill/>
+        </p:spPr>
+        <p:txBody>
+          <a:bodyPr/>
+          <a:lstStyle/>
+          <a:p>
+            <a:pPr lvl="0" indent="0" marL="0" algn="ctr">
+              <a:buNone/>
+            </a:pPr>
+            <a:r>
+              <a:rPr/>
+              <a:t>MRI of hippocampus</a:t>
+            </a:r>
+          </a:p>
+        </p:txBody>
+      </p:sp>
+    </p:spTree>
+  </p:cSld>
+</p:sld>
+</file>
+
+<file path=ppt/slides/slide38.xml><?xml version="1.0" encoding="utf-8"?>
+<p:sld xmlns:a="http://schemas.openxmlformats.org/drawingml/2006/main" xmlns:r="http://schemas.openxmlformats.org/officeDocument/2006/relationships" xmlns:p="http://schemas.openxmlformats.org/presentationml/2006/main">
+  <p:cSld>
+    <p:spTree>
+      <p:nvGrpSpPr>
+        <p:cNvPr id="1" name=""/>
+        <p:cNvGrpSpPr/>
+        <p:nvPr/>
+      </p:nvGrpSpPr>
+      <p:grpSpPr>
+        <a:xfrm>
+          <a:off x="0" y="0"/>
+          <a:ext cx="0" cy="0"/>
+          <a:chOff x="0" y="0"/>
+          <a:chExt cx="0" cy="0"/>
+        </a:xfrm>
+      </p:grpSpPr>
+      <p:sp>
+        <p:nvSpPr>
+          <p:cNvPr id="2" name="Title 1"/>
+          <p:cNvSpPr>
+            <a:spLocks noGrp="1"/>
+          </p:cNvSpPr>
+          <p:nvPr>
+            <p:ph type="title"/>
+          </p:nvPr>
+        </p:nvSpPr>
+        <p:spPr/>
+        <p:txBody>
+          <a:bodyPr/>
+          <a:lstStyle/>
+          <a:p>
+            <a:pPr lvl="0" indent="0" marL="0">
+              <a:buNone/>
+            </a:pPr>
+            <a:r>
+              <a:rPr/>
+              <a:t>Amygdala</a:t>
+            </a:r>
+          </a:p>
+        </p:txBody>
+      </p:sp>
+      <p:sp>
+        <p:nvSpPr>
+          <p:cNvPr id="3" name="Content Placeholder 2"/>
+          <p:cNvSpPr>
+            <a:spLocks noGrp="1"/>
+          </p:cNvSpPr>
+          <p:nvPr>
+            <p:ph idx="1" sz="half"/>
+          </p:nvPr>
+        </p:nvSpPr>
+        <p:spPr/>
+        <p:txBody>
+          <a:bodyPr/>
+          <a:lstStyle/>
+          <a:p>
+            <a:pPr lvl="0"/>
+            <a:r>
+              <a:rPr/>
+              <a:t>Physiological state, behavioral readiness, affect</a:t>
+            </a:r>
+          </a:p>
+          <a:p>
+            <a:pPr lvl="0"/>
+            <a:r>
+              <a:rPr/>
+              <a:t>NOT the fear center! (LeDoux, 2015).</a:t>
+            </a:r>
+          </a:p>
+          <a:p>
+            <a:pPr lvl="0"/>
+            <a:r>
+              <a:rPr/>
+              <a:t>Projection to hypothalamus</a:t>
+            </a:r>
+          </a:p>
+        </p:txBody>
+      </p:sp>
+      <p:pic>
+        <p:nvPicPr>
+          <p:cNvPr descr="http://www.frontiersin.org/files/Articles/31697/fpsyg-03-00319-HTML/image_m/fpsyg-03-00319-g002.jpg" id="0" name="Picture 1"/>
+          <p:cNvPicPr>
+            <a:picLocks noGrp="1" noChangeAspect="1"/>
+          </p:cNvPicPr>
+          <p:nvPr/>
+        </p:nvPicPr>
+        <p:blipFill>
+          <a:blip r:embed="rId2"/>
+          <a:stretch>
+            <a:fillRect/>
+          </a:stretch>
+        </p:blipFill>
+        <p:spPr bwMode="auto">
+          <a:xfrm>
+            <a:off x="4648200" y="1219200"/>
+            <a:ext cx="4038600" cy="2832100"/>
+          </a:xfrm>
+          <a:prstGeom prst="rect">
+            <a:avLst/>
+          </a:prstGeom>
+          <a:noFill/>
+          <a:ln w="9525">
+            <a:noFill/>
+            <a:headEnd/>
+            <a:tailEnd/>
+          </a:ln>
+        </p:spPr>
+      </p:pic>
+      <p:sp>
+        <p:nvSpPr>
+          <p:cNvPr id="1" name="TextBox 3"/>
+          <p:cNvSpPr txBox="1"/>
+          <p:nvPr/>
+        </p:nvSpPr>
+        <p:spPr>
+          <a:xfrm>
+            <a:off x="4648200" y="4076700"/>
+            <a:ext cx="4038600" cy="508000"/>
+          </a:xfrm>
+          <a:prstGeom prst="rect">
+            <a:avLst/>
+          </a:prstGeom>
+          <a:noFill/>
+        </p:spPr>
+        <p:txBody>
+          <a:bodyPr/>
+          <a:lstStyle/>
+          <a:p>
+            <a:pPr lvl="0" indent="0" marL="0" algn="ctr">
+              <a:buNone/>
+            </a:pPr>
+            <a:r>
+              <a:rPr/>
+              <a:t>Cassidy2012-ue Figure 2</a:t>
+            </a:r>
+          </a:p>
+        </p:txBody>
+      </p:sp>
+    </p:spTree>
+  </p:cSld>
+</p:sld>
+</file>
+
+<file path=ppt/slides/slide39.xml><?xml version="1.0" encoding="utf-8"?>
+<p:sld xmlns:a="http://schemas.openxmlformats.org/drawingml/2006/main" xmlns:r="http://schemas.openxmlformats.org/officeDocument/2006/relationships" xmlns:p="http://schemas.openxmlformats.org/presentationml/2006/main">
+  <p:cSld>
+    <p:spTree>
+      <p:nvGrpSpPr>
+        <p:cNvPr id="1" name=""/>
+        <p:cNvGrpSpPr/>
+        <p:nvPr/>
+      </p:nvGrpSpPr>
+      <p:grpSpPr>
+        <a:xfrm>
+          <a:off x="0" y="0"/>
+          <a:ext cx="0" cy="0"/>
+          <a:chOff x="0" y="0"/>
+          <a:chExt cx="0" cy="0"/>
+        </a:xfrm>
+      </p:grpSpPr>
+      <p:graphicFrame>
+        <p:nvGraphicFramePr>
+          <p:cNvPr id="6" name="Content Placeholder 5"/>
+          <p:cNvGraphicFramePr>
+            <a:graphicFrameLocks noGrp="1"/>
+          </p:cNvGraphicFramePr>
+          <p:nvPr>
+            <p:ph idx="1"/>
+          </p:nvPr>
+        </p:nvGraphicFramePr>
+        <p:xfrm>
+          <a:off x="457200" y="1193800"/>
+          <a:ext cx="8229600" cy="3390900"/>
+        </p:xfrm>
+        <a:graphic>
+          <a:graphicData uri="http://schemas.openxmlformats.org/drawingml/2006/table">
+            <a:tbl>
+              <a:tblPr firstRow="1" bandRow="1">
+                <a:tableStyleId>{5C22544A-7EE6-4342-B048-85BDC9FD1C3A}</a:tableStyleId>
+              </a:tblPr>
+              <a:tblGrid>
+                <a:gridCol w="1828800"/>
+                <a:gridCol w="2514600"/>
+                <a:gridCol w="2286000"/>
+                <a:gridCol w="1600200"/>
+              </a:tblGrid>
+              <a:tr h="0">
+                <a:tc>
+                  <a:txBody>
+                    <a:bodyPr/>
+                    <a:lstStyle/>
+                    <a:p>
+                      <a:pPr lvl="0" indent="0" marL="0">
+                        <a:buNone/>
+                      </a:pPr>
+                      <a:r>
+                        <a:rPr/>
+                        <a:t>Major division</a:t>
+                      </a:r>
+                    </a:p>
+                  </a:txBody>
+                  <a:tcPr/>
+                </a:tc>
+                <a:tc>
+                  <a:txBody>
+                    <a:bodyPr/>
+                    <a:lstStyle/>
+                    <a:p>
+                      <a:pPr lvl="0" indent="0" marL="0">
+                        <a:buNone/>
+                      </a:pPr>
+                      <a:r>
+                        <a:rPr/>
+                        <a:t>Ventricular Landmark</a:t>
+                      </a:r>
+                    </a:p>
+                  </a:txBody>
+                  <a:tcPr/>
+                </a:tc>
+                <a:tc>
+                  <a:txBody>
+                    <a:bodyPr/>
+                    <a:lstStyle/>
+                    <a:p>
+                      <a:pPr lvl="0" indent="0" marL="0">
+                        <a:buNone/>
+                      </a:pPr>
+                      <a:r>
+                        <a:rPr/>
+                        <a:t>Embryonic Division</a:t>
+                      </a:r>
+                    </a:p>
+                  </a:txBody>
+                  <a:tcPr/>
+                </a:tc>
+                <a:tc>
+                  <a:txBody>
+                    <a:bodyPr/>
+                    <a:lstStyle/>
+                    <a:p>
+                      <a:pPr lvl="0" indent="0" marL="0">
+                        <a:buNone/>
+                      </a:pPr>
+                      <a:r>
+                        <a:rPr/>
+                        <a:t>Structure</a:t>
+                      </a:r>
+                    </a:p>
+                  </a:txBody>
+                  <a:tcPr/>
+                </a:tc>
+              </a:tr>
+              <a:tr h="0">
+                <a:tc>
+                  <a:txBody>
+                    <a:bodyPr/>
+                    <a:lstStyle/>
+                    <a:p>
+                      <a:endParaRPr/>
+                    </a:p>
+                  </a:txBody>
+                </a:tc>
+                <a:tc>
+                  <a:txBody>
+                    <a:bodyPr/>
+                    <a:lstStyle/>
+                    <a:p>
+                      <a:pPr lvl="0" indent="0" marL="0">
+                        <a:buNone/>
+                      </a:pPr>
+                      <a:r>
+                        <a:rPr/>
+                        <a:t>Third</a:t>
+                      </a:r>
+                    </a:p>
+                  </a:txBody>
+                </a:tc>
+                <a:tc>
+                  <a:txBody>
+                    <a:bodyPr/>
+                    <a:lstStyle/>
+                    <a:p>
+                      <a:pPr lvl="0" indent="0" marL="0">
+                        <a:buNone/>
+                      </a:pPr>
+                      <a:r>
+                        <a:rPr/>
+                        <a:t>Diencephalon</a:t>
+                      </a:r>
+                    </a:p>
+                  </a:txBody>
+                </a:tc>
+                <a:tc>
+                  <a:txBody>
+                    <a:bodyPr/>
+                    <a:lstStyle/>
+                    <a:p>
+                      <a:pPr lvl="0" indent="0" marL="0">
+                        <a:buNone/>
+                      </a:pPr>
+                      <a:r>
+                        <a:rPr/>
+                        <a:t>Thalamus</a:t>
+                      </a:r>
+                    </a:p>
+                  </a:txBody>
+                </a:tc>
+              </a:tr>
+              <a:tr h="0">
+                <a:tc>
+                  <a:txBody>
+                    <a:bodyPr/>
+                    <a:lstStyle/>
+                    <a:p>
+                      <a:endParaRPr/>
+                    </a:p>
+                  </a:txBody>
+                </a:tc>
+                <a:tc>
+                  <a:txBody>
+                    <a:bodyPr/>
+                    <a:lstStyle/>
+                    <a:p>
+                      <a:endParaRPr/>
+                    </a:p>
+                  </a:txBody>
+                </a:tc>
+                <a:tc>
+                  <a:txBody>
+                    <a:bodyPr/>
+                    <a:lstStyle/>
+                    <a:p>
+                      <a:endParaRPr/>
+                    </a:p>
+                  </a:txBody>
+                </a:tc>
+                <a:tc>
+                  <a:txBody>
+                    <a:bodyPr/>
+                    <a:lstStyle/>
+                    <a:p>
+                      <a:pPr lvl="0" indent="0" marL="0">
+                        <a:buNone/>
+                      </a:pPr>
+                      <a:r>
+                        <a:rPr/>
+                        <a:t>Hypothalamus</a:t>
+                      </a:r>
+                    </a:p>
+                  </a:txBody>
+                </a:tc>
+              </a:tr>
+            </a:tbl>
+          </a:graphicData>
+        </a:graphic>
+      </p:graphicFrame>
+    </p:spTree>
+  </p:cSld>
+</p:sld>
+</file>
+
+<file path=ppt/slides/slide4.xml><?xml version="1.0" encoding="utf-8"?>
+<p:sld xmlns:a="http://schemas.openxmlformats.org/drawingml/2006/main" xmlns:r="http://schemas.openxmlformats.org/officeDocument/2006/relationships" xmlns:p="http://schemas.openxmlformats.org/presentationml/2006/main">
+  <p:cSld>
+    <p:spTree>
+      <p:nvGrpSpPr>
+        <p:cNvPr id="1" name=""/>
+        <p:cNvGrpSpPr/>
+        <p:nvPr/>
+      </p:nvGrpSpPr>
+      <p:grpSpPr>
+        <a:xfrm>
+          <a:off x="0" y="0"/>
+          <a:ext cx="0" cy="0"/>
+          <a:chOff x="0" y="0"/>
+          <a:chExt cx="0" cy="0"/>
+        </a:xfrm>
+      </p:grpSpPr>
+      <p:sp>
+        <p:nvSpPr>
+          <p:cNvPr id="3" name="Content Placeholder 2"/>
+          <p:cNvSpPr>
+            <a:spLocks noGrp="1"/>
+          </p:cNvSpPr>
+          <p:nvPr>
+            <p:ph idx="1"/>
+          </p:nvPr>
+        </p:nvSpPr>
+        <p:spPr/>
+        <p:txBody>
+          <a:bodyPr/>
+          <a:lstStyle/>
+          <a:p>
+            <a:pPr lvl="0" indent="0" marL="0">
+              <a:buNone/>
+            </a:pPr>
+            <a:r>
+              <a:rPr>
+                <a:hlinkClick r:id="rId2"/>
+              </a:rPr>
+              <a:t>https://www.youtube.com/embed/Qw8E9WnZTQk</a:t>
+            </a:r>
+          </a:p>
+          <a:p>
+            <a:pPr lvl="0" indent="0" marL="0">
+              <a:buNone/>
+            </a:pPr>
+            <a:r>
+              <a:rPr/>
+              <a:t>– Kids Learning Tube (2015) </a:t>
+            </a:r>
+          </a:p>
+        </p:txBody>
+      </p:sp>
+    </p:spTree>
+  </p:cSld>
+</p:sld>
+</file>
+
+<file path=ppt/slides/slide40.xml><?xml version="1.0" encoding="utf-8"?>
+<p:sld xmlns:a="http://schemas.openxmlformats.org/drawingml/2006/main" xmlns:r="http://schemas.openxmlformats.org/officeDocument/2006/relationships" xmlns:p="http://schemas.openxmlformats.org/presentationml/2006/main">
+  <p:cSld>
+    <p:spTree>
+      <p:nvGrpSpPr>
+        <p:cNvPr id="1" name=""/>
+        <p:cNvGrpSpPr/>
+        <p:nvPr/>
+      </p:nvGrpSpPr>
+      <p:grpSpPr>
+        <a:xfrm>
+          <a:off x="0" y="0"/>
+          <a:ext cx="0" cy="0"/>
+          <a:chOff x="0" y="0"/>
+          <a:chExt cx="0" cy="0"/>
+        </a:xfrm>
+      </p:grpSpPr>
+      <p:sp>
+        <p:nvSpPr>
+          <p:cNvPr id="2" name="Title 1"/>
+          <p:cNvSpPr>
+            <a:spLocks noGrp="1"/>
+          </p:cNvSpPr>
+          <p:nvPr>
+            <p:ph type="title"/>
+          </p:nvPr>
+        </p:nvSpPr>
+        <p:spPr/>
+        <p:txBody>
+          <a:bodyPr/>
+          <a:lstStyle/>
+          <a:p>
+            <a:pPr lvl="0" indent="0" marL="0">
+              <a:buNone/>
+            </a:pPr>
+            <a:r>
+              <a:rPr/>
+              <a:t>Diencephalon</a:t>
+            </a:r>
+          </a:p>
+        </p:txBody>
+      </p:sp>
+      <p:sp>
+        <p:nvSpPr>
+          <p:cNvPr id="3" name="Content Placeholder 2"/>
+          <p:cNvSpPr>
+            <a:spLocks noGrp="1"/>
+          </p:cNvSpPr>
+          <p:nvPr>
+            <p:ph idx="1" sz="half"/>
+          </p:nvPr>
+        </p:nvSpPr>
+        <p:spPr/>
+        <p:txBody>
+          <a:bodyPr/>
+          <a:lstStyle/>
+          <a:p>
+            <a:pPr lvl="0"/>
+            <a:r>
+              <a:rPr/>
+              <a:t>Thalamus</a:t>
+            </a:r>
+          </a:p>
+          <a:p>
+            <a:pPr lvl="0"/>
+            <a:r>
+              <a:rPr/>
+              <a:t>Hypothalamus</a:t>
+            </a:r>
+          </a:p>
+        </p:txBody>
+      </p:sp>
+      <p:pic>
+        <p:nvPicPr>
+          <p:cNvPr descr="https://upload.wikimedia.org/wikipedia/commons/a/a0/1310_Diencephalon.jpg" id="0" name="Picture 1"/>
+          <p:cNvPicPr>
+            <a:picLocks noGrp="1" noChangeAspect="1"/>
+          </p:cNvPicPr>
+          <p:nvPr/>
+        </p:nvPicPr>
+        <p:blipFill>
+          <a:blip r:embed="rId2"/>
+          <a:stretch>
+            <a:fillRect/>
+          </a:stretch>
+        </p:blipFill>
+        <p:spPr bwMode="auto">
+          <a:xfrm>
+            <a:off x="4648200" y="1295400"/>
+            <a:ext cx="4038600" cy="2692400"/>
+          </a:xfrm>
+          <a:prstGeom prst="rect">
+            <a:avLst/>
+          </a:prstGeom>
+          <a:noFill/>
+          <a:ln w="9525">
+            <a:noFill/>
+            <a:headEnd/>
+            <a:tailEnd/>
+          </a:ln>
+        </p:spPr>
+      </p:pic>
+      <p:sp>
+        <p:nvSpPr>
+          <p:cNvPr id="1" name="TextBox 3"/>
+          <p:cNvSpPr txBox="1"/>
+          <p:nvPr/>
+        </p:nvSpPr>
+        <p:spPr>
+          <a:xfrm>
+            <a:off x="4648200" y="4076700"/>
+            <a:ext cx="4038600" cy="508000"/>
+          </a:xfrm>
+          <a:prstGeom prst="rect">
+            <a:avLst/>
+          </a:prstGeom>
+          <a:noFill/>
+        </p:spPr>
+        <p:txBody>
+          <a:bodyPr/>
+          <a:lstStyle/>
+          <a:p>
+            <a:pPr lvl="0" indent="0" marL="0" algn="ctr">
+              <a:buNone/>
+            </a:pPr>
+            <a:r>
+              <a:rPr/>
+              <a:t>Diencephalon from Wikipedia</a:t>
+            </a:r>
+          </a:p>
+        </p:txBody>
+      </p:sp>
+    </p:spTree>
+  </p:cSld>
+</p:sld>
+</file>
+
+<file path=ppt/slides/slide41.xml><?xml version="1.0" encoding="utf-8"?>
+<p:sld xmlns:a="http://schemas.openxmlformats.org/drawingml/2006/main" xmlns:r="http://schemas.openxmlformats.org/officeDocument/2006/relationships" xmlns:p="http://schemas.openxmlformats.org/presentationml/2006/main">
+  <p:cSld>
+    <p:spTree>
+      <p:nvGrpSpPr>
+        <p:cNvPr id="1" name=""/>
+        <p:cNvGrpSpPr/>
+        <p:nvPr/>
+      </p:nvGrpSpPr>
+      <p:grpSpPr>
+        <a:xfrm>
+          <a:off x="0" y="0"/>
+          <a:ext cx="0" cy="0"/>
+          <a:chOff x="0" y="0"/>
+          <a:chExt cx="0" cy="0"/>
+        </a:xfrm>
+      </p:grpSpPr>
+      <p:sp>
+        <p:nvSpPr>
+          <p:cNvPr id="2" name="Title 1"/>
+          <p:cNvSpPr>
+            <a:spLocks noGrp="1"/>
+          </p:cNvSpPr>
+          <p:nvPr>
+            <p:ph type="title"/>
+          </p:nvPr>
+        </p:nvSpPr>
+        <p:spPr/>
+        <p:txBody>
+          <a:bodyPr/>
+          <a:lstStyle/>
+          <a:p>
+            <a:pPr lvl="0" indent="0" marL="0">
+              <a:buNone/>
+            </a:pPr>
+            <a:r>
+              <a:rPr/>
+              <a:t>Thalamus</a:t>
+            </a:r>
+          </a:p>
+        </p:txBody>
+      </p:sp>
+      <p:sp>
+        <p:nvSpPr>
+          <p:cNvPr id="3" name="Content Placeholder 2"/>
+          <p:cNvSpPr>
+            <a:spLocks noGrp="1"/>
+          </p:cNvSpPr>
+          <p:nvPr>
+            <p:ph idx="1" sz="half"/>
+          </p:nvPr>
+        </p:nvSpPr>
+        <p:spPr/>
+        <p:txBody>
+          <a:bodyPr/>
+          <a:lstStyle/>
+          <a:p>
+            <a:pPr lvl="0"/>
+            <a:r>
+              <a:rPr/>
+              <a:t>Input to cortex</a:t>
+            </a:r>
+          </a:p>
+          <a:p>
+            <a:pPr lvl="0"/>
+            <a:r>
+              <a:rPr/>
+              <a:t>Functionally distinct </a:t>
+            </a:r>
+            <a:r>
+              <a:rPr i="1"/>
+              <a:t>nuclei</a:t>
+            </a:r>
+          </a:p>
+          <a:p>
+            <a:pPr lvl="1"/>
+            <a:r>
+              <a:rPr/>
+              <a:t>Lateral geniculate nucleus (LGN), vision</a:t>
+            </a:r>
+          </a:p>
+          <a:p>
+            <a:pPr lvl="1"/>
+            <a:r>
+              <a:rPr/>
+              <a:t>Medial geniculate nucleus (MGN), audition</a:t>
+            </a:r>
+          </a:p>
+          <a:p>
+            <a:pPr lvl="1"/>
+            <a:r>
+              <a:rPr/>
+              <a:t>Pulvinar, attention?</a:t>
+            </a:r>
+          </a:p>
+        </p:txBody>
+      </p:sp>
+      <p:pic>
+        <p:nvPicPr>
+          <p:cNvPr descr="http://neurobiologychapter3.weebly.com/uploads/1/4/1/8/1418733/5118342.jpg?401x231" id="0" name="Picture 1"/>
+          <p:cNvPicPr>
+            <a:picLocks noGrp="1" noChangeAspect="1"/>
+          </p:cNvPicPr>
+          <p:nvPr/>
+        </p:nvPicPr>
+        <p:blipFill>
+          <a:blip r:embed="rId2"/>
+          <a:stretch>
+            <a:fillRect/>
+          </a:stretch>
+        </p:blipFill>
+        <p:spPr bwMode="auto">
+          <a:xfrm>
+            <a:off x="4648200" y="1295400"/>
+            <a:ext cx="4038600" cy="2692400"/>
+          </a:xfrm>
+          <a:prstGeom prst="rect">
+            <a:avLst/>
+          </a:prstGeom>
+          <a:noFill/>
+          <a:ln w="9525">
+            <a:noFill/>
+            <a:headEnd/>
+            <a:tailEnd/>
+          </a:ln>
+        </p:spPr>
+      </p:pic>
+      <p:sp>
+        <p:nvSpPr>
+          <p:cNvPr id="1" name="TextBox 3"/>
+          <p:cNvSpPr txBox="1"/>
+          <p:nvPr/>
+        </p:nvSpPr>
+        <p:spPr>
+          <a:xfrm>
+            <a:off x="4648200" y="4076700"/>
+            <a:ext cx="4038600" cy="508000"/>
+          </a:xfrm>
+          <a:prstGeom prst="rect">
+            <a:avLst/>
+          </a:prstGeom>
+          <a:noFill/>
+        </p:spPr>
+        <p:txBody>
+          <a:bodyPr/>
+          <a:lstStyle/>
+          <a:p>
+            <a:pPr lvl="0" indent="0" marL="0" algn="ctr">
+              <a:buNone/>
+            </a:pPr>
+            <a:r>
+              <a:rPr/>
+              <a:t>Nuclei of the thalamus</a:t>
+            </a:r>
+          </a:p>
+        </p:txBody>
+      </p:sp>
+    </p:spTree>
+  </p:cSld>
+</p:sld>
+</file>
+
+<file path=ppt/slides/slide42.xml><?xml version="1.0" encoding="utf-8"?>
+<p:sld xmlns:a="http://schemas.openxmlformats.org/drawingml/2006/main" xmlns:r="http://schemas.openxmlformats.org/officeDocument/2006/relationships" xmlns:p="http://schemas.openxmlformats.org/presentationml/2006/main">
+  <p:cSld>
+    <p:spTree>
+      <p:nvGrpSpPr>
+        <p:cNvPr id="1" name=""/>
+        <p:cNvGrpSpPr/>
+        <p:nvPr/>
+      </p:nvGrpSpPr>
+      <p:grpSpPr>
+        <a:xfrm>
+          <a:off x="0" y="0"/>
+          <a:ext cx="0" cy="0"/>
+          <a:chOff x="0" y="0"/>
+          <a:chExt cx="0" cy="0"/>
+        </a:xfrm>
+      </p:grpSpPr>
+      <p:sp>
+        <p:nvSpPr>
+          <p:cNvPr id="2" name="Title 1"/>
+          <p:cNvSpPr>
+            <a:spLocks noGrp="1"/>
+          </p:cNvSpPr>
+          <p:nvPr>
+            <p:ph type="title"/>
+          </p:nvPr>
+        </p:nvSpPr>
+        <p:spPr/>
+        <p:txBody>
+          <a:bodyPr/>
+          <a:lstStyle/>
+          <a:p>
+            <a:pPr lvl="0" indent="0" marL="0">
+              <a:buNone/>
+            </a:pPr>
+            <a:r>
+              <a:rPr/>
+              <a:t>Hypothalamus</a:t>
+            </a:r>
+          </a:p>
+        </p:txBody>
+      </p:sp>
+      <p:pic>
+        <p:nvPicPr>
+          <p:cNvPr descr="http://higheredbcs.wiley.com/legacy/college/tortora/0470565101/hearthis_ill/pap13e_ch14_illustr_audio_mp3_am/simulations/figures/hypothalamus.jpg" id="0" name="Picture 1"/>
+          <p:cNvPicPr>
+            <a:picLocks noGrp="1" noChangeAspect="1"/>
+          </p:cNvPicPr>
+          <p:nvPr/>
+        </p:nvPicPr>
+        <p:blipFill>
+          <a:blip r:embed="rId2"/>
+          <a:stretch>
+            <a:fillRect/>
+          </a:stretch>
+        </p:blipFill>
+        <p:spPr bwMode="auto">
+          <a:xfrm>
+            <a:off x="2413000" y="1193800"/>
+            <a:ext cx="4318000" cy="2882900"/>
+          </a:xfrm>
+          <a:prstGeom prst="rect">
+            <a:avLst/>
+          </a:prstGeom>
+          <a:noFill/>
+          <a:ln w="9525">
+            <a:noFill/>
+            <a:headEnd/>
+            <a:tailEnd/>
+          </a:ln>
+        </p:spPr>
+      </p:pic>
+      <p:sp>
+        <p:nvSpPr>
+          <p:cNvPr id="1" name="TextBox 3"/>
+          <p:cNvSpPr txBox="1"/>
+          <p:nvPr/>
+        </p:nvSpPr>
+        <p:spPr>
+          <a:xfrm>
+            <a:off x="457200" y="4076700"/>
+            <a:ext cx="8229600" cy="508000"/>
+          </a:xfrm>
+          <a:prstGeom prst="rect">
+            <a:avLst/>
+          </a:prstGeom>
+          <a:noFill/>
+        </p:spPr>
+        <p:txBody>
+          <a:bodyPr/>
+          <a:lstStyle/>
+          <a:p>
+            <a:pPr lvl="0" indent="0" marL="0" algn="ctr">
+              <a:buNone/>
+            </a:pPr>
+            <a:r>
+              <a:rPr/>
+              <a:t>Nuclei of the hypothalamus</a:t>
+            </a:r>
+          </a:p>
+        </p:txBody>
+      </p:sp>
+    </p:spTree>
+  </p:cSld>
+</p:sld>
+</file>
+
+<file path=ppt/slides/slide43.xml><?xml version="1.0" encoding="utf-8"?>
+<p:sld xmlns:a="http://schemas.openxmlformats.org/drawingml/2006/main" xmlns:r="http://schemas.openxmlformats.org/officeDocument/2006/relationships" xmlns:p="http://schemas.openxmlformats.org/presentationml/2006/main">
+  <p:cSld>
+    <p:spTree>
+      <p:nvGrpSpPr>
+        <p:cNvPr id="1" name=""/>
+        <p:cNvGrpSpPr/>
+        <p:nvPr/>
+      </p:nvGrpSpPr>
+      <p:grpSpPr>
+        <a:xfrm>
+          <a:off x="0" y="0"/>
+          <a:ext cx="0" cy="0"/>
+          <a:chOff x="0" y="0"/>
+          <a:chExt cx="0" cy="0"/>
+        </a:xfrm>
+      </p:grpSpPr>
+      <p:sp>
+        <p:nvSpPr>
+          <p:cNvPr id="2" name="Title 1"/>
+          <p:cNvSpPr>
+            <a:spLocks noGrp="1"/>
+          </p:cNvSpPr>
+          <p:nvPr>
+            <p:ph type="title"/>
+          </p:nvPr>
+        </p:nvSpPr>
+        <p:spPr/>
+        <p:txBody>
+          <a:bodyPr/>
+          <a:lstStyle/>
+          <a:p>
+            <a:pPr lvl="0" indent="0" marL="0">
+              <a:buNone/>
+            </a:pPr>
+            <a:r>
+              <a:rPr/>
+              <a:t>Hypothalamus</a:t>
+            </a:r>
+          </a:p>
+        </p:txBody>
+      </p:sp>
+      <p:sp>
+        <p:nvSpPr>
+          <p:cNvPr id="3" name="Content Placeholder 2"/>
+          <p:cNvSpPr>
+            <a:spLocks noGrp="1"/>
+          </p:cNvSpPr>
+          <p:nvPr>
+            <p:ph idx="1"/>
+          </p:nvPr>
+        </p:nvSpPr>
+        <p:spPr/>
+        <p:txBody>
+          <a:bodyPr/>
+          <a:lstStyle/>
+          <a:p>
+            <a:pPr lvl="0"/>
+            <a:r>
+              <a:rPr/>
+              <a:t>Five Fs:</a:t>
+            </a:r>
+          </a:p>
+          <a:p>
+            <a:pPr lvl="1"/>
+            <a:r>
+              <a:rPr/>
+              <a:t>Fighting/fleeing/freezing</a:t>
+            </a:r>
+          </a:p>
+          <a:p>
+            <a:pPr lvl="1"/>
+            <a:r>
+              <a:rPr/>
+              <a:t>Feeding</a:t>
+            </a:r>
+          </a:p>
+          <a:p>
+            <a:pPr lvl="1"/>
+            <a:r>
+              <a:rPr/>
+              <a:t>Reproduction</a:t>
+            </a:r>
+          </a:p>
+        </p:txBody>
+      </p:sp>
+    </p:spTree>
+  </p:cSld>
+</p:sld>
+</file>
+
+<file path=ppt/slides/slide44.xml><?xml version="1.0" encoding="utf-8"?>
+<p:sld xmlns:a="http://schemas.openxmlformats.org/drawingml/2006/main" xmlns:r="http://schemas.openxmlformats.org/officeDocument/2006/relationships" xmlns:p="http://schemas.openxmlformats.org/presentationml/2006/main">
+  <p:cSld>
+    <p:spTree>
+      <p:nvGrpSpPr>
+        <p:cNvPr id="1" name=""/>
+        <p:cNvGrpSpPr/>
+        <p:nvPr/>
+      </p:nvGrpSpPr>
+      <p:grpSpPr>
+        <a:xfrm>
+          <a:off x="0" y="0"/>
+          <a:ext cx="0" cy="0"/>
+          <a:chOff x="0" y="0"/>
+          <a:chExt cx="0" cy="0"/>
+        </a:xfrm>
+      </p:grpSpPr>
+      <p:sp>
+        <p:nvSpPr>
+          <p:cNvPr id="2" name="Title 1"/>
+          <p:cNvSpPr>
+            <a:spLocks noGrp="1"/>
+          </p:cNvSpPr>
+          <p:nvPr>
+            <p:ph type="title"/>
+          </p:nvPr>
+        </p:nvSpPr>
+        <p:spPr/>
+        <p:txBody>
+          <a:bodyPr/>
+          <a:lstStyle/>
+          <a:p>
+            <a:pPr lvl="0" indent="0" marL="0">
+              <a:buNone/>
+            </a:pPr>
+            <a:r>
+              <a:rPr/>
+              <a:t>Hypothalamus</a:t>
+            </a:r>
+          </a:p>
+        </p:txBody>
+      </p:sp>
+      <p:sp>
+        <p:nvSpPr>
+          <p:cNvPr id="3" name="Content Placeholder 2"/>
+          <p:cNvSpPr>
+            <a:spLocks noGrp="1"/>
+          </p:cNvSpPr>
+          <p:nvPr>
+            <p:ph idx="1"/>
+          </p:nvPr>
+        </p:nvSpPr>
+        <p:spPr/>
+        <p:txBody>
+          <a:bodyPr/>
+          <a:lstStyle/>
+          <a:p>
+            <a:pPr lvl="0"/>
+            <a:r>
+              <a:rPr/>
+              <a:t>Controls pituitary gland (“master” gland)</a:t>
+            </a:r>
+          </a:p>
+          <a:p>
+            <a:pPr lvl="1"/>
+            <a:r>
+              <a:rPr/>
+              <a:t>Anterior pituitary (indirect release of hormones)</a:t>
+            </a:r>
+          </a:p>
+          <a:p>
+            <a:pPr lvl="2"/>
+            <a:r>
+              <a:rPr/>
+              <a:t>e.g., Corticotropin Releasing Hormone (CRH) -&gt; release of cortisol from Adrenal Cortex (adjacent to kidney)</a:t>
+            </a:r>
+          </a:p>
+          <a:p>
+            <a:pPr lvl="1"/>
+            <a:r>
+              <a:rPr/>
+              <a:t>Posterior pituitary (direct release of hormones)</a:t>
+            </a:r>
+          </a:p>
+          <a:p>
+            <a:pPr lvl="2"/>
+            <a:r>
+              <a:rPr/>
+              <a:t>Oxytocin</a:t>
+            </a:r>
+          </a:p>
+          <a:p>
+            <a:pPr lvl="2"/>
+            <a:r>
+              <a:rPr/>
+              <a:t>Vasopressin (aka, Arginine Vasopressin – AVP; Anti-diuretic Hormone – ADH)</a:t>
+            </a:r>
+          </a:p>
+        </p:txBody>
+      </p:sp>
+    </p:spTree>
+  </p:cSld>
+</p:sld>
+</file>
+
+<file path=ppt/slides/slide45.xml><?xml version="1.0" encoding="utf-8"?>
+<p:sld xmlns:a="http://schemas.openxmlformats.org/drawingml/2006/main" xmlns:r="http://schemas.openxmlformats.org/officeDocument/2006/relationships" xmlns:p="http://schemas.openxmlformats.org/presentationml/2006/main">
+  <p:cSld>
+    <p:spTree>
+      <p:nvGrpSpPr>
+        <p:cNvPr id="1" name=""/>
+        <p:cNvGrpSpPr/>
+        <p:nvPr/>
+      </p:nvGrpSpPr>
+      <p:grpSpPr>
+        <a:xfrm>
+          <a:off x="0" y="0"/>
+          <a:ext cx="0" cy="0"/>
+          <a:chOff x="0" y="0"/>
+          <a:chExt cx="0" cy="0"/>
+        </a:xfrm>
+      </p:grpSpPr>
+      <p:graphicFrame>
+        <p:nvGraphicFramePr>
+          <p:cNvPr id="6" name="Content Placeholder 5"/>
+          <p:cNvGraphicFramePr>
+            <a:graphicFrameLocks noGrp="1"/>
+          </p:cNvGraphicFramePr>
+          <p:nvPr>
+            <p:ph idx="1"/>
+          </p:nvPr>
+        </p:nvGraphicFramePr>
+        <p:xfrm>
+          <a:off x="457200" y="1193800"/>
+          <a:ext cx="8229600" cy="3390900"/>
+        </p:xfrm>
+        <a:graphic>
+          <a:graphicData uri="http://schemas.openxmlformats.org/drawingml/2006/table">
+            <a:tbl>
+              <a:tblPr firstRow="1" bandRow="1">
+                <a:tableStyleId>{5C22544A-7EE6-4342-B048-85BDC9FD1C3A}</a:tableStyleId>
+              </a:tblPr>
+              <a:tblGrid>
+                <a:gridCol w="2032000"/>
+                <a:gridCol w="2146300"/>
+                <a:gridCol w="2032000"/>
+                <a:gridCol w="2032000"/>
+              </a:tblGrid>
+              <a:tr h="0">
+                <a:tc>
+                  <a:txBody>
+                    <a:bodyPr/>
+                    <a:lstStyle/>
+                    <a:p>
+                      <a:pPr lvl="0" indent="0" marL="0">
+                        <a:buNone/>
+                      </a:pPr>
+                      <a:r>
+                        <a:rPr/>
+                        <a:t>Major division</a:t>
+                      </a:r>
+                    </a:p>
+                  </a:txBody>
+                  <a:tcPr/>
+                </a:tc>
+                <a:tc>
+                  <a:txBody>
+                    <a:bodyPr/>
+                    <a:lstStyle/>
+                    <a:p>
+                      <a:pPr lvl="0" indent="0" marL="0">
+                        <a:buNone/>
+                      </a:pPr>
+                      <a:r>
+                        <a:rPr/>
+                        <a:t>Ventricular Landmark</a:t>
+                      </a:r>
+                    </a:p>
+                  </a:txBody>
+                  <a:tcPr/>
+                </a:tc>
+                <a:tc>
+                  <a:txBody>
+                    <a:bodyPr/>
+                    <a:lstStyle/>
+                    <a:p>
+                      <a:pPr lvl="0" indent="0" marL="0">
+                        <a:buNone/>
+                      </a:pPr>
+                      <a:r>
+                        <a:rPr/>
+                        <a:t>Embryonic Division</a:t>
+                      </a:r>
+                    </a:p>
+                  </a:txBody>
+                  <a:tcPr/>
+                </a:tc>
+                <a:tc>
+                  <a:txBody>
+                    <a:bodyPr/>
+                    <a:lstStyle/>
+                    <a:p>
+                      <a:pPr lvl="0" indent="0" marL="0">
+                        <a:buNone/>
+                      </a:pPr>
+                      <a:r>
+                        <a:rPr/>
+                        <a:t>Structure</a:t>
+                      </a:r>
+                    </a:p>
+                  </a:txBody>
+                  <a:tcPr/>
+                </a:tc>
+              </a:tr>
+              <a:tr h="0">
+                <a:tc>
+                  <a:txBody>
+                    <a:bodyPr/>
+                    <a:lstStyle/>
+                    <a:p>
+                      <a:pPr lvl="0" indent="0" marL="0">
+                        <a:buNone/>
+                      </a:pPr>
+                      <a:r>
+                        <a:rPr/>
+                        <a:t>Midbrain</a:t>
+                      </a:r>
+                    </a:p>
+                  </a:txBody>
+                </a:tc>
+                <a:tc>
+                  <a:txBody>
+                    <a:bodyPr/>
+                    <a:lstStyle/>
+                    <a:p>
+                      <a:pPr lvl="0" indent="0" marL="0">
+                        <a:buNone/>
+                      </a:pPr>
+                      <a:r>
+                        <a:rPr/>
+                        <a:t>Cerebral Aqueduct</a:t>
+                      </a:r>
+                    </a:p>
+                  </a:txBody>
+                </a:tc>
+                <a:tc>
+                  <a:txBody>
+                    <a:bodyPr/>
+                    <a:lstStyle/>
+                    <a:p>
+                      <a:pPr lvl="0" indent="0" marL="0">
+                        <a:buNone/>
+                      </a:pPr>
+                      <a:r>
+                        <a:rPr/>
+                        <a:t>Mesencephalon</a:t>
+                      </a:r>
+                    </a:p>
+                  </a:txBody>
+                </a:tc>
+                <a:tc>
+                  <a:txBody>
+                    <a:bodyPr/>
+                    <a:lstStyle/>
+                    <a:p>
+                      <a:pPr lvl="0" indent="0" marL="0">
+                        <a:buNone/>
+                      </a:pPr>
+                      <a:r>
+                        <a:rPr/>
+                        <a:t>Tectum, tegmentum</a:t>
+                      </a:r>
+                    </a:p>
+                  </a:txBody>
+                </a:tc>
+              </a:tr>
+              <a:tr h="0">
+                <a:tc>
+                  <a:txBody>
+                    <a:bodyPr/>
+                    <a:lstStyle/>
+                    <a:p>
+                      <a:pPr lvl="0" indent="0" marL="0">
+                        <a:buNone/>
+                      </a:pPr>
+                      <a:r>
+                        <a:rPr/>
+                        <a:t>Hindbrain</a:t>
+                      </a:r>
+                    </a:p>
+                  </a:txBody>
+                </a:tc>
+                <a:tc>
+                  <a:txBody>
+                    <a:bodyPr/>
+                    <a:lstStyle/>
+                    <a:p>
+                      <a:pPr lvl="0" indent="0" marL="0">
+                        <a:buNone/>
+                      </a:pPr>
+                      <a:r>
+                        <a:rPr/>
+                        <a:t>4th</a:t>
+                      </a:r>
+                    </a:p>
+                  </a:txBody>
+                </a:tc>
+                <a:tc>
+                  <a:txBody>
+                    <a:bodyPr/>
+                    <a:lstStyle/>
+                    <a:p>
+                      <a:pPr lvl="0" indent="0" marL="0">
+                        <a:buNone/>
+                      </a:pPr>
+                      <a:r>
+                        <a:rPr/>
+                        <a:t>Metencephalon</a:t>
+                      </a:r>
+                    </a:p>
+                  </a:txBody>
+                </a:tc>
+                <a:tc>
+                  <a:txBody>
+                    <a:bodyPr/>
+                    <a:lstStyle/>
+                    <a:p>
+                      <a:pPr lvl="0" indent="0" marL="0">
+                        <a:buNone/>
+                      </a:pPr>
+                      <a:r>
+                        <a:rPr/>
+                        <a:t>Cerebellum, pons</a:t>
+                      </a:r>
+                    </a:p>
+                  </a:txBody>
+                </a:tc>
+              </a:tr>
+              <a:tr h="0">
+                <a:tc>
+                  <a:txBody>
+                    <a:bodyPr/>
+                    <a:lstStyle/>
+                    <a:p>
+                      <a:endParaRPr/>
+                    </a:p>
+                  </a:txBody>
+                </a:tc>
+                <a:tc>
+                  <a:txBody>
+                    <a:bodyPr/>
+                    <a:lstStyle/>
+                    <a:p>
+                      <a:pPr lvl="0" indent="0" marL="0">
+                        <a:buNone/>
+                      </a:pPr>
+                      <a:r>
+                        <a:rPr/>
+                        <a:t>–</a:t>
+                      </a:r>
+                    </a:p>
+                  </a:txBody>
+                </a:tc>
+                <a:tc>
+                  <a:txBody>
+                    <a:bodyPr/>
+                    <a:lstStyle/>
+                    <a:p>
+                      <a:pPr lvl="0" indent="0" marL="0">
+                        <a:buNone/>
+                      </a:pPr>
+                      <a:r>
+                        <a:rPr/>
+                        <a:t>Mylencephalon</a:t>
+                      </a:r>
+                    </a:p>
+                  </a:txBody>
+                </a:tc>
+                <a:tc>
+                  <a:txBody>
+                    <a:bodyPr/>
+                    <a:lstStyle/>
+                    <a:p>
+                      <a:pPr lvl="0" indent="0" marL="0">
+                        <a:buNone/>
+                      </a:pPr>
+                      <a:r>
+                        <a:rPr/>
+                        <a:t>Medulla oblongata</a:t>
+                      </a:r>
+                    </a:p>
+                  </a:txBody>
+                </a:tc>
+              </a:tr>
+            </a:tbl>
+          </a:graphicData>
+        </a:graphic>
+      </p:graphicFrame>
+    </p:spTree>
+  </p:cSld>
+</p:sld>
+</file>
+
+<file path=ppt/slides/slide46.xml><?xml version="1.0" encoding="utf-8"?>
+<p:sld xmlns:a="http://schemas.openxmlformats.org/drawingml/2006/main" xmlns:r="http://schemas.openxmlformats.org/officeDocument/2006/relationships" xmlns:p="http://schemas.openxmlformats.org/presentationml/2006/main">
+  <p:cSld>
+    <p:spTree>
+      <p:nvGrpSpPr>
+        <p:cNvPr id="1" name=""/>
+        <p:cNvGrpSpPr/>
+        <p:nvPr/>
+      </p:nvGrpSpPr>
+      <p:grpSpPr>
+        <a:xfrm>
+          <a:off x="0" y="0"/>
+          <a:ext cx="0" cy="0"/>
+          <a:chOff x="0" y="0"/>
+          <a:chExt cx="0" cy="0"/>
+        </a:xfrm>
+      </p:grpSpPr>
+      <p:sp>
+        <p:nvSpPr>
+          <p:cNvPr id="2" name="Title 1"/>
+          <p:cNvSpPr>
+            <a:spLocks noGrp="1"/>
+          </p:cNvSpPr>
+          <p:nvPr>
+            <p:ph type="title"/>
+          </p:nvPr>
+        </p:nvSpPr>
+        <p:spPr/>
+        <p:txBody>
+          <a:bodyPr/>
+          <a:lstStyle/>
+          <a:p>
+            <a:pPr lvl="0" indent="0" marL="0">
+              <a:buNone/>
+            </a:pPr>
+            <a:r>
+              <a:rPr/>
+              <a:t>Midbrain</a:t>
+            </a:r>
+          </a:p>
+        </p:txBody>
+      </p:sp>
+      <p:sp>
+        <p:nvSpPr>
+          <p:cNvPr id="3" name="Content Placeholder 2"/>
+          <p:cNvSpPr>
+            <a:spLocks noGrp="1"/>
+          </p:cNvSpPr>
+          <p:nvPr>
+            <p:ph idx="1"/>
+          </p:nvPr>
+        </p:nvSpPr>
+        <p:spPr/>
+        <p:txBody>
+          <a:bodyPr/>
+          <a:lstStyle/>
+          <a:p>
+            <a:pPr lvl="0"/>
+            <a:r>
+              <a:rPr/>
+              <a:t>Tectum (roof), dorsal</a:t>
+            </a:r>
+          </a:p>
+          <a:p>
+            <a:pPr lvl="0"/>
+            <a:r>
+              <a:rPr/>
+              <a:t>Tegmentum (floor), ventral</a:t>
+            </a:r>
+          </a:p>
+        </p:txBody>
+      </p:sp>
+    </p:spTree>
+  </p:cSld>
+</p:sld>
+</file>
+
+<file path=ppt/slides/slide47.xml><?xml version="1.0" encoding="utf-8"?>
+<p:sld xmlns:a="http://schemas.openxmlformats.org/drawingml/2006/main" xmlns:r="http://schemas.openxmlformats.org/officeDocument/2006/relationships" xmlns:p="http://schemas.openxmlformats.org/presentationml/2006/main">
+  <p:cSld>
+    <p:spTree>
+      <p:nvGrpSpPr>
+        <p:cNvPr id="1" name=""/>
+        <p:cNvGrpSpPr/>
+        <p:nvPr/>
+      </p:nvGrpSpPr>
+      <p:grpSpPr>
+        <a:xfrm>
+          <a:off x="0" y="0"/>
+          <a:ext cx="0" cy="0"/>
+          <a:chOff x="0" y="0"/>
+          <a:chExt cx="0" cy="0"/>
+        </a:xfrm>
+      </p:grpSpPr>
+      <p:sp>
+        <p:nvSpPr>
+          <p:cNvPr id="2" name="Title 1"/>
+          <p:cNvSpPr>
+            <a:spLocks noGrp="1"/>
+          </p:cNvSpPr>
+          <p:nvPr>
+            <p:ph type="title"/>
+          </p:nvPr>
+        </p:nvSpPr>
+        <p:spPr/>
+        <p:txBody>
+          <a:bodyPr/>
+          <a:lstStyle/>
+          <a:p>
+            <a:pPr lvl="0" indent="0" marL="0">
+              <a:buNone/>
+            </a:pPr>
+            <a:r>
+              <a:rPr/>
+              <a:t>Tectum</a:t>
+            </a:r>
+          </a:p>
+        </p:txBody>
+      </p:sp>
+      <p:sp>
+        <p:nvSpPr>
+          <p:cNvPr id="3" name="Content Placeholder 2"/>
+          <p:cNvSpPr>
+            <a:spLocks noGrp="1"/>
+          </p:cNvSpPr>
+          <p:nvPr>
+            <p:ph idx="1" sz="half"/>
+          </p:nvPr>
+        </p:nvSpPr>
+        <p:spPr/>
+        <p:txBody>
+          <a:bodyPr/>
+          <a:lstStyle/>
+          <a:p>
+            <a:pPr lvl="0"/>
+            <a:r>
+              <a:rPr/>
+              <a:t>“Roof” of the midbrain</a:t>
+            </a:r>
+          </a:p>
+          <a:p>
+            <a:pPr lvl="0"/>
+            <a:r>
+              <a:rPr/>
+              <a:t>Superior and inferior colliculus (colliculi is plural for ‘little hill’)</a:t>
+            </a:r>
+          </a:p>
+        </p:txBody>
+      </p:sp>
+      <p:pic>
+        <p:nvPicPr>
+          <p:cNvPr descr="http://www.radioanatomie.com/30_irm_sagittale_mediane/99_images/2_Tectum.jpg" id="0" name="Picture 1"/>
+          <p:cNvPicPr>
+            <a:picLocks noGrp="1" noChangeAspect="1"/>
+          </p:cNvPicPr>
+          <p:nvPr/>
+        </p:nvPicPr>
+        <p:blipFill>
+          <a:blip r:embed="rId2"/>
+          <a:stretch>
+            <a:fillRect/>
+          </a:stretch>
+        </p:blipFill>
+        <p:spPr bwMode="auto">
+          <a:xfrm>
+            <a:off x="4648200" y="1295400"/>
+            <a:ext cx="4038600" cy="2692400"/>
+          </a:xfrm>
+          <a:prstGeom prst="rect">
+            <a:avLst/>
+          </a:prstGeom>
+          <a:noFill/>
+          <a:ln w="9525">
+            <a:noFill/>
+            <a:headEnd/>
+            <a:tailEnd/>
+          </a:ln>
+        </p:spPr>
+      </p:pic>
+      <p:sp>
+        <p:nvSpPr>
+          <p:cNvPr id="1" name="TextBox 3"/>
+          <p:cNvSpPr txBox="1"/>
+          <p:nvPr/>
+        </p:nvSpPr>
+        <p:spPr>
+          <a:xfrm>
+            <a:off x="4648200" y="4076700"/>
+            <a:ext cx="4038600" cy="508000"/>
+          </a:xfrm>
+          <a:prstGeom prst="rect">
+            <a:avLst/>
+          </a:prstGeom>
+          <a:noFill/>
+        </p:spPr>
+        <p:txBody>
+          <a:bodyPr/>
+          <a:lstStyle/>
+          <a:p>
+            <a:pPr lvl="0" indent="0" marL="0" algn="ctr">
+              <a:buNone/>
+            </a:pPr>
+            <a:r>
+              <a:rPr/>
+              <a:t>Labeled MRI of Tectum</a:t>
+            </a:r>
+          </a:p>
+        </p:txBody>
+      </p:sp>
+    </p:spTree>
+  </p:cSld>
+</p:sld>
+</file>
+
+<file path=ppt/slides/slide48.xml><?xml version="1.0" encoding="utf-8"?>
+<p:sld xmlns:a="http://schemas.openxmlformats.org/drawingml/2006/main" xmlns:r="http://schemas.openxmlformats.org/officeDocument/2006/relationships" xmlns:p="http://schemas.openxmlformats.org/presentationml/2006/main">
+  <p:cSld>
+    <p:spTree>
+      <p:nvGrpSpPr>
+        <p:cNvPr id="1" name=""/>
+        <p:cNvGrpSpPr/>
+        <p:nvPr/>
+      </p:nvGrpSpPr>
+      <p:grpSpPr>
+        <a:xfrm>
+          <a:off x="0" y="0"/>
+          <a:ext cx="0" cy="0"/>
+          <a:chOff x="0" y="0"/>
+          <a:chExt cx="0" cy="0"/>
+        </a:xfrm>
+      </p:grpSpPr>
+      <p:sp>
+        <p:nvSpPr>
+          <p:cNvPr id="2" name="Title 1"/>
+          <p:cNvSpPr>
+            <a:spLocks noGrp="1"/>
+          </p:cNvSpPr>
+          <p:nvPr>
+            <p:ph type="title"/>
+          </p:nvPr>
+        </p:nvSpPr>
+        <p:spPr/>
+        <p:txBody>
+          <a:bodyPr/>
+          <a:lstStyle/>
+          <a:p>
+            <a:pPr lvl="0" indent="0" marL="0">
+              <a:buNone/>
+            </a:pPr>
+            <a:r>
+              <a:rPr/>
+              <a:t>Tectum: Components</a:t>
+            </a:r>
+          </a:p>
+        </p:txBody>
+      </p:sp>
+      <p:sp>
+        <p:nvSpPr>
+          <p:cNvPr id="3" name="Content Placeholder 2"/>
+          <p:cNvSpPr>
+            <a:spLocks noGrp="1"/>
+          </p:cNvSpPr>
+          <p:nvPr>
+            <p:ph idx="1" sz="half"/>
+          </p:nvPr>
+        </p:nvSpPr>
+        <p:spPr/>
+        <p:txBody>
+          <a:bodyPr/>
+          <a:lstStyle/>
+          <a:p>
+            <a:pPr lvl="0"/>
+            <a:r>
+              <a:rPr/>
+              <a:t>Superior colliculus (colliculi)</a:t>
+            </a:r>
+          </a:p>
+          <a:p>
+            <a:pPr lvl="1"/>
+            <a:r>
+              <a:rPr/>
+              <a:t>Reflexive orienting of eyes, head, ears (superior colliculi)</a:t>
+            </a:r>
+          </a:p>
+          <a:p>
+            <a:pPr lvl="0"/>
+            <a:r>
+              <a:rPr/>
+              <a:t>Inferior colliculus</a:t>
+            </a:r>
+          </a:p>
+          <a:p>
+            <a:pPr lvl="1"/>
+            <a:r>
+              <a:rPr/>
+              <a:t>Auditory processing (from brainstem to auditory thalamus)</a:t>
+            </a:r>
+          </a:p>
+        </p:txBody>
+      </p:sp>
+      <p:pic>
+        <p:nvPicPr>
+          <p:cNvPr descr="https://upload.wikimedia.org/wikipedia/commons/0/0b/Gray719.png" id="0" name="Picture 1"/>
+          <p:cNvPicPr>
+            <a:picLocks noGrp="1" noChangeAspect="1"/>
+          </p:cNvPicPr>
+          <p:nvPr/>
+        </p:nvPicPr>
+        <p:blipFill>
+          <a:blip r:embed="rId2"/>
+          <a:stretch>
+            <a:fillRect/>
+          </a:stretch>
+        </p:blipFill>
+        <p:spPr bwMode="auto">
+          <a:xfrm>
+            <a:off x="4648200" y="1295400"/>
+            <a:ext cx="4038600" cy="2692400"/>
+          </a:xfrm>
+          <a:prstGeom prst="rect">
+            <a:avLst/>
+          </a:prstGeom>
+          <a:noFill/>
+          <a:ln w="9525">
+            <a:noFill/>
+            <a:headEnd/>
+            <a:tailEnd/>
+          </a:ln>
+        </p:spPr>
+      </p:pic>
+      <p:sp>
+        <p:nvSpPr>
+          <p:cNvPr id="1" name="TextBox 3"/>
+          <p:cNvSpPr txBox="1"/>
+          <p:nvPr/>
+        </p:nvSpPr>
+        <p:spPr>
+          <a:xfrm>
+            <a:off x="4648200" y="4076700"/>
+            <a:ext cx="4038600" cy="508000"/>
+          </a:xfrm>
+          <a:prstGeom prst="rect">
+            <a:avLst/>
+          </a:prstGeom>
+          <a:noFill/>
+        </p:spPr>
+        <p:txBody>
+          <a:bodyPr/>
+          <a:lstStyle/>
+          <a:p>
+            <a:pPr lvl="0" indent="0" marL="0" algn="ctr">
+              <a:buNone/>
+            </a:pPr>
+            <a:r>
+              <a:rPr/>
+              <a:t>Labeled locations of Inferior and Superior Colliculi of the dorsal midbrain or Tectum from Wikipedia</a:t>
+            </a:r>
+          </a:p>
+        </p:txBody>
+      </p:sp>
+    </p:spTree>
+  </p:cSld>
+</p:sld>
+</file>
+
+<file path=ppt/slides/slide49.xml><?xml version="1.0" encoding="utf-8"?>
+<p:sld xmlns:a="http://schemas.openxmlformats.org/drawingml/2006/main" xmlns:r="http://schemas.openxmlformats.org/officeDocument/2006/relationships" xmlns:p="http://schemas.openxmlformats.org/presentationml/2006/main">
+  <p:cSld>
+    <p:spTree>
+      <p:nvGrpSpPr>
+        <p:cNvPr id="1" name=""/>
+        <p:cNvGrpSpPr/>
+        <p:nvPr/>
+      </p:nvGrpSpPr>
+      <p:grpSpPr>
+        <a:xfrm>
+          <a:off x="0" y="0"/>
+          <a:ext cx="0" cy="0"/>
+          <a:chOff x="0" y="0"/>
+          <a:chExt cx="0" cy="0"/>
+        </a:xfrm>
+      </p:grpSpPr>
+      <p:sp>
+        <p:nvSpPr>
+          <p:cNvPr id="2" name="Title 1"/>
+          <p:cNvSpPr>
+            <a:spLocks noGrp="1"/>
+          </p:cNvSpPr>
+          <p:nvPr>
+            <p:ph type="title"/>
+          </p:nvPr>
+        </p:nvSpPr>
+        <p:spPr/>
+        <p:txBody>
+          <a:bodyPr/>
+          <a:lstStyle/>
+          <a:p>
+            <a:pPr lvl="0" indent="0" marL="0">
+              <a:buNone/>
+            </a:pPr>
+            <a:r>
+              <a:rPr/>
+              <a:t>Tegmentum</a:t>
+            </a:r>
+          </a:p>
+        </p:txBody>
+      </p:sp>
+      <p:sp>
+        <p:nvSpPr>
+          <p:cNvPr id="3" name="Content Placeholder 2"/>
+          <p:cNvSpPr>
+            <a:spLocks noGrp="1"/>
+          </p:cNvSpPr>
+          <p:nvPr>
+            <p:ph idx="1" sz="half"/>
+          </p:nvPr>
+        </p:nvSpPr>
+        <p:spPr/>
+        <p:txBody>
+          <a:bodyPr/>
+          <a:lstStyle/>
+          <a:p>
+            <a:pPr lvl="0"/>
+            <a:r>
+              <a:rPr/>
+              <a:t>“Floor” of the midbrain</a:t>
+            </a:r>
+          </a:p>
+          <a:p>
+            <a:pPr lvl="0"/>
+            <a:r>
+              <a:rPr/>
+              <a:t>Species-typical movement sequences</a:t>
+            </a:r>
+          </a:p>
+          <a:p>
+            <a:pPr lvl="0"/>
+            <a:r>
+              <a:rPr/>
+              <a:t>Neuromodulatory nuclei release NTs</a:t>
+            </a:r>
+          </a:p>
+          <a:p>
+            <a:pPr lvl="1"/>
+            <a:r>
+              <a:rPr/>
+              <a:t>Norepinephrine (NE)</a:t>
+            </a:r>
+          </a:p>
+          <a:p>
+            <a:pPr lvl="1"/>
+            <a:r>
+              <a:rPr/>
+              <a:t>Serotonin (5-HT)</a:t>
+            </a:r>
+          </a:p>
+          <a:p>
+            <a:pPr lvl="1"/>
+            <a:r>
+              <a:rPr/>
+              <a:t>Dopamine (DA) – from </a:t>
+            </a:r>
+            <a:r>
+              <a:rPr i="1"/>
+              <a:t>ventral tegmental area (VTA)</a:t>
+            </a:r>
+          </a:p>
+        </p:txBody>
+      </p:sp>
+      <p:pic>
+        <p:nvPicPr>
+          <p:cNvPr descr="https://i0.wp.com/neupsykey.com/wp-content/uploads/2019/05/00254.jpeg?w=960" id="0" name="Picture 1"/>
+          <p:cNvPicPr>
+            <a:picLocks noGrp="1" noChangeAspect="1"/>
+          </p:cNvPicPr>
+          <p:nvPr/>
+        </p:nvPicPr>
+        <p:blipFill>
+          <a:blip r:embed="rId2"/>
+          <a:stretch>
+            <a:fillRect/>
+          </a:stretch>
+        </p:blipFill>
+        <p:spPr bwMode="auto">
+          <a:xfrm>
+            <a:off x="5511800" y="1193800"/>
+            <a:ext cx="2298700" cy="2882900"/>
+          </a:xfrm>
+          <a:prstGeom prst="rect">
+            <a:avLst/>
+          </a:prstGeom>
+          <a:noFill/>
+          <a:ln w="9525">
+            <a:noFill/>
+            <a:headEnd/>
+            <a:tailEnd/>
+          </a:ln>
+        </p:spPr>
+      </p:pic>
+      <p:sp>
+        <p:nvSpPr>
+          <p:cNvPr id="1" name="TextBox 3"/>
+          <p:cNvSpPr txBox="1"/>
+          <p:nvPr/>
+        </p:nvSpPr>
+        <p:spPr>
+          <a:xfrm>
+            <a:off x="4648200" y="4076700"/>
+            <a:ext cx="4038600" cy="508000"/>
+          </a:xfrm>
+          <a:prstGeom prst="rect">
+            <a:avLst/>
+          </a:prstGeom>
+          <a:noFill/>
+        </p:spPr>
+        <p:txBody>
+          <a:bodyPr/>
+          <a:lstStyle/>
+          <a:p>
+            <a:pPr lvl="0" indent="0" marL="0" algn="ctr">
+              <a:buNone/>
+            </a:pPr>
+            <a:r>
+              <a:rPr/>
+              <a:t>https://neupsykey.com/the-midbrain/</a:t>
+            </a:r>
+          </a:p>
+        </p:txBody>
+      </p:sp>
+    </p:spTree>
+  </p:cSld>
+</p:sld>
+</file>
+
+<file path=ppt/slides/slide5.xml><?xml version="1.0" encoding="utf-8"?>
+<p:sld xmlns:a="http://schemas.openxmlformats.org/drawingml/2006/main" xmlns:r="http://schemas.openxmlformats.org/officeDocument/2006/relationships" xmlns:p="http://schemas.openxmlformats.org/presentationml/2006/main">
+  <p:cSld>
+    <p:spTree>
+      <p:nvGrpSpPr>
+        <p:cNvPr id="1" name=""/>
+        <p:cNvGrpSpPr/>
+        <p:nvPr/>
+      </p:nvGrpSpPr>
+      <p:grpSpPr>
+        <a:xfrm>
+          <a:off x="0" y="0"/>
+          <a:ext cx="0" cy="0"/>
+          <a:chOff x="0" y="0"/>
+          <a:chExt cx="0" cy="0"/>
+        </a:xfrm>
+      </p:grpSpPr>
+      <p:sp>
+        <p:nvSpPr>
+          <p:cNvPr id="2" name="Title 1"/>
+          <p:cNvSpPr>
+            <a:spLocks noGrp="1"/>
+          </p:cNvSpPr>
+          <p:nvPr>
+            <p:ph type="title"/>
+          </p:nvPr>
+        </p:nvSpPr>
+        <p:spPr/>
+        <p:txBody>
+          <a:bodyPr/>
+          <a:lstStyle/>
+          <a:p>
+            <a:pPr lvl="0" indent="0" marL="0">
+              <a:buNone/>
+            </a:pPr>
+            <a:r>
+              <a:rPr/>
+              <a:t>Announcements</a:t>
+            </a:r>
+          </a:p>
+        </p:txBody>
+      </p:sp>
+      <p:sp>
+        <p:nvSpPr>
+          <p:cNvPr id="3" name="Content Placeholder 2"/>
+          <p:cNvSpPr>
+            <a:spLocks noGrp="1"/>
+          </p:cNvSpPr>
+          <p:nvPr>
+            <p:ph idx="1"/>
+          </p:nvPr>
+        </p:nvSpPr>
+        <p:spPr/>
+        <p:txBody>
+          <a:bodyPr/>
+          <a:lstStyle/>
+          <a:p>
+            <a:pPr lvl="0"/>
+            <a:r>
+              <a:rPr/>
+              <a:t>Exercise LVL due </a:t>
+            </a:r>
+            <a:r>
+              <a:rPr b="1"/>
+              <a:t>today</a:t>
+            </a:r>
+            <a:r>
+              <a:rPr/>
+              <a:t>.</a:t>
+            </a:r>
+          </a:p>
+          <a:p>
+            <a:pPr lvl="1"/>
+            <a:r>
+              <a:rPr>
+                <a:hlinkClick r:id="rId2"/>
+              </a:rPr>
+              <a:t>Canvas dropbox</a:t>
+            </a:r>
+          </a:p>
+          <a:p>
+            <a:pPr lvl="0"/>
+            <a:r>
+              <a:rPr/>
+              <a:t>Exercise ANAT due </a:t>
+            </a:r>
+            <a:r>
+              <a:rPr b="1"/>
+              <a:t>next Thursday, January 29, 2026</a:t>
+            </a:r>
+            <a:r>
+              <a:rPr/>
+              <a:t>.</a:t>
+            </a:r>
+          </a:p>
+          <a:p>
+            <a:pPr lvl="1"/>
+            <a:r>
+              <a:rPr>
+                <a:hlinkClick r:id="rId3"/>
+              </a:rPr>
+              <a:t>Canvas dropbox</a:t>
+            </a:r>
+          </a:p>
+        </p:txBody>
+      </p:sp>
+    </p:spTree>
+  </p:cSld>
+</p:sld>
+</file>
+
+<file path=ppt/slides/slide50.xml><?xml version="1.0" encoding="utf-8"?>
+<p:sld xmlns:a="http://schemas.openxmlformats.org/drawingml/2006/main" xmlns:r="http://schemas.openxmlformats.org/officeDocument/2006/relationships" xmlns:p="http://schemas.openxmlformats.org/presentationml/2006/main">
+  <p:cSld>
+    <p:spTree>
+      <p:nvGrpSpPr>
+        <p:cNvPr id="1" name=""/>
+        <p:cNvGrpSpPr/>
+        <p:nvPr/>
+      </p:nvGrpSpPr>
+      <p:grpSpPr>
+        <a:xfrm>
+          <a:off x="0" y="0"/>
+          <a:ext cx="0" cy="0"/>
+          <a:chOff x="0" y="0"/>
+          <a:chExt cx="0" cy="0"/>
+        </a:xfrm>
+      </p:grpSpPr>
+      <p:sp>
+        <p:nvSpPr>
+          <p:cNvPr id="2" name="Title 1"/>
+          <p:cNvSpPr>
+            <a:spLocks noGrp="1"/>
+          </p:cNvSpPr>
+          <p:nvPr>
+            <p:ph type="title"/>
+          </p:nvPr>
+        </p:nvSpPr>
+        <p:spPr/>
+        <p:txBody>
+          <a:bodyPr/>
+          <a:lstStyle/>
+          <a:p>
+            <a:pPr lvl="0" indent="0" marL="0">
+              <a:buNone/>
+            </a:pPr>
+            <a:r>
+              <a:rPr/>
+              <a:t>Hindbrain</a:t>
+            </a:r>
+          </a:p>
+        </p:txBody>
+      </p:sp>
+      <p:sp>
+        <p:nvSpPr>
+          <p:cNvPr id="3" name="Content Placeholder 2"/>
+          <p:cNvSpPr>
+            <a:spLocks noGrp="1"/>
+          </p:cNvSpPr>
+          <p:nvPr>
+            <p:ph idx="1" sz="half"/>
+          </p:nvPr>
+        </p:nvSpPr>
+        <p:spPr/>
+        <p:txBody>
+          <a:bodyPr/>
+          <a:lstStyle/>
+          <a:p>
+            <a:pPr lvl="0"/>
+            <a:r>
+              <a:rPr/>
+              <a:t>Structures adjacent (or caudal to) 4th ventricle</a:t>
+            </a:r>
+          </a:p>
+          <a:p>
+            <a:pPr lvl="0"/>
+            <a:r>
+              <a:rPr/>
+              <a:t>Components</a:t>
+            </a:r>
+          </a:p>
+          <a:p>
+            <a:pPr lvl="1"/>
+            <a:r>
+              <a:rPr/>
+              <a:t>Pons</a:t>
+            </a:r>
+          </a:p>
+          <a:p>
+            <a:pPr lvl="1"/>
+            <a:r>
+              <a:rPr/>
+              <a:t>Cerebellum</a:t>
+            </a:r>
+          </a:p>
+          <a:p>
+            <a:pPr lvl="1"/>
+            <a:r>
+              <a:rPr/>
+              <a:t>Medulla oblongata</a:t>
+            </a:r>
+          </a:p>
+        </p:txBody>
+      </p:sp>
+      <p:pic>
+        <p:nvPicPr>
+          <p:cNvPr descr="https://upload.wikimedia.org/wikipedia/commons/thumb/b/b9/Gray708.svg/500px-Gray708.svg.png" id="0" name="Picture 1"/>
+          <p:cNvPicPr>
+            <a:picLocks noGrp="1" noChangeAspect="1"/>
+          </p:cNvPicPr>
+          <p:nvPr/>
+        </p:nvPicPr>
+        <p:blipFill>
+          <a:blip r:embed="rId2"/>
+          <a:stretch>
+            <a:fillRect/>
+          </a:stretch>
+        </p:blipFill>
+        <p:spPr bwMode="auto">
+          <a:xfrm>
+            <a:off x="4648200" y="1295400"/>
+            <a:ext cx="4038600" cy="2692400"/>
+          </a:xfrm>
+          <a:prstGeom prst="rect">
+            <a:avLst/>
+          </a:prstGeom>
+          <a:noFill/>
+          <a:ln w="9525">
+            <a:noFill/>
+            <a:headEnd/>
+            <a:tailEnd/>
+          </a:ln>
+        </p:spPr>
+      </p:pic>
+      <p:sp>
+        <p:nvSpPr>
+          <p:cNvPr id="1" name="TextBox 3"/>
+          <p:cNvSpPr txBox="1"/>
+          <p:nvPr/>
+        </p:nvSpPr>
+        <p:spPr>
+          <a:xfrm>
+            <a:off x="4648200" y="4076700"/>
+            <a:ext cx="4038600" cy="508000"/>
+          </a:xfrm>
+          <a:prstGeom prst="rect">
+            <a:avLst/>
+          </a:prstGeom>
+          <a:noFill/>
+        </p:spPr>
+        <p:txBody>
+          <a:bodyPr/>
+          <a:lstStyle/>
+          <a:p>
+            <a:pPr lvl="0" indent="0" marL="0" algn="ctr">
+              <a:buNone/>
+            </a:pPr>
+            <a:r>
+              <a:rPr/>
+              <a:t>Lateral view of brainstem from Wikipedia</a:t>
+            </a:r>
+          </a:p>
+        </p:txBody>
+      </p:sp>
+    </p:spTree>
+  </p:cSld>
+</p:sld>
+</file>
+
+<file path=ppt/slides/slide51.xml><?xml version="1.0" encoding="utf-8"?>
+<p:sld xmlns:a="http://schemas.openxmlformats.org/drawingml/2006/main" xmlns:r="http://schemas.openxmlformats.org/officeDocument/2006/relationships" xmlns:p="http://schemas.openxmlformats.org/presentationml/2006/main">
+  <p:cSld>
+    <p:spTree>
+      <p:nvGrpSpPr>
+        <p:cNvPr id="1" name=""/>
+        <p:cNvGrpSpPr/>
+        <p:nvPr/>
+      </p:nvGrpSpPr>
+      <p:grpSpPr>
+        <a:xfrm>
+          <a:off x="0" y="0"/>
+          <a:ext cx="0" cy="0"/>
+          <a:chOff x="0" y="0"/>
+          <a:chExt cx="0" cy="0"/>
+        </a:xfrm>
+      </p:grpSpPr>
+      <p:sp>
+        <p:nvSpPr>
+          <p:cNvPr id="2" name="Title 1"/>
+          <p:cNvSpPr>
+            <a:spLocks noGrp="1"/>
+          </p:cNvSpPr>
+          <p:nvPr>
+            <p:ph type="title"/>
+          </p:nvPr>
+        </p:nvSpPr>
+        <p:spPr/>
+        <p:txBody>
+          <a:bodyPr/>
+          <a:lstStyle/>
+          <a:p>
+            <a:pPr lvl="0" indent="0" marL="0">
+              <a:buNone/>
+            </a:pPr>
+            <a:r>
+              <a:rPr/>
+              <a:t>Pons</a:t>
+            </a:r>
+          </a:p>
+        </p:txBody>
+      </p:sp>
+      <p:sp>
+        <p:nvSpPr>
+          <p:cNvPr id="3" name="Content Placeholder 2"/>
+          <p:cNvSpPr>
+            <a:spLocks noGrp="1"/>
+          </p:cNvSpPr>
+          <p:nvPr>
+            <p:ph idx="1" sz="half"/>
+          </p:nvPr>
+        </p:nvSpPr>
+        <p:spPr/>
+        <p:txBody>
+          <a:bodyPr/>
+          <a:lstStyle/>
+          <a:p>
+            <a:pPr lvl="0"/>
+            <a:r>
+              <a:rPr/>
+              <a:t>Bulge on ventral brain stem</a:t>
+            </a:r>
+          </a:p>
+          <a:p>
+            <a:pPr lvl="0"/>
+            <a:r>
+              <a:rPr/>
+              <a:t>Relay to cerebellum</a:t>
+            </a:r>
+          </a:p>
+        </p:txBody>
+      </p:sp>
+      <p:pic>
+        <p:nvPicPr>
+          <p:cNvPr descr="https://upload.wikimedia.org/wikipedia/commons/6/69/1311_Brain_Stem.jpg" id="0" name="Picture 1"/>
+          <p:cNvPicPr>
+            <a:picLocks noGrp="1" noChangeAspect="1"/>
+          </p:cNvPicPr>
+          <p:nvPr/>
+        </p:nvPicPr>
+        <p:blipFill>
+          <a:blip r:embed="rId2"/>
+          <a:stretch>
+            <a:fillRect/>
+          </a:stretch>
+        </p:blipFill>
+        <p:spPr bwMode="auto">
+          <a:xfrm>
+            <a:off x="4648200" y="1295400"/>
+            <a:ext cx="4038600" cy="2692400"/>
+          </a:xfrm>
+          <a:prstGeom prst="rect">
+            <a:avLst/>
+          </a:prstGeom>
+          <a:noFill/>
+          <a:ln w="9525">
+            <a:noFill/>
+            <a:headEnd/>
+            <a:tailEnd/>
+          </a:ln>
+        </p:spPr>
+      </p:pic>
+      <p:sp>
+        <p:nvSpPr>
+          <p:cNvPr id="1" name="TextBox 3"/>
+          <p:cNvSpPr txBox="1"/>
+          <p:nvPr/>
+        </p:nvSpPr>
+        <p:spPr>
+          <a:xfrm>
+            <a:off x="4648200" y="4076700"/>
+            <a:ext cx="4038600" cy="508000"/>
+          </a:xfrm>
+          <a:prstGeom prst="rect">
+            <a:avLst/>
+          </a:prstGeom>
+          <a:noFill/>
+        </p:spPr>
+        <p:txBody>
+          <a:bodyPr/>
+          <a:lstStyle/>
+          <a:p>
+            <a:pPr lvl="0" indent="0" marL="0" algn="ctr">
+              <a:buNone/>
+            </a:pPr>
+            <a:r>
+              <a:rPr/>
+              <a:t>Illustration of brainstem from Wikipedia</a:t>
+            </a:r>
+          </a:p>
+        </p:txBody>
+      </p:sp>
+    </p:spTree>
+  </p:cSld>
+</p:sld>
+</file>
+
+<file path=ppt/slides/slide52.xml><?xml version="1.0" encoding="utf-8"?>
+<p:sld xmlns:a="http://schemas.openxmlformats.org/drawingml/2006/main" xmlns:r="http://schemas.openxmlformats.org/officeDocument/2006/relationships" xmlns:p="http://schemas.openxmlformats.org/presentationml/2006/main">
+  <p:cSld>
+    <p:spTree>
+      <p:nvGrpSpPr>
+        <p:cNvPr id="1" name=""/>
+        <p:cNvGrpSpPr/>
+        <p:nvPr/>
+      </p:nvGrpSpPr>
+      <p:grpSpPr>
+        <a:xfrm>
+          <a:off x="0" y="0"/>
+          <a:ext cx="0" cy="0"/>
+          <a:chOff x="0" y="0"/>
+          <a:chExt cx="0" cy="0"/>
+        </a:xfrm>
+      </p:grpSpPr>
+      <p:sp>
+        <p:nvSpPr>
+          <p:cNvPr id="2" name="Title 1"/>
+          <p:cNvSpPr>
+            <a:spLocks noGrp="1"/>
+          </p:cNvSpPr>
+          <p:nvPr>
+            <p:ph type="title"/>
+          </p:nvPr>
+        </p:nvSpPr>
+        <p:spPr/>
+        <p:txBody>
+          <a:bodyPr/>
+          <a:lstStyle/>
+          <a:p>
+            <a:pPr lvl="0" indent="0" marL="0">
+              <a:buNone/>
+            </a:pPr>
+            <a:r>
+              <a:rPr/>
+              <a:t>Cerebellum</a:t>
+            </a:r>
+          </a:p>
+        </p:txBody>
+      </p:sp>
+      <p:sp>
+        <p:nvSpPr>
+          <p:cNvPr id="3" name="Content Placeholder 2"/>
+          <p:cNvSpPr>
+            <a:spLocks noGrp="1"/>
+          </p:cNvSpPr>
+          <p:nvPr>
+            <p:ph idx="1" sz="half"/>
+          </p:nvPr>
+        </p:nvSpPr>
+        <p:spPr/>
+        <p:txBody>
+          <a:bodyPr/>
+          <a:lstStyle/>
+          <a:p>
+            <a:pPr lvl="0"/>
+            <a:r>
+              <a:rPr/>
+              <a:t>“Little brain”, but most neurons in CNS</a:t>
+            </a:r>
+          </a:p>
+          <a:p>
+            <a:pPr lvl="0"/>
+            <a:r>
+              <a:rPr/>
+              <a:t>Dorsal to pons</a:t>
+            </a:r>
+          </a:p>
+          <a:p>
+            <a:pPr lvl="0"/>
+            <a:r>
+              <a:rPr/>
+              <a:t>Movement coordination, simple learning (classical conditioning)</a:t>
+            </a:r>
+          </a:p>
+        </p:txBody>
+      </p:sp>
+      <p:pic>
+        <p:nvPicPr>
+          <p:cNvPr descr="https://upload.wikimedia.org/wikipedia/commons/1/14/Cerebellum_animation_small.gif" id="0" name="Picture 1"/>
+          <p:cNvPicPr>
+            <a:picLocks noGrp="1" noChangeAspect="1"/>
+          </p:cNvPicPr>
+          <p:nvPr/>
+        </p:nvPicPr>
+        <p:blipFill>
+          <a:blip r:embed="rId2"/>
+          <a:stretch>
+            <a:fillRect/>
+          </a:stretch>
+        </p:blipFill>
+        <p:spPr bwMode="auto">
+          <a:xfrm>
+            <a:off x="4648200" y="1295400"/>
+            <a:ext cx="4038600" cy="2692400"/>
+          </a:xfrm>
+          <a:prstGeom prst="rect">
+            <a:avLst/>
+          </a:prstGeom>
+          <a:noFill/>
+          <a:ln w="9525">
+            <a:noFill/>
+            <a:headEnd/>
+            <a:tailEnd/>
+          </a:ln>
+        </p:spPr>
+      </p:pic>
+      <p:sp>
+        <p:nvSpPr>
+          <p:cNvPr id="1" name="TextBox 3"/>
+          <p:cNvSpPr txBox="1"/>
+          <p:nvPr/>
+        </p:nvSpPr>
+        <p:spPr>
+          <a:xfrm>
+            <a:off x="4648200" y="4076700"/>
+            <a:ext cx="4038600" cy="508000"/>
+          </a:xfrm>
+          <a:prstGeom prst="rect">
+            <a:avLst/>
+          </a:prstGeom>
+          <a:noFill/>
+        </p:spPr>
+        <p:txBody>
+          <a:bodyPr/>
+          <a:lstStyle/>
+          <a:p>
+            <a:pPr lvl="0" indent="0" marL="0" algn="ctr">
+              <a:buNone/>
+            </a:pPr>
+            <a:r>
+              <a:rPr/>
+              <a:t>Animated GIF of cerebellum from Wikipedia</a:t>
+            </a:r>
+          </a:p>
+        </p:txBody>
+      </p:sp>
+    </p:spTree>
+  </p:cSld>
+</p:sld>
+</file>
+
+<file path=ppt/slides/slide53.xml><?xml version="1.0" encoding="utf-8"?>
+<p:sld xmlns:a="http://schemas.openxmlformats.org/drawingml/2006/main" xmlns:r="http://schemas.openxmlformats.org/officeDocument/2006/relationships" xmlns:p="http://schemas.openxmlformats.org/presentationml/2006/main">
+  <p:cSld>
+    <p:spTree>
+      <p:nvGrpSpPr>
+        <p:cNvPr id="1" name=""/>
+        <p:cNvGrpSpPr/>
+        <p:nvPr/>
+      </p:nvGrpSpPr>
+      <p:grpSpPr>
+        <a:xfrm>
+          <a:off x="0" y="0"/>
+          <a:ext cx="0" cy="0"/>
+          <a:chOff x="0" y="0"/>
+          <a:chExt cx="0" cy="0"/>
+        </a:xfrm>
+      </p:grpSpPr>
+      <p:sp>
+        <p:nvSpPr>
+          <p:cNvPr id="2" name="Title 1"/>
+          <p:cNvSpPr>
+            <a:spLocks noGrp="1"/>
+          </p:cNvSpPr>
+          <p:nvPr>
+            <p:ph type="title"/>
+          </p:nvPr>
+        </p:nvSpPr>
+        <p:spPr/>
+        <p:txBody>
+          <a:bodyPr/>
+          <a:lstStyle/>
+          <a:p>
+            <a:pPr lvl="0" indent="0" marL="0">
+              <a:buNone/>
+            </a:pPr>
+            <a:r>
+              <a:rPr/>
+              <a:t>Medulla oblongata</a:t>
+            </a:r>
+          </a:p>
+        </p:txBody>
+      </p:sp>
+      <p:sp>
+        <p:nvSpPr>
+          <p:cNvPr id="3" name="Content Placeholder 2"/>
+          <p:cNvSpPr>
+            <a:spLocks noGrp="1"/>
+          </p:cNvSpPr>
+          <p:nvPr>
+            <p:ph idx="1" sz="half"/>
+          </p:nvPr>
+        </p:nvSpPr>
+        <p:spPr/>
+        <p:txBody>
+          <a:bodyPr/>
+          <a:lstStyle/>
+          <a:p>
+            <a:pPr lvl="0"/>
+            <a:r>
+              <a:rPr/>
+              <a:t>Cardiovascular regulation</a:t>
+            </a:r>
+          </a:p>
+          <a:p>
+            <a:pPr lvl="0"/>
+            <a:r>
+              <a:rPr/>
+              <a:t>Muscle tone</a:t>
+            </a:r>
+          </a:p>
+          <a:p>
+            <a:pPr lvl="0"/>
+            <a:r>
+              <a:rPr/>
+              <a:t>Fibers of passage</a:t>
+            </a:r>
+          </a:p>
+          <a:p>
+            <a:pPr lvl="1"/>
+            <a:r>
+              <a:rPr b="1"/>
+              <a:t>A</a:t>
+            </a:r>
+            <a:r>
+              <a:rPr/>
+              <a:t>scending fibers (from body), a.k.a. </a:t>
+            </a:r>
+            <a:r>
+              <a:rPr b="1"/>
+              <a:t>a</a:t>
+            </a:r>
+            <a:r>
+              <a:rPr/>
+              <a:t>fferents</a:t>
+            </a:r>
+          </a:p>
+          <a:p>
+            <a:pPr lvl="1"/>
+            <a:r>
+              <a:rPr/>
+              <a:t>Descending fibers (</a:t>
+            </a:r>
+            <a:r>
+              <a:rPr b="1"/>
+              <a:t>e</a:t>
+            </a:r>
+            <a:r>
+              <a:rPr/>
+              <a:t>xiting brain), a.k.a., </a:t>
+            </a:r>
+            <a:r>
+              <a:rPr b="1"/>
+              <a:t>e</a:t>
+            </a:r>
+            <a:r>
+              <a:rPr/>
+              <a:t>fferents</a:t>
+            </a:r>
+          </a:p>
+        </p:txBody>
+      </p:sp>
+      <p:pic>
+        <p:nvPicPr>
+          <p:cNvPr descr="https://upload.wikimedia.org/wikipedia/commons/6/69/1311_Brain_Stem.jpg" id="0" name="Picture 1"/>
+          <p:cNvPicPr>
+            <a:picLocks noGrp="1" noChangeAspect="1"/>
+          </p:cNvPicPr>
+          <p:nvPr/>
+        </p:nvPicPr>
+        <p:blipFill>
+          <a:blip r:embed="rId2"/>
+          <a:stretch>
+            <a:fillRect/>
+          </a:stretch>
+        </p:blipFill>
+        <p:spPr bwMode="auto">
+          <a:xfrm>
+            <a:off x="4648200" y="1295400"/>
+            <a:ext cx="4038600" cy="2692400"/>
+          </a:xfrm>
+          <a:prstGeom prst="rect">
+            <a:avLst/>
+          </a:prstGeom>
+          <a:noFill/>
+          <a:ln w="9525">
+            <a:noFill/>
+            <a:headEnd/>
+            <a:tailEnd/>
+          </a:ln>
+        </p:spPr>
+      </p:pic>
+      <p:sp>
+        <p:nvSpPr>
+          <p:cNvPr id="1" name="TextBox 3"/>
+          <p:cNvSpPr txBox="1"/>
+          <p:nvPr/>
+        </p:nvSpPr>
+        <p:spPr>
+          <a:xfrm>
+            <a:off x="4648200" y="4076700"/>
+            <a:ext cx="4038600" cy="508000"/>
+          </a:xfrm>
+          <a:prstGeom prst="rect">
+            <a:avLst/>
+          </a:prstGeom>
+          <a:noFill/>
+        </p:spPr>
+        <p:txBody>
+          <a:bodyPr/>
+          <a:lstStyle/>
+          <a:p>
+            <a:pPr lvl="0" indent="0" marL="0" algn="ctr">
+              <a:buNone/>
+            </a:pPr>
+            <a:r>
+              <a:rPr/>
+              <a:t>Illustration of brainstem from Wikipedia</a:t>
+            </a:r>
+          </a:p>
+        </p:txBody>
+      </p:sp>
+    </p:spTree>
+  </p:cSld>
+</p:sld>
+</file>
+
+<file path=ppt/slides/slide54.xml><?xml version="1.0" encoding="utf-8"?>
+<p:sld xmlns:a="http://schemas.openxmlformats.org/drawingml/2006/main" xmlns:r="http://schemas.openxmlformats.org/officeDocument/2006/relationships" xmlns:p="http://schemas.openxmlformats.org/presentationml/2006/main">
+  <p:cSld>
+    <p:spTree>
+      <p:nvGrpSpPr>
+        <p:cNvPr id="1" name=""/>
+        <p:cNvGrpSpPr/>
+        <p:nvPr/>
+      </p:nvGrpSpPr>
+      <p:grpSpPr>
+        <a:xfrm>
+          <a:off x="0" y="0"/>
+          <a:ext cx="0" cy="0"/>
+          <a:chOff x="0" y="0"/>
+          <a:chExt cx="0" cy="0"/>
+        </a:xfrm>
+      </p:grpSpPr>
+      <p:sp>
+        <p:nvSpPr>
+          <p:cNvPr id="2" name="Title 1"/>
+          <p:cNvSpPr>
+            <a:spLocks noGrp="1"/>
+          </p:cNvSpPr>
+          <p:nvPr>
+            <p:ph type="title"/>
+          </p:nvPr>
+        </p:nvSpPr>
+        <p:spPr/>
+        <p:txBody>
+          <a:bodyPr/>
+          <a:lstStyle/>
+          <a:p>
+            <a:pPr lvl="0" indent="0" marL="0">
+              <a:buNone/>
+            </a:pPr>
+            <a:r>
+              <a:rPr/>
+              <a:t>Input/output</a:t>
+            </a:r>
+          </a:p>
+        </p:txBody>
+      </p:sp>
+      <p:sp>
+        <p:nvSpPr>
+          <p:cNvPr id="3" name="Content Placeholder 2"/>
+          <p:cNvSpPr>
+            <a:spLocks noGrp="1"/>
+          </p:cNvSpPr>
+          <p:nvPr>
+            <p:ph idx="1" sz="half"/>
+          </p:nvPr>
+        </p:nvSpPr>
+        <p:spPr/>
+        <p:txBody>
+          <a:bodyPr/>
+          <a:lstStyle/>
+          <a:p>
+            <a:pPr lvl="0"/>
+            <a:r>
+              <a:rPr/>
+              <a:t>Via cranial nerves (in CNS)</a:t>
+            </a:r>
+          </a:p>
+          <a:p>
+            <a:pPr lvl="0"/>
+            <a:r>
+              <a:rPr/>
+              <a:t>Via spinal nerves (in PNS)</a:t>
+            </a:r>
+          </a:p>
+          <a:p>
+            <a:pPr lvl="0"/>
+            <a:r>
+              <a:rPr/>
+              <a:t>Hierarchical organization</a:t>
+            </a:r>
+          </a:p>
+          <a:p>
+            <a:pPr lvl="1"/>
+            <a:r>
+              <a:rPr/>
+              <a:t>Substantial interconnection</a:t>
+            </a:r>
+          </a:p>
+        </p:txBody>
+      </p:sp>
+      <p:pic>
+        <p:nvPicPr>
+          <p:cNvPr descr="../include/img/swanson-2005-fig-1.jpg" id="0" name="Picture 1"/>
+          <p:cNvPicPr>
+            <a:picLocks noGrp="1" noChangeAspect="1"/>
+          </p:cNvPicPr>
+          <p:nvPr/>
+        </p:nvPicPr>
+        <p:blipFill>
+          <a:blip r:embed="rId2"/>
+          <a:stretch>
+            <a:fillRect/>
+          </a:stretch>
+        </p:blipFill>
+        <p:spPr bwMode="auto">
+          <a:xfrm>
+            <a:off x="4648200" y="1524000"/>
+            <a:ext cx="4038600" cy="2235200"/>
+          </a:xfrm>
+          <a:prstGeom prst="rect">
+            <a:avLst/>
+          </a:prstGeom>
+          <a:noFill/>
+          <a:ln w="9525">
+            <a:noFill/>
+            <a:headEnd/>
+            <a:tailEnd/>
+          </a:ln>
+        </p:spPr>
+      </p:pic>
+      <p:sp>
+        <p:nvSpPr>
+          <p:cNvPr id="1" name="TextBox 3"/>
+          <p:cNvSpPr txBox="1"/>
+          <p:nvPr/>
+        </p:nvSpPr>
+        <p:spPr>
+          <a:xfrm>
+            <a:off x="4648200" y="4076700"/>
+            <a:ext cx="4038600" cy="508000"/>
+          </a:xfrm>
+          <a:prstGeom prst="rect">
+            <a:avLst/>
+          </a:prstGeom>
+          <a:noFill/>
+        </p:spPr>
+        <p:txBody>
+          <a:bodyPr/>
+          <a:lstStyle/>
+          <a:p>
+            <a:pPr lvl="0" indent="0" marL="0" algn="ctr">
+              <a:buNone/>
+            </a:pPr>
+            <a:r>
+              <a:rPr/>
+              <a:t>Swanson (2005) Figure 1</a:t>
+            </a:r>
+          </a:p>
+        </p:txBody>
+      </p:sp>
+    </p:spTree>
+  </p:cSld>
+</p:sld>
+</file>
+
+<file path=ppt/slides/slide55.xml><?xml version="1.0" encoding="utf-8"?>
+<p:sld xmlns:a="http://schemas.openxmlformats.org/drawingml/2006/main" xmlns:r="http://schemas.openxmlformats.org/officeDocument/2006/relationships" xmlns:p="http://schemas.openxmlformats.org/presentationml/2006/main">
+  <p:cSld>
+    <p:spTree>
+      <p:nvGrpSpPr>
+        <p:cNvPr id="1" name=""/>
+        <p:cNvGrpSpPr/>
+        <p:nvPr/>
+      </p:nvGrpSpPr>
+      <p:grpSpPr>
+        <a:xfrm>
+          <a:off x="0" y="0"/>
+          <a:ext cx="0" cy="0"/>
+          <a:chOff x="0" y="0"/>
+          <a:chExt cx="0" cy="0"/>
+        </a:xfrm>
+      </p:grpSpPr>
+      <p:sp>
+        <p:nvSpPr>
+          <p:cNvPr id="2" name="Title 1"/>
+          <p:cNvSpPr>
+            <a:spLocks noGrp="1"/>
+          </p:cNvSpPr>
+          <p:nvPr>
+            <p:ph type="title"/>
+          </p:nvPr>
+        </p:nvSpPr>
+        <p:spPr/>
+        <p:txBody>
+          <a:bodyPr/>
+          <a:lstStyle/>
+          <a:p>
+            <a:pPr lvl="0" indent="0" marL="0">
+              <a:buNone/>
+            </a:pPr>
+            <a:r>
+              <a:rPr/>
+              <a:t>Cranial nerves</a:t>
+            </a:r>
+          </a:p>
+        </p:txBody>
+      </p:sp>
       <p:pic>
         <p:nvPicPr>
           <p:cNvPr descr="../include/img/nerves-pairs-muscles-region-head-sense-organs.jpg" id="0" name="Picture 1"/>
@@ -5194,7 +10506,7 @@
 </p:sld>
 </file>
 
-<file path=ppt/slides/slide25.xml><?xml version="1.0" encoding="utf-8"?>
+<file path=ppt/slides/slide56.xml><?xml version="1.0" encoding="utf-8"?>
 <p:sld xmlns:a="http://schemas.openxmlformats.org/drawingml/2006/main" xmlns:r="http://schemas.openxmlformats.org/officeDocument/2006/relationships" xmlns:p="http://schemas.openxmlformats.org/presentationml/2006/main">
   <p:cSld>
     <p:spTree>
@@ -5211,6 +10523,31 @@
           <a:chExt cx="0" cy="0"/>
         </a:xfrm>
       </p:grpSpPr>
+      <p:sp>
+        <p:nvSpPr>
+          <p:cNvPr id="2" name="Title 1"/>
+          <p:cNvSpPr>
+            <a:spLocks noGrp="1"/>
+          </p:cNvSpPr>
+          <p:nvPr>
+            <p:ph type="title"/>
+          </p:nvPr>
+        </p:nvSpPr>
+        <p:spPr/>
+        <p:txBody>
+          <a:bodyPr/>
+          <a:lstStyle/>
+          <a:p>
+            <a:pPr lvl="0" indent="0" marL="0">
+              <a:buNone/>
+            </a:pPr>
+            <a:r>
+              <a:rPr/>
+              <a:t>Spinal nerves</a:t>
+            </a:r>
+          </a:p>
+        </p:txBody>
+      </p:sp>
       <p:pic>
         <p:nvPicPr>
           <p:cNvPr descr="../include/img/Diagram-showing-the-relationship-between-spinal-nerve-roots-and-vertebrae-27.jpg" id="0" name="Picture 1"/>
@@ -5276,7 +10613,7 @@
 </p:sld>
 </file>
 
-<file path=ppt/slides/slide26.xml><?xml version="1.0" encoding="utf-8"?>
+<file path=ppt/slides/slide57.xml><?xml version="1.0" encoding="utf-8"?>
 <p:sld xmlns:a="http://schemas.openxmlformats.org/drawingml/2006/main" xmlns:r="http://schemas.openxmlformats.org/officeDocument/2006/relationships" xmlns:p="http://schemas.openxmlformats.org/presentationml/2006/main">
   <p:cSld>
     <p:spTree>
@@ -5295,12 +10632,12 @@
       </p:grpSpPr>
       <p:sp>
         <p:nvSpPr>
-          <p:cNvPr id="4" name="Text Placeholder 3"/>
-          <p:cNvSpPr>
-            <a:spLocks noGrp="1"/>
-          </p:cNvSpPr>
-          <p:nvPr>
-            <p:ph idx="2" sz="half" type="body"/>
+          <p:cNvPr id="2" name="Title 1"/>
+          <p:cNvSpPr>
+            <a:spLocks noGrp="1"/>
+          </p:cNvSpPr>
+          <p:nvPr>
+            <p:ph type="title"/>
           </p:nvPr>
         </p:nvSpPr>
         <p:spPr/>
@@ -5313,14 +10650,65 @@
             </a:pPr>
             <a:r>
               <a:rPr/>
-              <a:t>Multiple hierarchies</a:t>
+              <a:t>Spinal cord</a:t>
+            </a:r>
+          </a:p>
+        </p:txBody>
+      </p:sp>
+      <p:sp>
+        <p:nvSpPr>
+          <p:cNvPr id="3" name="Content Placeholder 2"/>
+          <p:cNvSpPr>
+            <a:spLocks noGrp="1"/>
+          </p:cNvSpPr>
+          <p:nvPr>
+            <p:ph idx="1" sz="half"/>
+          </p:nvPr>
+        </p:nvSpPr>
+        <p:spPr/>
+        <p:txBody>
+          <a:bodyPr/>
+          <a:lstStyle/>
+          <a:p>
+            <a:pPr lvl="0"/>
+            <a:r>
+              <a:rPr/>
+              <a:t>Spinal column w/ vertebrae</a:t>
+            </a:r>
+          </a:p>
+          <a:p>
+            <a:pPr lvl="0"/>
+            <a:r>
+              <a:rPr/>
+              <a:t>Segments</a:t>
+            </a:r>
+          </a:p>
+          <a:p>
+            <a:pPr lvl="1"/>
+            <a:r>
+              <a:rPr/>
+              <a:t>Cervical (8), thoracic (12), lumbar (5), sacral (5), coccygeal (1)</a:t>
+            </a:r>
+          </a:p>
+          <a:p>
+            <a:pPr lvl="0"/>
+            <a:r>
+              <a:rPr/>
+              <a:t>31 (anterior &amp; posterior) nerve pairs</a:t>
+            </a:r>
+          </a:p>
+          <a:p>
+            <a:pPr lvl="0"/>
+            <a:r>
+              <a:rPr/>
+              <a:t>Cauda equina</a:t>
             </a:r>
           </a:p>
         </p:txBody>
       </p:sp>
       <p:pic>
         <p:nvPicPr>
-          <p:cNvPr descr="../include/img/swanson-2005-fig-1.jpg" id="0" name="Picture 1"/>
+          <p:cNvPr descr="https://www.physio-pedia.com/images/6/68/Colored_Spine.jpg" id="0" name="Picture 1"/>
           <p:cNvPicPr>
             <a:picLocks noGrp="1" noChangeAspect="1"/>
           </p:cNvPicPr>
@@ -5334,8 +10722,8 @@
         </p:blipFill>
         <p:spPr bwMode="auto">
           <a:xfrm>
-            <a:off x="3568700" y="736600"/>
-            <a:ext cx="5105400" cy="2819400"/>
+            <a:off x="6019800" y="1193800"/>
+            <a:ext cx="1282700" cy="2882900"/>
           </a:xfrm>
           <a:prstGeom prst="rect">
             <a:avLst/>
@@ -5356,8 +10744,8 @@
         </p:nvSpPr>
         <p:spPr>
           <a:xfrm>
-            <a:off x="3568700" y="4076700"/>
-            <a:ext cx="5105400" cy="508000"/>
+            <a:off x="4648200" y="4076700"/>
+            <a:ext cx="4038600" cy="508000"/>
           </a:xfrm>
           <a:prstGeom prst="rect">
             <a:avLst/>
@@ -5373,7 +10761,7 @@
             </a:pPr>
             <a:r>
               <a:rPr/>
-              <a:t>Swanson (2005) Figure 1</a:t>
+              <a:t>https://www.physio-pedia.com/Cauda_Equina</a:t>
             </a:r>
           </a:p>
         </p:txBody>
@@ -5383,7 +10771,7 @@
 </p:sld>
 </file>
 
-<file path=ppt/slides/slide27.xml><?xml version="1.0" encoding="utf-8"?>
+<file path=ppt/slides/slide58.xml><?xml version="1.0" encoding="utf-8"?>
 <p:sld xmlns:a="http://schemas.openxmlformats.org/drawingml/2006/main" xmlns:r="http://schemas.openxmlformats.org/officeDocument/2006/relationships" xmlns:p="http://schemas.openxmlformats.org/presentationml/2006/main">
   <p:cSld>
     <p:spTree>
@@ -5420,30 +10808,127 @@
             </a:pPr>
             <a:r>
               <a:rPr/>
-              <a:t>Maps</a:t>
-            </a:r>
-          </a:p>
-        </p:txBody>
-      </p:sp>
-      <p:sp>
-        <p:nvSpPr>
-          <p:cNvPr id="3" name="Content Placeholder 2"/>
-          <p:cNvSpPr>
-            <a:spLocks noGrp="1"/>
-          </p:cNvSpPr>
-          <p:nvPr>
-            <p:ph idx="1"/>
-          </p:nvPr>
-        </p:nvSpPr>
-        <p:spPr/>
-        <p:txBody>
-          <a:bodyPr/>
-          <a:lstStyle/>
-          <a:p>
-            <a:pPr lvl="0"/>
-            <a:r>
-              <a:rPr/>
-              <a:t>Sensory &amp; motor systems often use maps</a:t>
+              <a:t>Spinal cord: Axial</a:t>
+            </a:r>
+          </a:p>
+        </p:txBody>
+      </p:sp>
+      <p:pic>
+        <p:nvPicPr>
+          <p:cNvPr descr="https://upload.wikimedia.org/wikipedia/commons/e/e6/Gray675.png" id="0" name="Picture 1"/>
+          <p:cNvPicPr>
+            <a:picLocks noGrp="1" noChangeAspect="1"/>
+          </p:cNvPicPr>
+          <p:nvPr/>
+        </p:nvPicPr>
+        <p:blipFill>
+          <a:blip r:embed="rId2"/>
+          <a:stretch>
+            <a:fillRect/>
+          </a:stretch>
+        </p:blipFill>
+        <p:spPr bwMode="auto">
+          <a:xfrm>
+            <a:off x="457200" y="1295400"/>
+            <a:ext cx="4038600" cy="2692400"/>
+          </a:xfrm>
+          <a:prstGeom prst="rect">
+            <a:avLst/>
+          </a:prstGeom>
+          <a:noFill/>
+          <a:ln w="9525">
+            <a:noFill/>
+            <a:headEnd/>
+            <a:tailEnd/>
+          </a:ln>
+        </p:spPr>
+      </p:pic>
+      <p:sp>
+        <p:nvSpPr>
+          <p:cNvPr id="1" name="TextBox 3"/>
+          <p:cNvSpPr txBox="1"/>
+          <p:nvPr/>
+        </p:nvSpPr>
+        <p:spPr>
+          <a:xfrm>
+            <a:off x="457200" y="4076700"/>
+            <a:ext cx="4038600" cy="508000"/>
+          </a:xfrm>
+          <a:prstGeom prst="rect">
+            <a:avLst/>
+          </a:prstGeom>
+          <a:noFill/>
+        </p:spPr>
+        <p:txBody>
+          <a:bodyPr/>
+          <a:lstStyle/>
+          <a:p>
+            <a:pPr lvl="0" indent="0" marL="0" algn="ctr">
+              <a:buNone/>
+            </a:pPr>
+            <a:r>
+              <a:rPr/>
+              <a:t>Anterior and posterior roots of spinal cord</a:t>
+            </a:r>
+          </a:p>
+        </p:txBody>
+      </p:sp>
+      <p:pic>
+        <p:nvPicPr>
+          <p:cNvPr descr="https://upload.wikimedia.org/wikipedia/commons/thumb/d/dc/Medulla_spinalis_-_Section_-_English.svg/1024px-Medulla_spinalis_-_Section_-_English.svg.png" id="0" name="Picture 1"/>
+          <p:cNvPicPr>
+            <a:picLocks noGrp="1" noChangeAspect="1"/>
+          </p:cNvPicPr>
+          <p:nvPr/>
+        </p:nvPicPr>
+        <p:blipFill>
+          <a:blip r:embed="rId3"/>
+          <a:stretch>
+            <a:fillRect/>
+          </a:stretch>
+        </p:blipFill>
+        <p:spPr bwMode="auto">
+          <a:xfrm>
+            <a:off x="4648200" y="1295400"/>
+            <a:ext cx="4038600" cy="2692400"/>
+          </a:xfrm>
+          <a:prstGeom prst="rect">
+            <a:avLst/>
+          </a:prstGeom>
+          <a:noFill/>
+          <a:ln w="9525">
+            <a:noFill/>
+            <a:headEnd/>
+            <a:tailEnd/>
+          </a:ln>
+        </p:spPr>
+      </p:pic>
+      <p:sp>
+        <p:nvSpPr>
+          <p:cNvPr id="1" name="TextBox 3"/>
+          <p:cNvSpPr txBox="1"/>
+          <p:nvPr/>
+        </p:nvSpPr>
+        <p:spPr>
+          <a:xfrm>
+            <a:off x="4648200" y="4076700"/>
+            <a:ext cx="4038600" cy="508000"/>
+          </a:xfrm>
+          <a:prstGeom prst="rect">
+            <a:avLst/>
+          </a:prstGeom>
+          <a:noFill/>
+        </p:spPr>
+        <p:txBody>
+          <a:bodyPr/>
+          <a:lstStyle/>
+          <a:p>
+            <a:pPr lvl="0" indent="0" marL="0" algn="ctr">
+              <a:buNone/>
+            </a:pPr>
+            <a:r>
+              <a:rPr/>
+              <a:t>Axial view of spinal cord anterior and posterior roots</a:t>
             </a:r>
           </a:p>
         </p:txBody>
@@ -5453,7 +10938,7 @@
 </p:sld>
 </file>
 
-<file path=ppt/slides/slide28.xml><?xml version="1.0" encoding="utf-8"?>
+<file path=ppt/slides/slide59.xml><?xml version="1.0" encoding="utf-8"?>
 <p:sld xmlns:a="http://schemas.openxmlformats.org/drawingml/2006/main" xmlns:r="http://schemas.openxmlformats.org/officeDocument/2006/relationships" xmlns:p="http://schemas.openxmlformats.org/presentationml/2006/main">
   <p:cSld>
     <p:spTree>
@@ -5470,9 +10955,85 @@
           <a:chExt cx="0" cy="0"/>
         </a:xfrm>
       </p:grpSpPr>
+      <p:sp>
+        <p:nvSpPr>
+          <p:cNvPr id="2" name="Title 1"/>
+          <p:cNvSpPr>
+            <a:spLocks noGrp="1"/>
+          </p:cNvSpPr>
+          <p:nvPr>
+            <p:ph type="title"/>
+          </p:nvPr>
+        </p:nvSpPr>
+        <p:spPr/>
+        <p:txBody>
+          <a:bodyPr/>
+          <a:lstStyle/>
+          <a:p>
+            <a:pPr lvl="0" indent="0" marL="0">
+              <a:buNone/>
+            </a:pPr>
+            <a:r>
+              <a:rPr/>
+              <a:t>PNS Organization</a:t>
+            </a:r>
+          </a:p>
+        </p:txBody>
+      </p:sp>
+      <p:sp>
+        <p:nvSpPr>
+          <p:cNvPr id="3" name="Content Placeholder 2"/>
+          <p:cNvSpPr>
+            <a:spLocks noGrp="1"/>
+          </p:cNvSpPr>
+          <p:nvPr>
+            <p:ph idx="1" sz="half"/>
+          </p:nvPr>
+        </p:nvSpPr>
+        <p:spPr/>
+        <p:txBody>
+          <a:bodyPr/>
+          <a:lstStyle/>
+          <a:p>
+            <a:pPr lvl="0"/>
+            <a:r>
+              <a:rPr/>
+              <a:t>Somatic nervous system</a:t>
+            </a:r>
+          </a:p>
+          <a:p>
+            <a:pPr lvl="0"/>
+            <a:r>
+              <a:rPr/>
+              <a:t>Autonomic nervous system (ANS)</a:t>
+            </a:r>
+          </a:p>
+          <a:p>
+            <a:pPr lvl="1"/>
+            <a:r>
+              <a:rPr/>
+              <a:t>Sympathetic</a:t>
+            </a:r>
+          </a:p>
+          <a:p>
+            <a:pPr lvl="1"/>
+            <a:r>
+              <a:rPr/>
+              <a:t>Parasympathetic</a:t>
+            </a:r>
+          </a:p>
+          <a:p>
+            <a:pPr lvl="1"/>
+            <a:r>
+              <a:rPr/>
+              <a:t>Enteric (gut, intestinal tract)</a:t>
+            </a:r>
+          </a:p>
+        </p:txBody>
+      </p:sp>
       <p:pic>
         <p:nvPicPr>
-          <p:cNvPr descr="../include/img/The-Retinotopy-paradigm-Two-stimuli-are-used-to-measure-the-retinotopic-maps-in-cortex.png" id="0" name="Picture 1"/>
+          <p:cNvPr descr="https://upload.wikimedia.org/wikipedia/commons/thumb/b/b2/TE-Nervous_system_diagram.svg/1280px-TE-Nervous_system_diagram.svg.png" id="0" name="Picture 1"/>
           <p:cNvPicPr>
             <a:picLocks noGrp="1" noChangeAspect="1"/>
           </p:cNvPicPr>
@@ -5486,8 +11047,8 @@
         </p:blipFill>
         <p:spPr bwMode="auto">
           <a:xfrm>
-            <a:off x="2070100" y="1193800"/>
-            <a:ext cx="5016500" cy="2882900"/>
+            <a:off x="4648200" y="1295400"/>
+            <a:ext cx="4038600" cy="2692400"/>
           </a:xfrm>
           <a:prstGeom prst="rect">
             <a:avLst/>
@@ -5508,8 +11069,8 @@
         </p:nvSpPr>
         <p:spPr>
           <a:xfrm>
-            <a:off x="457200" y="4076700"/>
-            <a:ext cx="8229600" cy="508000"/>
+            <a:off x="4648200" y="4076700"/>
+            <a:ext cx="4038600" cy="508000"/>
           </a:xfrm>
           <a:prstGeom prst="rect">
             <a:avLst/>
@@ -5525,17 +11086,301 @@
             </a:pPr>
             <a:r>
               <a:rPr/>
-              <a:t>https://www.researchgate.net/profile/Brian-Wandell/publication/8988812/figure/fig1/AS:280067633631238@1443784735289/The-Retinotopy-paradigm-Two-stimuli-are-used-to-measure-the-retinotopic-maps-in-cortex.png</a:t>
+              <a:t>By Own work, CC BY 3.0, </a:t>
+            </a:r>
+            <a:r>
+              <a:rPr>
+                <a:hlinkClick r:id="rId3"/>
+              </a:rPr>
+              <a:t>https://commons.wikimedia.org/w/index.php?curid=10187018</a:t>
             </a:r>
           </a:p>
         </p:txBody>
       </p:sp>
     </p:spTree>
   </p:cSld>
+  <p:timing>
+    <p:tnLst>
+      <p:par>
+        <p:cTn id="1" dur="indefinite" restart="never" nodeType="tmRoot">
+          <p:childTnLst>
+            <p:seq concurrent="1" nextAc="seek">
+              <p:cTn id="2" dur="indefinite" nodeType="mainSeq">
+                <p:childTnLst>
+                  <p:par>
+                    <p:cTn id="3" fill="hold">
+                      <p:stCondLst>
+                        <p:cond delay="indefinite"/>
+                      </p:stCondLst>
+                      <p:childTnLst>
+                        <p:par>
+                          <p:cTn id="4" fill="hold">
+                            <p:stCondLst>
+                              <p:cond delay="0"/>
+                            </p:stCondLst>
+                            <p:childTnLst>
+                              <p:par>
+                                <p:cTn id="5" presetID="1" presetClass="entr" presetSubtype="0" fill="hold" grpId="0" nodeType="clickEffect">
+                                  <p:stCondLst>
+                                    <p:cond delay="0"/>
+                                  </p:stCondLst>
+                                  <p:childTnLst>
+                                    <p:set>
+                                      <p:cBhvr>
+                                        <p:cTn id="6" dur="1" fill="hold">
+                                          <p:stCondLst>
+                                            <p:cond delay="0"/>
+                                          </p:stCondLst>
+                                        </p:cTn>
+                                        <p:tgtEl>
+                                          <p:spTgt spid="3">
+                                            <p:txEl>
+                                              <p:pRg st="0" end="0"/>
+                                            </p:txEl>
+                                          </p:spTgt>
+                                        </p:tgtEl>
+                                        <p:attrNameLst>
+                                          <p:attrName>style.visibility</p:attrName>
+                                        </p:attrNameLst>
+                                      </p:cBhvr>
+                                      <p:to>
+                                        <p:strVal val="visible"/>
+                                      </p:to>
+                                    </p:set>
+                                  </p:childTnLst>
+                                </p:cTn>
+                              </p:par>
+                            </p:childTnLst>
+                          </p:cTn>
+                        </p:par>
+                      </p:childTnLst>
+                    </p:cTn>
+                  </p:par>
+                  <p:par>
+                    <p:cTn id="7" fill="hold">
+                      <p:stCondLst>
+                        <p:cond delay="indefinite"/>
+                      </p:stCondLst>
+                      <p:childTnLst>
+                        <p:par>
+                          <p:cTn id="8" fill="hold">
+                            <p:stCondLst>
+                              <p:cond delay="0"/>
+                            </p:stCondLst>
+                            <p:childTnLst>
+                              <p:par>
+                                <p:cTn id="9" presetID="1" presetClass="entr" presetSubtype="0" fill="hold" grpId="0" nodeType="clickEffect">
+                                  <p:stCondLst>
+                                    <p:cond delay="0"/>
+                                  </p:stCondLst>
+                                  <p:childTnLst>
+                                    <p:set>
+                                      <p:cBhvr>
+                                        <p:cTn id="10" dur="1" fill="hold">
+                                          <p:stCondLst>
+                                            <p:cond delay="0"/>
+                                          </p:stCondLst>
+                                        </p:cTn>
+                                        <p:tgtEl>
+                                          <p:spTgt spid="3">
+                                            <p:txEl>
+                                              <p:pRg st="1" end="1"/>
+                                            </p:txEl>
+                                          </p:spTgt>
+                                        </p:tgtEl>
+                                        <p:attrNameLst>
+                                          <p:attrName>style.visibility</p:attrName>
+                                        </p:attrNameLst>
+                                      </p:cBhvr>
+                                      <p:to>
+                                        <p:strVal val="visible"/>
+                                      </p:to>
+                                    </p:set>
+                                  </p:childTnLst>
+                                </p:cTn>
+                              </p:par>
+                            </p:childTnLst>
+                          </p:cTn>
+                        </p:par>
+                      </p:childTnLst>
+                    </p:cTn>
+                  </p:par>
+                  <p:par>
+                    <p:cTn id="11" fill="hold">
+                      <p:stCondLst>
+                        <p:cond delay="indefinite"/>
+                      </p:stCondLst>
+                      <p:childTnLst>
+                        <p:par>
+                          <p:cTn id="12" fill="hold">
+                            <p:stCondLst>
+                              <p:cond delay="0"/>
+                            </p:stCondLst>
+                            <p:childTnLst>
+                              <p:par>
+                                <p:cTn id="13" presetID="1" presetClass="entr" presetSubtype="0" fill="hold" grpId="0" nodeType="clickEffect">
+                                  <p:stCondLst>
+                                    <p:cond delay="0"/>
+                                  </p:stCondLst>
+                                  <p:childTnLst>
+                                    <p:set>
+                                      <p:cBhvr>
+                                        <p:cTn id="14" dur="1" fill="hold">
+                                          <p:stCondLst>
+                                            <p:cond delay="0"/>
+                                          </p:stCondLst>
+                                        </p:cTn>
+                                        <p:tgtEl>
+                                          <p:spTgt spid="3">
+                                            <p:txEl>
+                                              <p:pRg st="2" end="2"/>
+                                            </p:txEl>
+                                          </p:spTgt>
+                                        </p:tgtEl>
+                                        <p:attrNameLst>
+                                          <p:attrName>style.visibility</p:attrName>
+                                        </p:attrNameLst>
+                                      </p:cBhvr>
+                                      <p:to>
+                                        <p:strVal val="visible"/>
+                                      </p:to>
+                                    </p:set>
+                                  </p:childTnLst>
+                                </p:cTn>
+                              </p:par>
+                            </p:childTnLst>
+                          </p:cTn>
+                        </p:par>
+                      </p:childTnLst>
+                    </p:cTn>
+                  </p:par>
+                  <p:par>
+                    <p:cTn id="15" fill="hold">
+                      <p:stCondLst>
+                        <p:cond delay="indefinite"/>
+                      </p:stCondLst>
+                      <p:childTnLst>
+                        <p:par>
+                          <p:cTn id="16" fill="hold">
+                            <p:stCondLst>
+                              <p:cond delay="0"/>
+                            </p:stCondLst>
+                            <p:childTnLst>
+                              <p:par>
+                                <p:cTn id="17" presetID="1" presetClass="entr" presetSubtype="0" fill="hold" grpId="0" nodeType="clickEffect">
+                                  <p:stCondLst>
+                                    <p:cond delay="0"/>
+                                  </p:stCondLst>
+                                  <p:childTnLst>
+                                    <p:set>
+                                      <p:cBhvr>
+                                        <p:cTn id="18" dur="1" fill="hold">
+                                          <p:stCondLst>
+                                            <p:cond delay="0"/>
+                                          </p:stCondLst>
+                                        </p:cTn>
+                                        <p:tgtEl>
+                                          <p:spTgt spid="3">
+                                            <p:txEl>
+                                              <p:pRg st="3" end="3"/>
+                                            </p:txEl>
+                                          </p:spTgt>
+                                        </p:tgtEl>
+                                        <p:attrNameLst>
+                                          <p:attrName>style.visibility</p:attrName>
+                                        </p:attrNameLst>
+                                      </p:cBhvr>
+                                      <p:to>
+                                        <p:strVal val="visible"/>
+                                      </p:to>
+                                    </p:set>
+                                  </p:childTnLst>
+                                </p:cTn>
+                              </p:par>
+                            </p:childTnLst>
+                          </p:cTn>
+                        </p:par>
+                      </p:childTnLst>
+                    </p:cTn>
+                  </p:par>
+                  <p:par>
+                    <p:cTn id="19" fill="hold">
+                      <p:stCondLst>
+                        <p:cond delay="indefinite"/>
+                      </p:stCondLst>
+                      <p:childTnLst>
+                        <p:par>
+                          <p:cTn id="20" fill="hold">
+                            <p:stCondLst>
+                              <p:cond delay="0"/>
+                            </p:stCondLst>
+                            <p:childTnLst>
+                              <p:par>
+                                <p:cTn id="21" presetID="1" presetClass="entr" presetSubtype="0" fill="hold" grpId="0" nodeType="clickEffect">
+                                  <p:stCondLst>
+                                    <p:cond delay="0"/>
+                                  </p:stCondLst>
+                                  <p:childTnLst>
+                                    <p:set>
+                                      <p:cBhvr>
+                                        <p:cTn id="22" dur="1" fill="hold">
+                                          <p:stCondLst>
+                                            <p:cond delay="0"/>
+                                          </p:stCondLst>
+                                        </p:cTn>
+                                        <p:tgtEl>
+                                          <p:spTgt spid="3">
+                                            <p:txEl>
+                                              <p:pRg st="4" end="4"/>
+                                            </p:txEl>
+                                          </p:spTgt>
+                                        </p:tgtEl>
+                                        <p:attrNameLst>
+                                          <p:attrName>style.visibility</p:attrName>
+                                        </p:attrNameLst>
+                                      </p:cBhvr>
+                                      <p:to>
+                                        <p:strVal val="visible"/>
+                                      </p:to>
+                                    </p:set>
+                                  </p:childTnLst>
+                                </p:cTn>
+                              </p:par>
+                            </p:childTnLst>
+                          </p:cTn>
+                        </p:par>
+                      </p:childTnLst>
+                    </p:cTn>
+                  </p:par>
+                </p:childTnLst>
+              </p:cTn>
+              <p:prevCondLst>
+                <p:cond evt="onPrev" delay="0">
+                  <p:tgtEl>
+                    <p:sldTgt/>
+                  </p:tgtEl>
+                </p:cond>
+              </p:prevCondLst>
+              <p:nextCondLst>
+                <p:cond evt="onNext" delay="0">
+                  <p:tgtEl>
+                    <p:sldTgt/>
+                  </p:tgtEl>
+                </p:cond>
+              </p:nextCondLst>
+            </p:seq>
+          </p:childTnLst>
+        </p:cTn>
+      </p:par>
+    </p:tnLst>
+    <p:bldLst>
+      <p:bldP spid="3" grpId="0" uiExpand="1" build="p"/>
+    </p:bldLst>
+  </p:timing>
 </p:sld>
 </file>
 
-<file path=ppt/slides/slide29.xml><?xml version="1.0" encoding="utf-8"?>
+<file path=ppt/slides/slide6.xml><?xml version="1.0" encoding="utf-8"?>
 <p:sld xmlns:a="http://schemas.openxmlformats.org/drawingml/2006/main" xmlns:r="http://schemas.openxmlformats.org/officeDocument/2006/relationships" xmlns:p="http://schemas.openxmlformats.org/presentationml/2006/main">
   <p:cSld>
     <p:spTree>
@@ -5552,62 +11397,66 @@
           <a:chExt cx="0" cy="0"/>
         </a:xfrm>
       </p:grpSpPr>
-      <p:pic>
-        <p:nvPicPr>
-          <p:cNvPr descr="https://ars.els-cdn.com/content/image/1-s2.0-S0378595513001871-gr1_lrg.jpg" id="0" name="Picture 1"/>
-          <p:cNvPicPr>
-            <a:picLocks noGrp="1" noChangeAspect="1"/>
-          </p:cNvPicPr>
-          <p:nvPr/>
-        </p:nvPicPr>
-        <p:blipFill>
-          <a:blip r:embed="rId2"/>
-          <a:stretch>
-            <a:fillRect/>
-          </a:stretch>
-        </p:blipFill>
-        <p:spPr bwMode="auto">
-          <a:xfrm>
-            <a:off x="3124200" y="1193800"/>
-            <a:ext cx="2882900" cy="2882900"/>
-          </a:xfrm>
-          <a:prstGeom prst="rect">
-            <a:avLst/>
-          </a:prstGeom>
-          <a:noFill/>
-          <a:ln w="9525">
-            <a:noFill/>
-            <a:headEnd/>
-            <a:tailEnd/>
-          </a:ln>
-        </p:spPr>
-      </p:pic>
-      <p:sp>
-        <p:nvSpPr>
-          <p:cNvPr id="1" name="TextBox 3"/>
-          <p:cNvSpPr txBox="1"/>
-          <p:nvPr/>
-        </p:nvSpPr>
-        <p:spPr>
-          <a:xfrm>
-            <a:off x="457200" y="4076700"/>
-            <a:ext cx="8229600" cy="508000"/>
-          </a:xfrm>
-          <a:prstGeom prst="rect">
-            <a:avLst/>
-          </a:prstGeom>
-          <a:noFill/>
-        </p:spPr>
-        <p:txBody>
-          <a:bodyPr/>
-          <a:lstStyle/>
-          <a:p>
-            <a:pPr lvl="0" indent="0" marL="0" algn="ctr">
+      <p:sp>
+        <p:nvSpPr>
+          <p:cNvPr id="2" name="Title 1"/>
+          <p:cNvSpPr>
+            <a:spLocks noGrp="1"/>
+          </p:cNvSpPr>
+          <p:nvPr>
+            <p:ph type="title"/>
+          </p:nvPr>
+        </p:nvSpPr>
+        <p:spPr/>
+        <p:txBody>
+          <a:bodyPr/>
+          <a:lstStyle/>
+          <a:p>
+            <a:pPr lvl="0" indent="0" marL="0">
               <a:buNone/>
             </a:pPr>
             <a:r>
               <a:rPr/>
-              <a:t>Figure 1 from Saenz &amp; Langers (2014)</a:t>
+              <a:t>Today’s topics</a:t>
+            </a:r>
+          </a:p>
+        </p:txBody>
+      </p:sp>
+      <p:sp>
+        <p:nvSpPr>
+          <p:cNvPr id="3" name="Content Placeholder 2"/>
+          <p:cNvSpPr>
+            <a:spLocks noGrp="1"/>
+          </p:cNvSpPr>
+          <p:nvPr>
+            <p:ph idx="1"/>
+          </p:nvPr>
+        </p:nvSpPr>
+        <p:spPr/>
+        <p:txBody>
+          <a:bodyPr/>
+          <a:lstStyle/>
+          <a:p>
+            <a:pPr lvl="0"/>
+            <a:r>
+              <a:rPr/>
+              <a:t>Neuroanatomy</a:t>
+            </a:r>
+          </a:p>
+          <a:p>
+            <a:pPr lvl="0"/>
+            <a:r>
+              <a:rPr/>
+              <a:t>In-class lab</a:t>
+            </a:r>
+          </a:p>
+          <a:p>
+            <a:pPr lvl="1"/>
+            <a:r>
+              <a:rPr>
+                <a:hlinkClick r:id="rId2"/>
+              </a:rPr>
+              <a:t>Exercise ANAT</a:t>
             </a:r>
           </a:p>
         </p:txBody>
@@ -5617,7 +11466,7 @@
 </p:sld>
 </file>
 
-<file path=ppt/slides/slide3.xml><?xml version="1.0" encoding="utf-8"?>
+<file path=ppt/slides/slide60.xml><?xml version="1.0" encoding="utf-8"?>
 <p:sld xmlns:a="http://schemas.openxmlformats.org/drawingml/2006/main" xmlns:r="http://schemas.openxmlformats.org/officeDocument/2006/relationships" xmlns:p="http://schemas.openxmlformats.org/presentationml/2006/main">
   <p:cSld>
     <p:spTree>
@@ -5636,12 +11485,12 @@
       </p:grpSpPr>
       <p:sp>
         <p:nvSpPr>
-          <p:cNvPr id="3" name="Content Placeholder 2"/>
-          <p:cNvSpPr>
-            <a:spLocks noGrp="1"/>
-          </p:cNvSpPr>
-          <p:nvPr>
-            <p:ph idx="1"/>
+          <p:cNvPr id="2" name="Title 1"/>
+          <p:cNvSpPr>
+            <a:spLocks noGrp="1"/>
+          </p:cNvSpPr>
+          <p:nvPr>
+            <p:ph type="title"/>
           </p:nvPr>
         </p:nvSpPr>
         <p:spPr/>
@@ -5653,48 +11502,15 @@
               <a:buNone/>
             </a:pPr>
             <a:r>
-              <a:rPr>
-                <a:hlinkClick r:id="rId2"/>
-              </a:rPr>
-              <a:t>https://www.youtube.com/embed/snO68aJTOpM</a:t>
-            </a:r>
-          </a:p>
-          <a:p>
-            <a:pPr lvl="0" indent="0" marL="0">
-              <a:buNone/>
-            </a:pPr>
-            <a:r>
-              <a:rPr/>
-              <a:t>– ctdalilah (2006)</a:t>
-            </a:r>
-          </a:p>
-        </p:txBody>
-      </p:sp>
-    </p:spTree>
-  </p:cSld>
-</p:sld>
-</file>
-
-<file path=ppt/slides/slide30.xml><?xml version="1.0" encoding="utf-8"?>
-<p:sld xmlns:a="http://schemas.openxmlformats.org/drawingml/2006/main" xmlns:r="http://schemas.openxmlformats.org/officeDocument/2006/relationships" xmlns:p="http://schemas.openxmlformats.org/presentationml/2006/main">
-  <p:cSld>
-    <p:spTree>
-      <p:nvGrpSpPr>
-        <p:cNvPr id="1" name=""/>
-        <p:cNvGrpSpPr/>
-        <p:nvPr/>
-      </p:nvGrpSpPr>
-      <p:grpSpPr>
-        <a:xfrm>
-          <a:off x="0" y="0"/>
-          <a:ext cx="0" cy="0"/>
-          <a:chOff x="0" y="0"/>
-          <a:chExt cx="0" cy="0"/>
-        </a:xfrm>
-      </p:grpSpPr>
+              <a:rPr/>
+              <a:t>Somatic nervous system</a:t>
+            </a:r>
+          </a:p>
+        </p:txBody>
+      </p:sp>
       <p:pic>
         <p:nvPicPr>
-          <p:cNvPr descr="https://upload.wikimedia.org/wikipedia/commons/thumb/9/93/Grant_1962_663.png/800px-Grant_1962_663.png" id="0" name="Picture 1"/>
+          <p:cNvPr descr="https://www.simplypsychology.org/wp-content/uploads/somatic-nervous-system.jpeg" id="0" name="Picture 1"/>
           <p:cNvPicPr>
             <a:picLocks noGrp="1" noChangeAspect="1"/>
           </p:cNvPicPr>
@@ -5747,7 +11563,7 @@
             </a:pPr>
             <a:r>
               <a:rPr/>
-              <a:t>Wikipedia</a:t>
+              <a:t>SimplyPsychology</a:t>
             </a:r>
           </a:p>
         </p:txBody>
@@ -5757,7 +11573,7 @@
 </p:sld>
 </file>
 
-<file path=ppt/slides/slide31.xml><?xml version="1.0" encoding="utf-8"?>
+<file path=ppt/slides/slide61.xml><?xml version="1.0" encoding="utf-8"?>
 <p:sld xmlns:a="http://schemas.openxmlformats.org/drawingml/2006/main" xmlns:r="http://schemas.openxmlformats.org/officeDocument/2006/relationships" xmlns:p="http://schemas.openxmlformats.org/presentationml/2006/main">
   <p:cSld>
     <p:spTree>
@@ -5776,6 +11592,31 @@
       </p:grpSpPr>
       <p:sp>
         <p:nvSpPr>
+          <p:cNvPr id="2" name="Title 1"/>
+          <p:cNvSpPr>
+            <a:spLocks noGrp="1"/>
+          </p:cNvSpPr>
+          <p:nvPr>
+            <p:ph type="title"/>
+          </p:nvPr>
+        </p:nvSpPr>
+        <p:spPr/>
+        <p:txBody>
+          <a:bodyPr/>
+          <a:lstStyle/>
+          <a:p>
+            <a:pPr lvl="0" indent="0" marL="0">
+              <a:buNone/>
+            </a:pPr>
+            <a:r>
+              <a:rPr/>
+              <a:t>Autonomic nervous system</a:t>
+            </a:r>
+          </a:p>
+        </p:txBody>
+      </p:sp>
+      <p:sp>
+        <p:nvSpPr>
           <p:cNvPr id="3" name="Content Placeholder 2"/>
           <p:cNvSpPr>
             <a:spLocks noGrp="1"/>
@@ -5792,14 +11633,56 @@
             <a:pPr lvl="0"/>
             <a:r>
               <a:rPr/>
-              <a:t>Geometric issues central for perceptual/motor behavior</a:t>
+              <a:t>Controls “vegetative functions”</a:t>
+            </a:r>
+          </a:p>
+          <a:p>
+            <a:pPr lvl="1"/>
+            <a:r>
+              <a:rPr/>
+              <a:t>Limited voluntary control</a:t>
             </a:r>
           </a:p>
           <a:p>
             <a:pPr lvl="0"/>
             <a:r>
               <a:rPr/>
-              <a:t>Do other systems “map” function to structure?</a:t>
+              <a:t>Sympathetic</a:t>
+            </a:r>
+          </a:p>
+          <a:p>
+            <a:pPr lvl="1"/>
+            <a:r>
+              <a:rPr/>
+              <a:t>Prepares body for action</a:t>
+            </a:r>
+          </a:p>
+          <a:p>
+            <a:pPr lvl="1"/>
+            <a:r>
+              <a:rPr/>
+              <a:t>“Fight, flee, or fight”</a:t>
+            </a:r>
+          </a:p>
+          <a:p>
+            <a:pPr lvl="0"/>
+            <a:r>
+              <a:rPr/>
+              <a:t>Parasympathetic (around the sympathetic)</a:t>
+            </a:r>
+          </a:p>
+          <a:p>
+            <a:pPr lvl="1"/>
+            <a:r>
+              <a:rPr/>
+              <a:t>Restorative function</a:t>
+            </a:r>
+          </a:p>
+          <a:p>
+            <a:pPr lvl="1"/>
+            <a:r>
+              <a:rPr/>
+              <a:t>“Rest &amp; digest”</a:t>
             </a:r>
           </a:p>
         </p:txBody>
@@ -5809,7 +11692,7 @@
 </p:sld>
 </file>
 
-<file path=ppt/slides/slide32.xml><?xml version="1.0" encoding="utf-8"?>
+<file path=ppt/slides/slide62.xml><?xml version="1.0" encoding="utf-8"?>
 <p:sld xmlns:a="http://schemas.openxmlformats.org/drawingml/2006/main" xmlns:r="http://schemas.openxmlformats.org/officeDocument/2006/relationships" xmlns:p="http://schemas.openxmlformats.org/presentationml/2006/main">
   <p:cSld>
     <p:spTree>
@@ -5836,22 +11719,137 @@
             <p:ph type="title"/>
           </p:nvPr>
         </p:nvSpPr>
+        <p:spPr/>
+        <p:txBody>
+          <a:bodyPr/>
+          <a:lstStyle/>
+          <a:p>
+            <a:pPr lvl="0" indent="0" marL="0">
+              <a:buNone/>
+            </a:pPr>
+            <a:r>
+              <a:rPr/>
+              <a:t>Autonomic nervous system</a:t>
+            </a:r>
+          </a:p>
+        </p:txBody>
+      </p:sp>
+      <p:pic>
+        <p:nvPicPr>
+          <p:cNvPr descr="https://upload.wikimedia.org/wikipedia/commons/thumb/f/f3/1503_Connections_of_the_Parasympathetic_Nervous_System.jpg/1280px-1503_Connections_of_the_Parasympathetic_Nervous_System.jpg" id="0" name="Picture 1"/>
+          <p:cNvPicPr>
+            <a:picLocks noGrp="1" noChangeAspect="1"/>
+          </p:cNvPicPr>
+          <p:nvPr/>
+        </p:nvPicPr>
+        <p:blipFill>
+          <a:blip r:embed="rId2"/>
+          <a:stretch>
+            <a:fillRect/>
+          </a:stretch>
+        </p:blipFill>
+        <p:spPr bwMode="auto">
+          <a:xfrm>
+            <a:off x="457200" y="1295400"/>
+            <a:ext cx="4038600" cy="2692400"/>
+          </a:xfrm>
+          <a:prstGeom prst="rect">
+            <a:avLst/>
+          </a:prstGeom>
+          <a:noFill/>
+          <a:ln w="9525">
+            <a:noFill/>
+            <a:headEnd/>
+            <a:tailEnd/>
+          </a:ln>
+        </p:spPr>
+      </p:pic>
+      <p:sp>
+        <p:nvSpPr>
+          <p:cNvPr id="1" name="TextBox 3"/>
+          <p:cNvSpPr txBox="1"/>
+          <p:nvPr/>
+        </p:nvSpPr>
         <p:spPr>
           <a:xfrm>
-            <a:off x="722313" y="3305176"/>
-            <a:ext cx="7772400" cy="1021556"/>
+            <a:off x="457200" y="4076700"/>
+            <a:ext cx="4038600" cy="508000"/>
           </a:xfrm>
+          <a:prstGeom prst="rect">
+            <a:avLst/>
+          </a:prstGeom>
+          <a:noFill/>
         </p:spPr>
         <p:txBody>
           <a:bodyPr/>
           <a:lstStyle/>
           <a:p>
-            <a:pPr lvl="0" indent="0" marL="0">
+            <a:pPr lvl="0" indent="0" marL="0" algn="ctr">
               <a:buNone/>
             </a:pPr>
             <a:r>
               <a:rPr/>
-              <a:t>Neuroanatomy lab</a:t>
+              <a:t>By OpenStax College - Anatomy &amp; Physiology, Connexions Web site. http://cnx.org/content/col11496/1.6/, Jun 19, 2013., CC BY 3.0, https://commons.wikimedia.org/w/index.php?curid=30148020</a:t>
+            </a:r>
+          </a:p>
+        </p:txBody>
+      </p:sp>
+      <p:pic>
+        <p:nvPicPr>
+          <p:cNvPr descr="https://upload.wikimedia.org/wikipedia/commons/f/f7/Gray839.png" id="0" name="Picture 1"/>
+          <p:cNvPicPr>
+            <a:picLocks noGrp="1" noChangeAspect="1"/>
+          </p:cNvPicPr>
+          <p:nvPr/>
+        </p:nvPicPr>
+        <p:blipFill>
+          <a:blip r:embed="rId3"/>
+          <a:stretch>
+            <a:fillRect/>
+          </a:stretch>
+        </p:blipFill>
+        <p:spPr bwMode="auto">
+          <a:xfrm>
+            <a:off x="4648200" y="1295400"/>
+            <a:ext cx="4038600" cy="2692400"/>
+          </a:xfrm>
+          <a:prstGeom prst="rect">
+            <a:avLst/>
+          </a:prstGeom>
+          <a:noFill/>
+          <a:ln w="9525">
+            <a:noFill/>
+            <a:headEnd/>
+            <a:tailEnd/>
+          </a:ln>
+        </p:spPr>
+      </p:pic>
+      <p:sp>
+        <p:nvSpPr>
+          <p:cNvPr id="1" name="TextBox 3"/>
+          <p:cNvSpPr txBox="1"/>
+          <p:nvPr/>
+        </p:nvSpPr>
+        <p:spPr>
+          <a:xfrm>
+            <a:off x="4648200" y="4076700"/>
+            <a:ext cx="4038600" cy="508000"/>
+          </a:xfrm>
+          <a:prstGeom prst="rect">
+            <a:avLst/>
+          </a:prstGeom>
+          <a:noFill/>
+        </p:spPr>
+        <p:txBody>
+          <a:bodyPr/>
+          <a:lstStyle/>
+          <a:p>
+            <a:pPr lvl="0" indent="0" marL="0" algn="ctr">
+              <a:buNone/>
+            </a:pPr>
+            <a:r>
+              <a:rPr/>
+              <a:t>By Henry Vandyke Carter - Henry Gray (1918) Anatomy of the Human Body (See “Book” section below)Bartleby.com: Gray’s Anatomy, Plate 839, Public Domain, https://commons.wikimedia.org/w/index.php?curid=792179</a:t>
             </a:r>
           </a:p>
         </p:txBody>
@@ -5861,7 +11859,7 @@
 </p:sld>
 </file>
 
-<file path=ppt/slides/slide33.xml><?xml version="1.0" encoding="utf-8"?>
+<file path=ppt/slides/slide63.xml><?xml version="1.0" encoding="utf-8"?>
 <p:sld xmlns:a="http://schemas.openxmlformats.org/drawingml/2006/main" xmlns:r="http://schemas.openxmlformats.org/officeDocument/2006/relationships" xmlns:p="http://schemas.openxmlformats.org/presentationml/2006/main">
   <p:cSld>
     <p:spTree>
@@ -5898,44 +11896,67 @@
             </a:pPr>
             <a:r>
               <a:rPr/>
-              <a:t>Overview</a:t>
-            </a:r>
-          </a:p>
-        </p:txBody>
-      </p:sp>
-      <p:sp>
-        <p:nvSpPr>
-          <p:cNvPr id="3" name="Content Placeholder 2"/>
-          <p:cNvSpPr>
-            <a:spLocks noGrp="1"/>
-          </p:cNvSpPr>
-          <p:nvPr>
-            <p:ph idx="1"/>
-          </p:nvPr>
-        </p:nvSpPr>
-        <p:spPr/>
-        <p:txBody>
-          <a:bodyPr/>
-          <a:lstStyle/>
-          <a:p>
-            <a:pPr lvl="0"/>
-            <a:r>
-              <a:rPr/>
-              <a:t>3 groups</a:t>
-            </a:r>
-          </a:p>
-          <a:p>
-            <a:pPr lvl="0"/>
-            <a:r>
-              <a:rPr/>
-              <a:t>Rotate among stations every ~25 min</a:t>
-            </a:r>
-          </a:p>
-          <a:p>
-            <a:pPr lvl="0"/>
-            <a:r>
-              <a:rPr/>
-              <a:t>Identify as many structures as possible</a:t>
+              <a:t>Autonomic nervous system: Enteric</a:t>
+            </a:r>
+          </a:p>
+        </p:txBody>
+      </p:sp>
+      <p:pic>
+        <p:nvPicPr>
+          <p:cNvPr descr="../include/img/enteric-nervous-system.png" id="0" name="Picture 1"/>
+          <p:cNvPicPr>
+            <a:picLocks noGrp="1" noChangeAspect="1"/>
+          </p:cNvPicPr>
+          <p:nvPr/>
+        </p:nvPicPr>
+        <p:blipFill>
+          <a:blip r:embed="rId2"/>
+          <a:stretch>
+            <a:fillRect/>
+          </a:stretch>
+        </p:blipFill>
+        <p:spPr bwMode="auto">
+          <a:xfrm>
+            <a:off x="3721100" y="1193800"/>
+            <a:ext cx="1714500" cy="2882900"/>
+          </a:xfrm>
+          <a:prstGeom prst="rect">
+            <a:avLst/>
+          </a:prstGeom>
+          <a:noFill/>
+          <a:ln w="9525">
+            <a:noFill/>
+            <a:headEnd/>
+            <a:tailEnd/>
+          </a:ln>
+        </p:spPr>
+      </p:pic>
+      <p:sp>
+        <p:nvSpPr>
+          <p:cNvPr id="1" name="TextBox 3"/>
+          <p:cNvSpPr txBox="1"/>
+          <p:nvPr/>
+        </p:nvSpPr>
+        <p:spPr>
+          <a:xfrm>
+            <a:off x="457200" y="4076700"/>
+            <a:ext cx="8229600" cy="508000"/>
+          </a:xfrm>
+          <a:prstGeom prst="rect">
+            <a:avLst/>
+          </a:prstGeom>
+          <a:noFill/>
+        </p:spPr>
+        <p:txBody>
+          <a:bodyPr/>
+          <a:lstStyle/>
+          <a:p>
+            <a:pPr lvl="0" indent="0" marL="0" algn="ctr">
+              <a:buNone/>
+            </a:pPr>
+            <a:r>
+              <a:rPr/>
+              <a:t>Furness (2012) Figure 1</a:t>
             </a:r>
           </a:p>
         </p:txBody>
@@ -5945,7 +11966,7 @@
 </p:sld>
 </file>
 
-<file path=ppt/slides/slide34.xml><?xml version="1.0" encoding="utf-8"?>
+<file path=ppt/slides/slide64.xml><?xml version="1.0" encoding="utf-8"?>
 <p:sld xmlns:a="http://schemas.openxmlformats.org/drawingml/2006/main" xmlns:r="http://schemas.openxmlformats.org/officeDocument/2006/relationships" xmlns:p="http://schemas.openxmlformats.org/presentationml/2006/main">
   <p:cSld>
     <p:spTree>
@@ -5987,7 +12008,7 @@
             </a:pPr>
             <a:r>
               <a:rPr/>
-              <a:t>Wrap-up</a:t>
+              <a:t>Neuroanatomy lab</a:t>
             </a:r>
           </a:p>
         </p:txBody>
@@ -5997,7 +12018,7 @@
 </p:sld>
 </file>
 
-<file path=ppt/slides/slide35.xml><?xml version="1.0" encoding="utf-8"?>
+<file path=ppt/slides/slide65.xml><?xml version="1.0" encoding="utf-8"?>
 <p:sld xmlns:a="http://schemas.openxmlformats.org/drawingml/2006/main" xmlns:r="http://schemas.openxmlformats.org/officeDocument/2006/relationships" xmlns:p="http://schemas.openxmlformats.org/presentationml/2006/main">
   <p:cSld>
     <p:spTree>
@@ -6034,7 +12055,7 @@
             </a:pPr>
             <a:r>
               <a:rPr/>
-              <a:t>Main points</a:t>
+              <a:t>Overview</a:t>
             </a:r>
           </a:p>
         </p:txBody>
@@ -6057,42 +12078,21 @@
             <a:pPr lvl="0"/>
             <a:r>
               <a:rPr/>
-              <a:t>Directional terms</a:t>
+              <a:t>3 groups</a:t>
             </a:r>
           </a:p>
           <a:p>
             <a:pPr lvl="0"/>
             <a:r>
               <a:rPr/>
-              <a:t>What is it</a:t>
+              <a:t>Rotate among stations every ~25 min</a:t>
             </a:r>
           </a:p>
           <a:p>
             <a:pPr lvl="0"/>
             <a:r>
               <a:rPr/>
-              <a:t>Where is it</a:t>
-            </a:r>
-          </a:p>
-          <a:p>
-            <a:pPr lvl="1"/>
-            <a:r>
-              <a:rPr/>
-              <a:t>Relative to other things</a:t>
-            </a:r>
-          </a:p>
-          <a:p>
-            <a:pPr lvl="1"/>
-            <a:r>
-              <a:rPr/>
-              <a:t>CNS/PNS</a:t>
-            </a:r>
-          </a:p>
-          <a:p>
-            <a:pPr lvl="1"/>
-            <a:r>
-              <a:rPr/>
-              <a:t>Forebrain/midbrain/hindbrain</a:t>
+              <a:t>Identify as many structures as possible</a:t>
             </a:r>
           </a:p>
         </p:txBody>
@@ -6102,7 +12102,7 @@
 </p:sld>
 </file>
 
-<file path=ppt/slides/slide36.xml><?xml version="1.0" encoding="utf-8"?>
+<file path=ppt/slides/slide66.xml><?xml version="1.0" encoding="utf-8"?>
 <p:sld xmlns:a="http://schemas.openxmlformats.org/drawingml/2006/main" xmlns:r="http://schemas.openxmlformats.org/officeDocument/2006/relationships" xmlns:p="http://schemas.openxmlformats.org/presentationml/2006/main">
   <p:cSld>
     <p:spTree>
@@ -6121,30 +12121,30 @@
       </p:grpSpPr>
       <p:sp>
         <p:nvSpPr>
-          <p:cNvPr id="3" name="Content Placeholder 2"/>
-          <p:cNvSpPr>
-            <a:spLocks noGrp="1"/>
-          </p:cNvSpPr>
-          <p:nvPr>
-            <p:ph idx="1"/>
-          </p:nvPr>
-        </p:nvSpPr>
-        <p:spPr/>
-        <p:txBody>
-          <a:bodyPr/>
-          <a:lstStyle/>
-          <a:p>
-            <a:pPr lvl="0"/>
-            <a:r>
-              <a:rPr/>
-              <a:t>Cerebral cortex and its subparts</a:t>
-            </a:r>
-          </a:p>
-          <a:p>
-            <a:pPr lvl="0"/>
-            <a:r>
-              <a:rPr/>
-              <a:t>Grey matter vs. white matter</a:t>
+          <p:cNvPr id="2" name="Title 1"/>
+          <p:cNvSpPr>
+            <a:spLocks noGrp="1"/>
+          </p:cNvSpPr>
+          <p:nvPr>
+            <p:ph type="title"/>
+          </p:nvPr>
+        </p:nvSpPr>
+        <p:spPr>
+          <a:xfrm>
+            <a:off x="722313" y="3305176"/>
+            <a:ext cx="7772400" cy="1021556"/>
+          </a:xfrm>
+        </p:spPr>
+        <p:txBody>
+          <a:bodyPr/>
+          <a:lstStyle/>
+          <a:p>
+            <a:pPr lvl="0" indent="0" marL="0">
+              <a:buNone/>
+            </a:pPr>
+            <a:r>
+              <a:rPr/>
+              <a:t>Wrap-up</a:t>
             </a:r>
           </a:p>
         </p:txBody>
@@ -6154,7 +12154,7 @@
 </p:sld>
 </file>
 
-<file path=ppt/slides/slide37.xml><?xml version="1.0" encoding="utf-8"?>
+<file path=ppt/slides/slide67.xml><?xml version="1.0" encoding="utf-8"?>
 <p:sld xmlns:a="http://schemas.openxmlformats.org/drawingml/2006/main" xmlns:r="http://schemas.openxmlformats.org/officeDocument/2006/relationships" xmlns:p="http://schemas.openxmlformats.org/presentationml/2006/main">
   <p:cSld>
     <p:spTree>
@@ -6191,7 +12191,7 @@
             </a:pPr>
             <a:r>
               <a:rPr/>
-              <a:t>Next time…</a:t>
+              <a:t>Main points</a:t>
             </a:r>
           </a:p>
         </p:txBody>
@@ -6213,10 +12213,43 @@
           <a:p>
             <a:pPr lvl="0"/>
             <a:r>
-              <a:rPr>
-                <a:hlinkClick r:id="rId2"/>
-              </a:rPr>
-              <a:t>Action</a:t>
+              <a:rPr/>
+              <a:t>Directional terms</a:t>
+            </a:r>
+          </a:p>
+          <a:p>
+            <a:pPr lvl="0"/>
+            <a:r>
+              <a:rPr/>
+              <a:t>What is it</a:t>
+            </a:r>
+          </a:p>
+          <a:p>
+            <a:pPr lvl="0"/>
+            <a:r>
+              <a:rPr/>
+              <a:t>Where is it</a:t>
+            </a:r>
+          </a:p>
+          <a:p>
+            <a:pPr lvl="1"/>
+            <a:r>
+              <a:rPr/>
+              <a:t>Relative to other things</a:t>
+            </a:r>
+          </a:p>
+          <a:p>
+            <a:pPr lvl="1"/>
+            <a:r>
+              <a:rPr/>
+              <a:t>CNS/PNS</a:t>
+            </a:r>
+          </a:p>
+          <a:p>
+            <a:pPr lvl="1"/>
+            <a:r>
+              <a:rPr/>
+              <a:t>Forebrain/midbrain/hindbrain</a:t>
             </a:r>
           </a:p>
         </p:txBody>
@@ -6226,7 +12259,7 @@
 </p:sld>
 </file>
 
-<file path=ppt/slides/slide38.xml><?xml version="1.0" encoding="utf-8"?>
+<file path=ppt/slides/slide68.xml><?xml version="1.0" encoding="utf-8"?>
 <p:sld xmlns:a="http://schemas.openxmlformats.org/drawingml/2006/main" xmlns:r="http://schemas.openxmlformats.org/officeDocument/2006/relationships" xmlns:p="http://schemas.openxmlformats.org/presentationml/2006/main">
   <p:cSld>
     <p:spTree>
@@ -6245,30 +12278,30 @@
       </p:grpSpPr>
       <p:sp>
         <p:nvSpPr>
-          <p:cNvPr id="2" name="Title 1"/>
-          <p:cNvSpPr>
-            <a:spLocks noGrp="1"/>
-          </p:cNvSpPr>
-          <p:nvPr>
-            <p:ph type="title"/>
-          </p:nvPr>
-        </p:nvSpPr>
-        <p:spPr>
-          <a:xfrm>
-            <a:off x="722313" y="3305176"/>
-            <a:ext cx="7772400" cy="1021556"/>
-          </a:xfrm>
-        </p:spPr>
-        <p:txBody>
-          <a:bodyPr/>
-          <a:lstStyle/>
-          <a:p>
-            <a:pPr lvl="0" indent="0" marL="0">
-              <a:buNone/>
-            </a:pPr>
-            <a:r>
-              <a:rPr/>
-              <a:t>Resources</a:t>
+          <p:cNvPr id="3" name="Content Placeholder 2"/>
+          <p:cNvSpPr>
+            <a:spLocks noGrp="1"/>
+          </p:cNvSpPr>
+          <p:nvPr>
+            <p:ph idx="1"/>
+          </p:nvPr>
+        </p:nvSpPr>
+        <p:spPr/>
+        <p:txBody>
+          <a:bodyPr/>
+          <a:lstStyle/>
+          <a:p>
+            <a:pPr lvl="0"/>
+            <a:r>
+              <a:rPr/>
+              <a:t>Cerebral cortex and its subparts</a:t>
+            </a:r>
+          </a:p>
+          <a:p>
+            <a:pPr lvl="0"/>
+            <a:r>
+              <a:rPr/>
+              <a:t>Grey matter vs. white matter</a:t>
             </a:r>
           </a:p>
         </p:txBody>
@@ -6278,7 +12311,7 @@
 </p:sld>
 </file>
 
-<file path=ppt/slides/slide39.xml><?xml version="1.0" encoding="utf-8"?>
+<file path=ppt/slides/slide69.xml><?xml version="1.0" encoding="utf-8"?>
 <p:sld xmlns:a="http://schemas.openxmlformats.org/drawingml/2006/main" xmlns:r="http://schemas.openxmlformats.org/officeDocument/2006/relationships" xmlns:p="http://schemas.openxmlformats.org/presentationml/2006/main">
   <p:cSld>
     <p:spTree>
@@ -6315,7 +12348,7 @@
             </a:pPr>
             <a:r>
               <a:rPr/>
-              <a:t>References</a:t>
+              <a:t>Next time…</a:t>
             </a:r>
           </a:p>
         </p:txBody>
@@ -6335,444 +12368,38 @@
           <a:bodyPr/>
           <a:lstStyle/>
           <a:p>
-            <a:pPr lvl="0" indent="0" marL="0">
-              <a:buNone/>
-            </a:pPr>
-            <a:r>
-              <a:rPr/>
-              <a:t>ctdalilah. (2006, October). Pinky and the brain-brainstem. Youtube. Retrieved from </a:t>
-            </a:r>
+            <a:pPr lvl="0"/>
             <a:r>
               <a:rPr>
                 <a:hlinkClick r:id="rId2"/>
               </a:rPr>
-              <a:t>https://www.youtube.com/watch?v=snO68aJTOpM</a:t>
-            </a:r>
-          </a:p>
-          <a:p>
-            <a:pPr lvl="0" indent="0" marL="0">
-              <a:buNone/>
-            </a:pPr>
-            <a:r>
-              <a:rPr/>
-              <a:t>Kids Learning Tube. (2015, October). Human body for Kids/Brain Song/Human body systems. Youtube. Retrieved from </a:t>
+              <a:t>Action</a:t>
+            </a:r>
+          </a:p>
+          <a:p>
+            <a:pPr lvl="0"/>
+            <a:r>
+              <a:rPr i="1"/>
+              <a:t>Due</a:t>
+            </a:r>
+            <a:r>
+              <a:rPr/>
+              <a:t>: </a:t>
             </a:r>
             <a:r>
               <a:rPr>
                 <a:hlinkClick r:id="rId3"/>
               </a:rPr>
-              <a:t>https://www.youtube.com/watch?v=Qw8E9WnZTQk</a:t>
-            </a:r>
-          </a:p>
-          <a:p>
-            <a:pPr lvl="0" indent="0" marL="0">
-              <a:buNone/>
-            </a:pPr>
-            <a:r>
-              <a:rPr/>
-              <a:t>McNaughton, A. (2018, November 20). Dissecting harriet cole: Uncovering women’s history in the archives. Retrieved January 8, 2025, from </a:t>
-            </a:r>
+              <a:t>Exercise ANAT • Neuroanatomy</a:t>
+            </a:r>
+          </a:p>
+          <a:p>
+            <a:pPr lvl="1"/>
             <a:r>
               <a:rPr>
                 <a:hlinkClick r:id="rId4"/>
               </a:rPr>
-              <a:t>https://drexel.edu/legacy-center/blog/overview/2018/november/dissecting-harriet-cole-uncovering-womens-history-in-the-archives/</a:t>
-            </a:r>
-          </a:p>
-          <a:p>
-            <a:pPr lvl="0" indent="0" marL="0">
-              <a:buNone/>
-            </a:pPr>
-            <a:r>
-              <a:rPr/>
-              <a:t>Saenz, M., &amp; Langers, D. R. M. (2014). Tonotopic mapping of human auditory cortex. </a:t>
-            </a:r>
-            <a:r>
-              <a:rPr i="1"/>
-              <a:t>Hearing Research</a:t>
-            </a:r>
-            <a:r>
-              <a:rPr/>
-              <a:t>, </a:t>
-            </a:r>
-            <a:r>
-              <a:rPr i="1"/>
-              <a:t>307</a:t>
-            </a:r>
-            <a:r>
-              <a:rPr/>
-              <a:t>, 42–52. </a:t>
-            </a:r>
-            <a:r>
-              <a:rPr>
-                <a:hlinkClick r:id="rId5"/>
-              </a:rPr>
-              <a:t>https://doi.org/10.1016/j.heares.2013.07.016</a:t>
-            </a:r>
-          </a:p>
-          <a:p>
-            <a:pPr lvl="0" indent="0" marL="0">
-              <a:buNone/>
-            </a:pPr>
-            <a:r>
-              <a:rPr/>
-              <a:t>Swanson, L. W. (2005). Anatomy of the soul as reflected in the cerebral hemispheres: Neural circuits underlying voluntary control of basic motivated behaviors. </a:t>
-            </a:r>
-            <a:r>
-              <a:rPr i="1"/>
-              <a:t>Journal of Comparative Neurology</a:t>
-            </a:r>
-            <a:r>
-              <a:rPr/>
-              <a:t>, </a:t>
-            </a:r>
-            <a:r>
-              <a:rPr i="1"/>
-              <a:t>493</a:t>
-            </a:r>
-            <a:r>
-              <a:rPr/>
-              <a:t>(1), 122–131. </a:t>
-            </a:r>
-            <a:r>
-              <a:rPr>
-                <a:hlinkClick r:id="rId6"/>
-              </a:rPr>
-              <a:t>https://doi.org/10.1002/cne.20733</a:t>
-            </a:r>
-          </a:p>
-        </p:txBody>
-      </p:sp>
-    </p:spTree>
-  </p:cSld>
-</p:sld>
-</file>
-
-<file path=ppt/slides/slide4.xml><?xml version="1.0" encoding="utf-8"?>
-<p:sld xmlns:a="http://schemas.openxmlformats.org/drawingml/2006/main" xmlns:r="http://schemas.openxmlformats.org/officeDocument/2006/relationships" xmlns:p="http://schemas.openxmlformats.org/presentationml/2006/main">
-  <p:cSld>
-    <p:spTree>
-      <p:nvGrpSpPr>
-        <p:cNvPr id="1" name=""/>
-        <p:cNvGrpSpPr/>
-        <p:nvPr/>
-      </p:nvGrpSpPr>
-      <p:grpSpPr>
-        <a:xfrm>
-          <a:off x="0" y="0"/>
-          <a:ext cx="0" cy="0"/>
-          <a:chOff x="0" y="0"/>
-          <a:chExt cx="0" cy="0"/>
-        </a:xfrm>
-      </p:grpSpPr>
-      <p:sp>
-        <p:nvSpPr>
-          <p:cNvPr id="3" name="Content Placeholder 2"/>
-          <p:cNvSpPr>
-            <a:spLocks noGrp="1"/>
-          </p:cNvSpPr>
-          <p:nvPr>
-            <p:ph idx="1"/>
-          </p:nvPr>
-        </p:nvSpPr>
-        <p:spPr/>
-        <p:txBody>
-          <a:bodyPr/>
-          <a:lstStyle/>
-          <a:p>
-            <a:pPr lvl="0" indent="0" marL="0">
-              <a:buNone/>
-            </a:pPr>
-            <a:r>
-              <a:rPr>
-                <a:hlinkClick r:id="rId2"/>
-              </a:rPr>
-              <a:t>https://www.youtube.com/embed/Qw8E9WnZTQk</a:t>
-            </a:r>
-          </a:p>
-          <a:p>
-            <a:pPr lvl="0" indent="0" marL="0">
-              <a:buNone/>
-            </a:pPr>
-            <a:r>
-              <a:rPr/>
-              <a:t>– Kids Learning Tube (2015) </a:t>
-            </a:r>
-          </a:p>
-        </p:txBody>
-      </p:sp>
-    </p:spTree>
-  </p:cSld>
-</p:sld>
-</file>
-
-<file path=ppt/slides/slide40.xml><?xml version="1.0" encoding="utf-8"?>
-<p:sld xmlns:a="http://schemas.openxmlformats.org/drawingml/2006/main" xmlns:r="http://schemas.openxmlformats.org/officeDocument/2006/relationships" xmlns:p="http://schemas.openxmlformats.org/presentationml/2006/main">
-  <p:cSld>
-    <p:spTree>
-      <p:nvGrpSpPr>
-        <p:cNvPr id="1" name=""/>
-        <p:cNvGrpSpPr/>
-        <p:nvPr/>
-      </p:nvGrpSpPr>
-      <p:grpSpPr>
-        <a:xfrm>
-          <a:off x="0" y="0"/>
-          <a:ext cx="0" cy="0"/>
-          <a:chOff x="0" y="0"/>
-          <a:chExt cx="0" cy="0"/>
-        </a:xfrm>
-      </p:grpSpPr>
-      <p:sp>
-        <p:nvSpPr>
-          <p:cNvPr id="2" name="Title 1"/>
-          <p:cNvSpPr>
-            <a:spLocks noGrp="1"/>
-          </p:cNvSpPr>
-          <p:nvPr>
-            <p:ph type="title"/>
-          </p:nvPr>
-        </p:nvSpPr>
-        <p:spPr/>
-        <p:txBody>
-          <a:bodyPr/>
-          <a:lstStyle/>
-          <a:p>
-            <a:pPr lvl="0" indent="0" marL="0">
-              <a:buNone/>
-            </a:pPr>
-            <a:r>
-              <a:rPr/>
-              <a:t>Notes</a:t>
-            </a:r>
-          </a:p>
-        </p:txBody>
-      </p:sp>
-      <p:sp>
-        <p:nvSpPr>
-          <p:cNvPr id="3" name="Content Placeholder 2"/>
-          <p:cNvSpPr>
-            <a:spLocks noGrp="1"/>
-          </p:cNvSpPr>
-          <p:nvPr>
-            <p:ph idx="1"/>
-          </p:nvPr>
-        </p:nvSpPr>
-        <p:spPr/>
-        <p:txBody>
-          <a:bodyPr/>
-          <a:lstStyle/>
-          <a:p>
-            <a:pPr lvl="0" indent="0" marL="0">
-              <a:buNone/>
-            </a:pPr>
-            <a:r>
-              <a:rPr sz="1800"/>
-              <a:t>1. shorthand for nervous system</a:t>
-            </a:r>
-          </a:p>
-        </p:txBody>
-      </p:sp>
-    </p:spTree>
-  </p:cSld>
-</p:sld>
-</file>
-
-<file path=ppt/slides/slide5.xml><?xml version="1.0" encoding="utf-8"?>
-<p:sld xmlns:a="http://schemas.openxmlformats.org/drawingml/2006/main" xmlns:r="http://schemas.openxmlformats.org/officeDocument/2006/relationships" xmlns:p="http://schemas.openxmlformats.org/presentationml/2006/main">
-  <p:cSld>
-    <p:spTree>
-      <p:nvGrpSpPr>
-        <p:cNvPr id="1" name=""/>
-        <p:cNvGrpSpPr/>
-        <p:nvPr/>
-      </p:nvGrpSpPr>
-      <p:grpSpPr>
-        <a:xfrm>
-          <a:off x="0" y="0"/>
-          <a:ext cx="0" cy="0"/>
-          <a:chOff x="0" y="0"/>
-          <a:chExt cx="0" cy="0"/>
-        </a:xfrm>
-      </p:grpSpPr>
-      <p:sp>
-        <p:nvSpPr>
-          <p:cNvPr id="2" name="Title 1"/>
-          <p:cNvSpPr>
-            <a:spLocks noGrp="1"/>
-          </p:cNvSpPr>
-          <p:nvPr>
-            <p:ph type="title"/>
-          </p:nvPr>
-        </p:nvSpPr>
-        <p:spPr/>
-        <p:txBody>
-          <a:bodyPr/>
-          <a:lstStyle/>
-          <a:p>
-            <a:pPr lvl="0" indent="0" marL="0">
-              <a:buNone/>
-            </a:pPr>
-            <a:r>
-              <a:rPr/>
-              <a:t>Announcements</a:t>
-            </a:r>
-          </a:p>
-        </p:txBody>
-      </p:sp>
-      <p:sp>
-        <p:nvSpPr>
-          <p:cNvPr id="3" name="Content Placeholder 2"/>
-          <p:cNvSpPr>
-            <a:spLocks noGrp="1"/>
-          </p:cNvSpPr>
-          <p:nvPr>
-            <p:ph idx="1"/>
-          </p:nvPr>
-        </p:nvSpPr>
-        <p:spPr/>
-        <p:txBody>
-          <a:bodyPr/>
-          <a:lstStyle/>
-          <a:p>
-            <a:pPr lvl="0"/>
-            <a:r>
-              <a:rPr/>
-              <a:t>Exercise LVL due </a:t>
-            </a:r>
-            <a:r>
-              <a:rPr b="1"/>
-              <a:t>today</a:t>
-            </a:r>
-            <a:r>
-              <a:rPr/>
-              <a:t>.</a:t>
-            </a:r>
-          </a:p>
-          <a:p>
-            <a:pPr lvl="1"/>
-            <a:r>
-              <a:rPr>
-                <a:hlinkClick r:id="rId2"/>
-              </a:rPr>
               <a:t>Canvas dropbox</a:t>
-            </a:r>
-          </a:p>
-          <a:p>
-            <a:pPr lvl="0"/>
-            <a:r>
-              <a:rPr/>
-              <a:t>Exercise ANAT due </a:t>
-            </a:r>
-            <a:r>
-              <a:rPr b="1"/>
-              <a:t>next Thursday, January 29, 2026</a:t>
-            </a:r>
-            <a:r>
-              <a:rPr/>
-              <a:t>.</a:t>
-            </a:r>
-          </a:p>
-          <a:p>
-            <a:pPr lvl="1"/>
-            <a:r>
-              <a:rPr>
-                <a:hlinkClick r:id="rId3"/>
-              </a:rPr>
-              <a:t>Canvas dropbox</a:t>
-            </a:r>
-          </a:p>
-        </p:txBody>
-      </p:sp>
-    </p:spTree>
-  </p:cSld>
-</p:sld>
-</file>
-
-<file path=ppt/slides/slide6.xml><?xml version="1.0" encoding="utf-8"?>
-<p:sld xmlns:a="http://schemas.openxmlformats.org/drawingml/2006/main" xmlns:r="http://schemas.openxmlformats.org/officeDocument/2006/relationships" xmlns:p="http://schemas.openxmlformats.org/presentationml/2006/main">
-  <p:cSld>
-    <p:spTree>
-      <p:nvGrpSpPr>
-        <p:cNvPr id="1" name=""/>
-        <p:cNvGrpSpPr/>
-        <p:nvPr/>
-      </p:nvGrpSpPr>
-      <p:grpSpPr>
-        <a:xfrm>
-          <a:off x="0" y="0"/>
-          <a:ext cx="0" cy="0"/>
-          <a:chOff x="0" y="0"/>
-          <a:chExt cx="0" cy="0"/>
-        </a:xfrm>
-      </p:grpSpPr>
-      <p:sp>
-        <p:nvSpPr>
-          <p:cNvPr id="2" name="Title 1"/>
-          <p:cNvSpPr>
-            <a:spLocks noGrp="1"/>
-          </p:cNvSpPr>
-          <p:nvPr>
-            <p:ph type="title"/>
-          </p:nvPr>
-        </p:nvSpPr>
-        <p:spPr/>
-        <p:txBody>
-          <a:bodyPr/>
-          <a:lstStyle/>
-          <a:p>
-            <a:pPr lvl="0" indent="0" marL="0">
-              <a:buNone/>
-            </a:pPr>
-            <a:r>
-              <a:rPr/>
-              <a:t>Today’s topics</a:t>
-            </a:r>
-          </a:p>
-        </p:txBody>
-      </p:sp>
-      <p:sp>
-        <p:nvSpPr>
-          <p:cNvPr id="3" name="Content Placeholder 2"/>
-          <p:cNvSpPr>
-            <a:spLocks noGrp="1"/>
-          </p:cNvSpPr>
-          <p:nvPr>
-            <p:ph idx="1"/>
-          </p:nvPr>
-        </p:nvSpPr>
-        <p:spPr/>
-        <p:txBody>
-          <a:bodyPr/>
-          <a:lstStyle/>
-          <a:p>
-            <a:pPr lvl="0"/>
-            <a:r>
-              <a:rPr/>
-              <a:t>Neuroanatomy</a:t>
-            </a:r>
-          </a:p>
-          <a:p>
-            <a:pPr lvl="1"/>
-            <a:r>
-              <a:rPr/>
-              <a:t>Brief overview</a:t>
-            </a:r>
-          </a:p>
-          <a:p>
-            <a:pPr lvl="1"/>
-            <a:r>
-              <a:rPr/>
-              <a:t>In-class lab</a:t>
-            </a:r>
-          </a:p>
-          <a:p>
-            <a:pPr lvl="1"/>
-            <a:r>
-              <a:rPr>
-                <a:hlinkClick r:id="rId2"/>
-              </a:rPr>
-              <a:t>Exercise ANAT</a:t>
             </a:r>
           </a:p>
         </p:txBody>
@@ -6834,6 +12461,282 @@
 </p:sld>
 </file>
 
+<file path=ppt/slides/slide70.xml><?xml version="1.0" encoding="utf-8"?>
+<p:sld xmlns:a="http://schemas.openxmlformats.org/drawingml/2006/main" xmlns:r="http://schemas.openxmlformats.org/officeDocument/2006/relationships" xmlns:p="http://schemas.openxmlformats.org/presentationml/2006/main">
+  <p:cSld>
+    <p:spTree>
+      <p:nvGrpSpPr>
+        <p:cNvPr id="1" name=""/>
+        <p:cNvGrpSpPr/>
+        <p:nvPr/>
+      </p:nvGrpSpPr>
+      <p:grpSpPr>
+        <a:xfrm>
+          <a:off x="0" y="0"/>
+          <a:ext cx="0" cy="0"/>
+          <a:chOff x="0" y="0"/>
+          <a:chExt cx="0" cy="0"/>
+        </a:xfrm>
+      </p:grpSpPr>
+      <p:sp>
+        <p:nvSpPr>
+          <p:cNvPr id="2" name="Title 1"/>
+          <p:cNvSpPr>
+            <a:spLocks noGrp="1"/>
+          </p:cNvSpPr>
+          <p:nvPr>
+            <p:ph type="title"/>
+          </p:nvPr>
+        </p:nvSpPr>
+        <p:spPr>
+          <a:xfrm>
+            <a:off x="722313" y="3305176"/>
+            <a:ext cx="7772400" cy="1021556"/>
+          </a:xfrm>
+        </p:spPr>
+        <p:txBody>
+          <a:bodyPr/>
+          <a:lstStyle/>
+          <a:p>
+            <a:pPr lvl="0" indent="0" marL="0">
+              <a:buNone/>
+            </a:pPr>
+            <a:r>
+              <a:rPr/>
+              <a:t>Resources</a:t>
+            </a:r>
+          </a:p>
+        </p:txBody>
+      </p:sp>
+    </p:spTree>
+  </p:cSld>
+</p:sld>
+</file>
+
+<file path=ppt/slides/slide71.xml><?xml version="1.0" encoding="utf-8"?>
+<p:sld xmlns:a="http://schemas.openxmlformats.org/drawingml/2006/main" xmlns:r="http://schemas.openxmlformats.org/officeDocument/2006/relationships" xmlns:p="http://schemas.openxmlformats.org/presentationml/2006/main">
+  <p:cSld>
+    <p:spTree>
+      <p:nvGrpSpPr>
+        <p:cNvPr id="1" name=""/>
+        <p:cNvGrpSpPr/>
+        <p:nvPr/>
+      </p:nvGrpSpPr>
+      <p:grpSpPr>
+        <a:xfrm>
+          <a:off x="0" y="0"/>
+          <a:ext cx="0" cy="0"/>
+          <a:chOff x="0" y="0"/>
+          <a:chExt cx="0" cy="0"/>
+        </a:xfrm>
+      </p:grpSpPr>
+      <p:sp>
+        <p:nvSpPr>
+          <p:cNvPr id="2" name="Title 1"/>
+          <p:cNvSpPr>
+            <a:spLocks noGrp="1"/>
+          </p:cNvSpPr>
+          <p:nvPr>
+            <p:ph type="title"/>
+          </p:nvPr>
+        </p:nvSpPr>
+        <p:spPr/>
+        <p:txBody>
+          <a:bodyPr/>
+          <a:lstStyle/>
+          <a:p>
+            <a:pPr lvl="0" indent="0" marL="0">
+              <a:buNone/>
+            </a:pPr>
+            <a:r>
+              <a:rPr/>
+              <a:t>References</a:t>
+            </a:r>
+          </a:p>
+        </p:txBody>
+      </p:sp>
+      <p:sp>
+        <p:nvSpPr>
+          <p:cNvPr id="3" name="Content Placeholder 2"/>
+          <p:cNvSpPr>
+            <a:spLocks noGrp="1"/>
+          </p:cNvSpPr>
+          <p:nvPr>
+            <p:ph idx="1"/>
+          </p:nvPr>
+        </p:nvSpPr>
+        <p:spPr/>
+        <p:txBody>
+          <a:bodyPr/>
+          <a:lstStyle/>
+          <a:p>
+            <a:pPr lvl="0" indent="0" marL="0">
+              <a:buNone/>
+            </a:pPr>
+            <a:r>
+              <a:rPr/>
+              <a:t>ctdalilah. (2006, October). Pinky and the brain-brainstem. Youtube. Retrieved from </a:t>
+            </a:r>
+            <a:r>
+              <a:rPr>
+                <a:hlinkClick r:id="rId2"/>
+              </a:rPr>
+              <a:t>https://www.youtube.com/watch?v=snO68aJTOpM</a:t>
+            </a:r>
+          </a:p>
+          <a:p>
+            <a:pPr lvl="0" indent="0" marL="0">
+              <a:buNone/>
+            </a:pPr>
+            <a:r>
+              <a:rPr/>
+              <a:t>Furness, J. B. (2012). The enteric nervous system and neurogastroenterology. </a:t>
+            </a:r>
+            <a:r>
+              <a:rPr i="1"/>
+              <a:t>Nature Reviews. Gastroenterology &amp; Hepatology</a:t>
+            </a:r>
+            <a:r>
+              <a:rPr/>
+              <a:t>, </a:t>
+            </a:r>
+            <a:r>
+              <a:rPr i="1"/>
+              <a:t>9</a:t>
+            </a:r>
+            <a:r>
+              <a:rPr/>
+              <a:t>(5), 286–294. </a:t>
+            </a:r>
+            <a:r>
+              <a:rPr>
+                <a:hlinkClick r:id="rId3"/>
+              </a:rPr>
+              <a:t>https://doi.org/10.1038/nrgastro.2012.32</a:t>
+            </a:r>
+          </a:p>
+          <a:p>
+            <a:pPr lvl="0" indent="0" marL="0">
+              <a:buNone/>
+            </a:pPr>
+            <a:r>
+              <a:rPr/>
+              <a:t>Kids Learning Tube. (2015, October). Human body for Kids/Brain Song/Human body systems. Youtube. Retrieved from </a:t>
+            </a:r>
+            <a:r>
+              <a:rPr>
+                <a:hlinkClick r:id="rId4"/>
+              </a:rPr>
+              <a:t>https://www.youtube.com/watch?v=Qw8E9WnZTQk</a:t>
+            </a:r>
+          </a:p>
+          <a:p>
+            <a:pPr lvl="0" indent="0" marL="0">
+              <a:buNone/>
+            </a:pPr>
+            <a:r>
+              <a:rPr/>
+              <a:t>LeDoux, J. (2015, August 10). The Amygdala Is NOT the Brain’s Fear Center. </a:t>
+            </a:r>
+            <a:r>
+              <a:rPr i="1"/>
+              <a:t>Psychology Today</a:t>
+            </a:r>
+            <a:r>
+              <a:rPr/>
+              <a:t>. Retrieved from </a:t>
+            </a:r>
+            <a:r>
+              <a:rPr>
+                <a:hlinkClick r:id="rId5"/>
+              </a:rPr>
+              <a:t>https://www.psychologytoday.com/blog/i-got-mind-tell-you/201508/the-amygdala-is-not-the-brains-fear-center</a:t>
+            </a:r>
+          </a:p>
+          <a:p>
+            <a:pPr lvl="0" indent="0" marL="0">
+              <a:buNone/>
+            </a:pPr>
+            <a:r>
+              <a:rPr/>
+              <a:t>McNaughton, A. (2018, November 20). Dissecting Harriet Cole: Uncovering women’s history in the archives. Retrieved January 8, 2025, from </a:t>
+            </a:r>
+            <a:r>
+              <a:rPr>
+                <a:hlinkClick r:id="rId6"/>
+              </a:rPr>
+              <a:t>https://drexel.edu/legacy-center/blog/overview/2018/november/dissecting-harriet-cole-uncovering-womens-history-in-the-archives/</a:t>
+            </a:r>
+          </a:p>
+          <a:p>
+            <a:pPr lvl="0" indent="0" marL="0">
+              <a:buNone/>
+            </a:pPr>
+            <a:r>
+              <a:rPr/>
+              <a:t>Namkung, H., Kim, S.-H., &amp; Sawa, A. (2017). The insula: An underestimated brain area in clinical neuroscience, psychiatry, and neurology. </a:t>
+            </a:r>
+            <a:r>
+              <a:rPr i="1"/>
+              <a:t>Trends in Neurosciences</a:t>
+            </a:r>
+            <a:r>
+              <a:rPr/>
+              <a:t>, </a:t>
+            </a:r>
+            <a:r>
+              <a:rPr i="1"/>
+              <a:t>40</a:t>
+            </a:r>
+            <a:r>
+              <a:rPr/>
+              <a:t>(4), 200–207. </a:t>
+            </a:r>
+            <a:r>
+              <a:rPr>
+                <a:hlinkClick r:id="rId7"/>
+              </a:rPr>
+              <a:t>https://doi.org/10.1016/j.tins.2017.02.002</a:t>
+            </a:r>
+          </a:p>
+          <a:p>
+            <a:pPr lvl="0" indent="0" marL="0">
+              <a:buNone/>
+            </a:pPr>
+            <a:r>
+              <a:rPr/>
+              <a:t>Swanson, L. W. (2005). Anatomy of the soul as reflected in the cerebral hemispheres: Neural circuits underlying voluntary control of basic motivated behaviors. </a:t>
+            </a:r>
+            <a:r>
+              <a:rPr i="1"/>
+              <a:t>Journal of Comparative Neurology</a:t>
+            </a:r>
+            <a:r>
+              <a:rPr/>
+              <a:t>, </a:t>
+            </a:r>
+            <a:r>
+              <a:rPr i="1"/>
+              <a:t>493</a:t>
+            </a:r>
+            <a:r>
+              <a:rPr/>
+              <a:t>(1), 122–131. </a:t>
+            </a:r>
+            <a:r>
+              <a:rPr>
+                <a:hlinkClick r:id="rId8"/>
+              </a:rPr>
+              <a:t>https://doi.org/10.1002/cne.20733</a:t>
+            </a:r>
+          </a:p>
+        </p:txBody>
+      </p:sp>
+    </p:spTree>
+  </p:cSld>
+</p:sld>
+</file>
+
 <file path=ppt/slides/slide8.xml><?xml version="1.0" encoding="utf-8"?>
 <p:sld xmlns:a="http://schemas.openxmlformats.org/drawingml/2006/main" xmlns:r="http://schemas.openxmlformats.org/officeDocument/2006/relationships" xmlns:p="http://schemas.openxmlformats.org/presentationml/2006/main">
   <p:cSld>
@@ -6941,19 +12844,19 @@
             </a:pPr>
             <a:r>
               <a:rPr/>
-              <a:t>Information processing perspective</a:t>
-            </a:r>
-          </a:p>
-        </p:txBody>
-      </p:sp>
-      <p:sp>
-        <p:nvSpPr>
-          <p:cNvPr id="3" name="Content Placeholder 2"/>
-          <p:cNvSpPr>
-            <a:spLocks noGrp="1"/>
-          </p:cNvSpPr>
-          <p:nvPr>
-            <p:ph idx="1"/>
+              <a:t>Computational perspective</a:t>
+            </a:r>
+          </a:p>
+        </p:txBody>
+      </p:sp>
+      <p:sp>
+        <p:nvSpPr>
+          <p:cNvPr id="3" name="Text Placeholder 2"/>
+          <p:cNvSpPr>
+            <a:spLocks noGrp="1"/>
+          </p:cNvSpPr>
+          <p:nvPr>
+            <p:ph idx="1" type="body"/>
           </p:nvPr>
         </p:nvSpPr>
         <p:spPr/>
@@ -6985,17 +12888,62 @@
             <a:pPr lvl="1"/>
             <a:r>
               <a:rPr/>
-              <a:t>Brain</a:t>
-            </a:r>
-            <a:r>
-              <a:rPr baseline="30000">
-                <a:hlinkClick r:id="rId2" action="ppaction://hlinksldjump"/>
-              </a:rPr>
-              <a:t>1</a:t>
-            </a:r>
-          </a:p>
-        </p:txBody>
-      </p:sp>
+              <a:t>Nervous system</a:t>
+            </a:r>
+          </a:p>
+        </p:txBody>
+      </p:sp>
+      <p:sp>
+        <p:nvSpPr>
+          <p:cNvPr id="5" name="Text Placeholder 4"/>
+          <p:cNvSpPr>
+            <a:spLocks noGrp="1"/>
+          </p:cNvSpPr>
+          <p:nvPr>
+            <p:ph idx="3" sz="quarter" type="body"/>
+          </p:nvPr>
+        </p:nvSpPr>
+        <p:spPr/>
+        <p:txBody>
+          <a:bodyPr/>
+          <a:lstStyle/>
+          <a:p>
+            <a:pPr lvl="0" indent="0" marL="0">
+              <a:buNone/>
+            </a:pPr>
+          </a:p>
+        </p:txBody>
+      </p:sp>
+      <p:pic>
+        <p:nvPicPr>
+          <p:cNvPr descr="wk-02-2026-01-22-anatomy_files/figure-pptx/mermaid-figure-1.png" id="0" name="Picture 1"/>
+          <p:cNvPicPr>
+            <a:picLocks noGrp="1" noChangeAspect="1"/>
+          </p:cNvPicPr>
+          <p:nvPr/>
+        </p:nvPicPr>
+        <p:blipFill>
+          <a:blip r:embed="rId2"/>
+          <a:stretch>
+            <a:fillRect/>
+          </a:stretch>
+        </p:blipFill>
+        <p:spPr bwMode="auto">
+          <a:xfrm>
+            <a:off x="5651500" y="1625600"/>
+            <a:ext cx="2006600" cy="2959100"/>
+          </a:xfrm>
+          <a:prstGeom prst="rect">
+            <a:avLst/>
+          </a:prstGeom>
+          <a:noFill/>
+          <a:ln w="9525">
+            <a:noFill/>
+            <a:headEnd/>
+            <a:tailEnd/>
+          </a:ln>
+        </p:spPr>
+      </p:pic>
     </p:spTree>
   </p:cSld>
 </p:sld>

--- a/docs/slides/wk-02-2026-01-22-anatomy.pptx
+++ b/docs/slides/wk-02-2026-01-22-anatomy.pptx
@@ -76,6 +76,7 @@
     <p:sldId id="324" r:id="rId70"/>
     <p:sldId id="325" r:id="rId71"/>
     <p:sldId id="326" r:id="rId72"/>
+    <p:sldId id="327" r:id="rId73"/>
   </p:sldIdLst>
   <p:sldSz cx="9144000" cy="5143500" type="screen16x9"/>
   <p:notesSz cx="6858000" cy="9144000"/>
@@ -193,7 +194,7 @@
 </p:presentation>
 </file>
 
-<file path=ppt/media/image11.txt>Please set a user-agent and respect our robot policy https://w.wiki/4wJS. See also https://phabricator.wikimedia.org/T400119.
+<file path=ppt/media/image10.txt>Please set a user-agent and respect our robot policy https://w.wiki/4wJS. See also https://phabricator.wikimedia.org/T400119.
 
 </file>
 
@@ -209,23 +210,23 @@
 
 </file>
 
-<file path=ppt/media/image16.txt>Please set a user-agent and respect our robot policy https://w.wiki/4wJS. See also https://phabricator.wikimedia.org/T400119.
+<file path=ppt/media/image15.txt>Please set a user-agent and respect our robot policy https://w.wiki/4wJS. See also https://phabricator.wikimedia.org/T400119.
 
 </file>
 
-<file path=ppt/media/image18.txt>Please set a user-agent and respect our robot policy https://w.wiki/4wJS. See also https://phabricator.wikimedia.org/T400119.
+<file path=ppt/media/image17.txt>Please set a user-agent and respect our robot policy https://w.wiki/4wJS. See also https://phabricator.wikimedia.org/T400119.
 
 </file>
 
-<file path=ppt/media/image22.txt>Please set a user-agent and respect our robot policy https://w.wiki/4wJS. See also https://phabricator.wikimedia.org/T400119.
+<file path=ppt/media/image19.txt>Please set a user-agent and respect our robot policy https://w.wiki/4wJS. See also https://phabricator.wikimedia.org/T400119.
 
 </file>
 
-<file path=ppt/media/image26.txt>Please set a user-agent and respect our robot policy https://w.wiki/4wJS. See also https://phabricator.wikimedia.org/T400119.
+<file path=ppt/media/image23.txt>Please set a user-agent and respect our robot policy https://w.wiki/4wJS. See also https://phabricator.wikimedia.org/T400119.
 
 </file>
 
-<file path=ppt/media/image28.txt>Please set a user-agent and respect our robot policy https://w.wiki/4wJS. See also https://phabricator.wikimedia.org/T400119.
+<file path=ppt/media/image27.txt>Please set a user-agent and respect our robot policy https://w.wiki/4wJS. See also https://phabricator.wikimedia.org/T400119.
 
 </file>
 
@@ -233,15 +234,11 @@
 
 </file>
 
-<file path=ppt/media/image3.txt>Please set a user-agent and respect our robot policy https://w.wiki/4wJS. See also https://phabricator.wikimedia.org/T400119.
-
-</file>
-
 <file path=ppt/media/image30.txt>Please set a user-agent and respect our robot policy https://w.wiki/4wJS. See also https://phabricator.wikimedia.org/T400119.
 
 </file>
 
-<file path=ppt/media/image35.txt>Please set a user-agent and respect our robot policy https://w.wiki/4wJS. See also https://phabricator.wikimedia.org/T400119.
+<file path=ppt/media/image31.txt>Please set a user-agent and respect our robot policy https://w.wiki/4wJS. See also https://phabricator.wikimedia.org/T400119.
 
 </file>
 
@@ -249,7 +246,7 @@
 
 </file>
 
-<file path=ppt/media/image38.txt>Please set a user-agent and respect our robot policy https://w.wiki/4wJS. See also https://phabricator.wikimedia.org/T400119.
+<file path=ppt/media/image37.txt>Please set a user-agent and respect our robot policy https://w.wiki/4wJS. See also https://phabricator.wikimedia.org/T400119.
 
 </file>
 
@@ -257,11 +254,15 @@
 
 </file>
 
-<file path=ppt/media/image5.txt>Please set a user-agent and respect our robot policy https://w.wiki/4wJS. See also https://phabricator.wikimedia.org/T400119.
+<file path=ppt/media/image4.txt>Please set a user-agent and respect our robot policy https://w.wiki/4wJS. See also https://phabricator.wikimedia.org/T400119.
 
 </file>
 
-<file path=ppt/media/image8.txt>Please set a user-agent and respect our robot policy https://w.wiki/4wJS. See also https://phabricator.wikimedia.org/T400119.
+<file path=ppt/media/image40.txt>Please set a user-agent and respect our robot policy https://w.wiki/4wJS. See also https://phabricator.wikimedia.org/T400119.
+
+</file>
+
+<file path=ppt/media/image6.txt>Please set a user-agent and respect our robot policy https://w.wiki/4wJS. See also https://phabricator.wikimedia.org/T400119.
 
 </file>
 
@@ -3639,58 +3640,67 @@
             </a:pPr>
             <a:r>
               <a:rPr/>
-              <a:t>Nervous system</a:t>
-            </a:r>
-          </a:p>
-        </p:txBody>
-      </p:sp>
-      <p:sp>
-        <p:nvSpPr>
-          <p:cNvPr id="3" name="Content Placeholder 2"/>
-          <p:cNvSpPr>
-            <a:spLocks noGrp="1"/>
-          </p:cNvSpPr>
-          <p:nvPr>
-            <p:ph idx="1"/>
-          </p:nvPr>
-        </p:nvSpPr>
-        <p:spPr/>
-        <p:txBody>
-          <a:bodyPr/>
-          <a:lstStyle/>
-          <a:p>
-            <a:pPr lvl="0"/>
-            <a:r>
-              <a:rPr/>
-              <a:t>Central Nervous System (CNS)</a:t>
-            </a:r>
-          </a:p>
-          <a:p>
-            <a:pPr lvl="1"/>
-            <a:r>
-              <a:rPr/>
-              <a:t>Encased in bone</a:t>
-            </a:r>
-          </a:p>
-          <a:p>
-            <a:pPr lvl="1"/>
-            <a:r>
-              <a:rPr/>
-              <a:t>Brain</a:t>
-            </a:r>
-          </a:p>
-          <a:p>
-            <a:pPr lvl="1"/>
-            <a:r>
-              <a:rPr/>
-              <a:t>Spinal cord</a:t>
-            </a:r>
-          </a:p>
-          <a:p>
-            <a:pPr lvl="0"/>
-            <a:r>
-              <a:rPr/>
-              <a:t>Peripheral Nervous System (PNS)</a:t>
+              <a:t>Planes of section</a:t>
+            </a:r>
+          </a:p>
+        </p:txBody>
+      </p:sp>
+      <p:pic>
+        <p:nvPicPr>
+          <p:cNvPr descr="http://www.scienceteacherprogram.org/biology/chillemistudentguide1-06/brain_directions_planes_sections__directions_-_small.gif" id="0" name="Picture 1"/>
+          <p:cNvPicPr>
+            <a:picLocks noGrp="1" noChangeAspect="1"/>
+          </p:cNvPicPr>
+          <p:nvPr/>
+        </p:nvPicPr>
+        <p:blipFill>
+          <a:blip r:embed="rId2"/>
+          <a:stretch>
+            <a:fillRect/>
+          </a:stretch>
+        </p:blipFill>
+        <p:spPr bwMode="auto">
+          <a:xfrm>
+            <a:off x="2616200" y="1193800"/>
+            <a:ext cx="3911600" cy="2882900"/>
+          </a:xfrm>
+          <a:prstGeom prst="rect">
+            <a:avLst/>
+          </a:prstGeom>
+          <a:noFill/>
+          <a:ln w="9525">
+            <a:noFill/>
+            <a:headEnd/>
+            <a:tailEnd/>
+          </a:ln>
+        </p:spPr>
+      </p:pic>
+      <p:sp>
+        <p:nvSpPr>
+          <p:cNvPr id="1" name="TextBox 3"/>
+          <p:cNvSpPr txBox="1"/>
+          <p:nvPr/>
+        </p:nvSpPr>
+        <p:spPr>
+          <a:xfrm>
+            <a:off x="457200" y="4076700"/>
+            <a:ext cx="8229600" cy="508000"/>
+          </a:xfrm>
+          <a:prstGeom prst="rect">
+            <a:avLst/>
+          </a:prstGeom>
+          <a:noFill/>
+        </p:spPr>
+        <p:txBody>
+          <a:bodyPr/>
+          <a:lstStyle/>
+          <a:p>
+            <a:pPr lvl="0" indent="0" marL="0" algn="ctr">
+              <a:buNone/>
+            </a:pPr>
+            <a:r>
+              <a:rPr/>
+              <a:t>Planes of section from http://www.scienceteacherprogram.org/</a:t>
             </a:r>
           </a:p>
         </p:txBody>
@@ -3701,6 +3711,104 @@
 </file>
 
 <file path=ppt/slides/slide15.xml><?xml version="1.0" encoding="utf-8"?>
+<p:sld xmlns:a="http://schemas.openxmlformats.org/drawingml/2006/main" xmlns:r="http://schemas.openxmlformats.org/officeDocument/2006/relationships" xmlns:p="http://schemas.openxmlformats.org/presentationml/2006/main">
+  <p:cSld>
+    <p:spTree>
+      <p:nvGrpSpPr>
+        <p:cNvPr id="1" name=""/>
+        <p:cNvGrpSpPr/>
+        <p:nvPr/>
+      </p:nvGrpSpPr>
+      <p:grpSpPr>
+        <a:xfrm>
+          <a:off x="0" y="0"/>
+          <a:ext cx="0" cy="0"/>
+          <a:chOff x="0" y="0"/>
+          <a:chExt cx="0" cy="0"/>
+        </a:xfrm>
+      </p:grpSpPr>
+      <p:sp>
+        <p:nvSpPr>
+          <p:cNvPr id="2" name="Title 1"/>
+          <p:cNvSpPr>
+            <a:spLocks noGrp="1"/>
+          </p:cNvSpPr>
+          <p:nvPr>
+            <p:ph type="title"/>
+          </p:nvPr>
+        </p:nvSpPr>
+        <p:spPr/>
+        <p:txBody>
+          <a:bodyPr/>
+          <a:lstStyle/>
+          <a:p>
+            <a:pPr lvl="0" indent="0" marL="0">
+              <a:buNone/>
+            </a:pPr>
+            <a:r>
+              <a:rPr/>
+              <a:t>Nervous system</a:t>
+            </a:r>
+          </a:p>
+        </p:txBody>
+      </p:sp>
+      <p:sp>
+        <p:nvSpPr>
+          <p:cNvPr id="3" name="Content Placeholder 2"/>
+          <p:cNvSpPr>
+            <a:spLocks noGrp="1"/>
+          </p:cNvSpPr>
+          <p:nvPr>
+            <p:ph idx="1"/>
+          </p:nvPr>
+        </p:nvSpPr>
+        <p:spPr/>
+        <p:txBody>
+          <a:bodyPr/>
+          <a:lstStyle/>
+          <a:p>
+            <a:pPr lvl="0"/>
+            <a:r>
+              <a:rPr/>
+              <a:t>Central Nervous System (CNS)</a:t>
+            </a:r>
+          </a:p>
+          <a:p>
+            <a:pPr lvl="1"/>
+            <a:r>
+              <a:rPr/>
+              <a:t>Encased in bone</a:t>
+            </a:r>
+          </a:p>
+          <a:p>
+            <a:pPr lvl="1"/>
+            <a:r>
+              <a:rPr/>
+              <a:t>Brain</a:t>
+            </a:r>
+          </a:p>
+          <a:p>
+            <a:pPr lvl="1"/>
+            <a:r>
+              <a:rPr/>
+              <a:t>Spinal cord</a:t>
+            </a:r>
+          </a:p>
+          <a:p>
+            <a:pPr lvl="0"/>
+            <a:r>
+              <a:rPr/>
+              <a:t>Peripheral Nervous System (PNS)</a:t>
+            </a:r>
+          </a:p>
+        </p:txBody>
+      </p:sp>
+    </p:spTree>
+  </p:cSld>
+</p:sld>
+</file>
+
+<file path=ppt/slides/slide16.xml><?xml version="1.0" encoding="utf-8"?>
 <p:sld xmlns:a="http://schemas.openxmlformats.org/drawingml/2006/main" xmlns:r="http://schemas.openxmlformats.org/officeDocument/2006/relationships" xmlns:p="http://schemas.openxmlformats.org/presentationml/2006/main">
   <p:cSld>
     <p:spTree>
@@ -3848,7 +3956,7 @@
 </p:sld>
 </file>
 
-<file path=ppt/slides/slide16.xml><?xml version="1.0" encoding="utf-8"?>
+<file path=ppt/slides/slide17.xml><?xml version="1.0" encoding="utf-8"?>
 <p:sld xmlns:a="http://schemas.openxmlformats.org/drawingml/2006/main" xmlns:r="http://schemas.openxmlformats.org/officeDocument/2006/relationships" xmlns:p="http://schemas.openxmlformats.org/presentationml/2006/main">
   <p:cSld>
     <p:spTree>
@@ -4141,7 +4249,7 @@
 </p:sld>
 </file>
 
-<file path=ppt/slides/slide17.xml><?xml version="1.0" encoding="utf-8"?>
+<file path=ppt/slides/slide18.xml><?xml version="1.0" encoding="utf-8"?>
 <p:sld xmlns:a="http://schemas.openxmlformats.org/drawingml/2006/main" xmlns:r="http://schemas.openxmlformats.org/officeDocument/2006/relationships" xmlns:p="http://schemas.openxmlformats.org/presentationml/2006/main">
   <p:cSld>
     <p:spTree>
@@ -4359,7 +4467,7 @@
 </p:sld>
 </file>
 
-<file path=ppt/slides/slide18.xml><?xml version="1.0" encoding="utf-8"?>
+<file path=ppt/slides/slide19.xml><?xml version="1.0" encoding="utf-8"?>
 <p:sld xmlns:a="http://schemas.openxmlformats.org/drawingml/2006/main" xmlns:r="http://schemas.openxmlformats.org/officeDocument/2006/relationships" xmlns:p="http://schemas.openxmlformats.org/presentationml/2006/main">
   <p:cSld>
     <p:spTree>
@@ -4539,7 +4647,59 @@
 </p:sld>
 </file>
 
-<file path=ppt/slides/slide19.xml><?xml version="1.0" encoding="utf-8"?>
+<file path=ppt/slides/slide2.xml><?xml version="1.0" encoding="utf-8"?>
+<p:sld xmlns:a="http://schemas.openxmlformats.org/drawingml/2006/main" xmlns:r="http://schemas.openxmlformats.org/officeDocument/2006/relationships" xmlns:p="http://schemas.openxmlformats.org/presentationml/2006/main">
+  <p:cSld>
+    <p:spTree>
+      <p:nvGrpSpPr>
+        <p:cNvPr id="1" name=""/>
+        <p:cNvGrpSpPr/>
+        <p:nvPr/>
+      </p:nvGrpSpPr>
+      <p:grpSpPr>
+        <a:xfrm>
+          <a:off x="0" y="0"/>
+          <a:ext cx="0" cy="0"/>
+          <a:chOff x="0" y="0"/>
+          <a:chExt cx="0" cy="0"/>
+        </a:xfrm>
+      </p:grpSpPr>
+      <p:sp>
+        <p:nvSpPr>
+          <p:cNvPr id="2" name="Title 1"/>
+          <p:cNvSpPr>
+            <a:spLocks noGrp="1"/>
+          </p:cNvSpPr>
+          <p:nvPr>
+            <p:ph type="title"/>
+          </p:nvPr>
+        </p:nvSpPr>
+        <p:spPr>
+          <a:xfrm>
+            <a:off x="722313" y="3305176"/>
+            <a:ext cx="7772400" cy="1021556"/>
+          </a:xfrm>
+        </p:spPr>
+        <p:txBody>
+          <a:bodyPr/>
+          <a:lstStyle/>
+          <a:p>
+            <a:pPr lvl="0" indent="0" marL="0">
+              <a:buNone/>
+            </a:pPr>
+            <a:r>
+              <a:rPr/>
+              <a:t>Prelude</a:t>
+            </a:r>
+          </a:p>
+        </p:txBody>
+      </p:sp>
+    </p:spTree>
+  </p:cSld>
+</p:sld>
+</file>
+
+<file path=ppt/slides/slide20.xml><?xml version="1.0" encoding="utf-8"?>
 <p:sld xmlns:a="http://schemas.openxmlformats.org/drawingml/2006/main" xmlns:r="http://schemas.openxmlformats.org/officeDocument/2006/relationships" xmlns:p="http://schemas.openxmlformats.org/presentationml/2006/main">
   <p:cSld>
     <p:spTree>
@@ -4775,59 +4935,7 @@
 </p:sld>
 </file>
 
-<file path=ppt/slides/slide2.xml><?xml version="1.0" encoding="utf-8"?>
-<p:sld xmlns:a="http://schemas.openxmlformats.org/drawingml/2006/main" xmlns:r="http://schemas.openxmlformats.org/officeDocument/2006/relationships" xmlns:p="http://schemas.openxmlformats.org/presentationml/2006/main">
-  <p:cSld>
-    <p:spTree>
-      <p:nvGrpSpPr>
-        <p:cNvPr id="1" name=""/>
-        <p:cNvGrpSpPr/>
-        <p:nvPr/>
-      </p:nvGrpSpPr>
-      <p:grpSpPr>
-        <a:xfrm>
-          <a:off x="0" y="0"/>
-          <a:ext cx="0" cy="0"/>
-          <a:chOff x="0" y="0"/>
-          <a:chExt cx="0" cy="0"/>
-        </a:xfrm>
-      </p:grpSpPr>
-      <p:sp>
-        <p:nvSpPr>
-          <p:cNvPr id="2" name="Title 1"/>
-          <p:cNvSpPr>
-            <a:spLocks noGrp="1"/>
-          </p:cNvSpPr>
-          <p:nvPr>
-            <p:ph type="title"/>
-          </p:nvPr>
-        </p:nvSpPr>
-        <p:spPr>
-          <a:xfrm>
-            <a:off x="722313" y="3305176"/>
-            <a:ext cx="7772400" cy="1021556"/>
-          </a:xfrm>
-        </p:spPr>
-        <p:txBody>
-          <a:bodyPr/>
-          <a:lstStyle/>
-          <a:p>
-            <a:pPr lvl="0" indent="0" marL="0">
-              <a:buNone/>
-            </a:pPr>
-            <a:r>
-              <a:rPr/>
-              <a:t>Prelude</a:t>
-            </a:r>
-          </a:p>
-        </p:txBody>
-      </p:sp>
-    </p:spTree>
-  </p:cSld>
-</p:sld>
-</file>
-
-<file path=ppt/slides/slide20.xml><?xml version="1.0" encoding="utf-8"?>
+<file path=ppt/slides/slide21.xml><?xml version="1.0" encoding="utf-8"?>
 <p:sld xmlns:a="http://schemas.openxmlformats.org/drawingml/2006/main" xmlns:r="http://schemas.openxmlformats.org/officeDocument/2006/relationships" xmlns:p="http://schemas.openxmlformats.org/presentationml/2006/main">
   <p:cSld>
     <p:spTree>
@@ -4969,7 +5077,7 @@
 </p:sld>
 </file>
 
-<file path=ppt/slides/slide21.xml><?xml version="1.0" encoding="utf-8"?>
+<file path=ppt/slides/slide22.xml><?xml version="1.0" encoding="utf-8"?>
 <p:sld xmlns:a="http://schemas.openxmlformats.org/drawingml/2006/main" xmlns:r="http://schemas.openxmlformats.org/officeDocument/2006/relationships" xmlns:p="http://schemas.openxmlformats.org/presentationml/2006/main">
   <p:cSld>
     <p:spTree>
@@ -5014,7 +5122,7 @@
 </p:sld>
 </file>
 
-<file path=ppt/slides/slide22.xml><?xml version="1.0" encoding="utf-8"?>
+<file path=ppt/slides/slide23.xml><?xml version="1.0" encoding="utf-8"?>
 <p:sld xmlns:a="http://schemas.openxmlformats.org/drawingml/2006/main" xmlns:r="http://schemas.openxmlformats.org/officeDocument/2006/relationships" xmlns:p="http://schemas.openxmlformats.org/presentationml/2006/main">
   <p:cSld>
     <p:spTree>
@@ -5151,7 +5259,7 @@
 </p:sld>
 </file>
 
-<file path=ppt/slides/slide23.xml><?xml version="1.0" encoding="utf-8"?>
+<file path=ppt/slides/slide24.xml><?xml version="1.0" encoding="utf-8"?>
 <p:sld xmlns:a="http://schemas.openxmlformats.org/drawingml/2006/main" xmlns:r="http://schemas.openxmlformats.org/officeDocument/2006/relationships" xmlns:p="http://schemas.openxmlformats.org/presentationml/2006/main">
   <p:cSld>
     <p:spTree>
@@ -5755,7 +5863,7 @@
 </p:sld>
 </file>
 
-<file path=ppt/slides/slide24.xml><?xml version="1.0" encoding="utf-8"?>
+<file path=ppt/slides/slide25.xml><?xml version="1.0" encoding="utf-8"?>
 <p:sld xmlns:a="http://schemas.openxmlformats.org/drawingml/2006/main" xmlns:r="http://schemas.openxmlformats.org/officeDocument/2006/relationships" xmlns:p="http://schemas.openxmlformats.org/presentationml/2006/main">
   <p:cSld>
     <p:spTree>
@@ -5920,7 +6028,7 @@
 </p:sld>
 </file>
 
-<file path=ppt/slides/slide25.xml><?xml version="1.0" encoding="utf-8"?>
+<file path=ppt/slides/slide26.xml><?xml version="1.0" encoding="utf-8"?>
 <p:sld xmlns:a="http://schemas.openxmlformats.org/drawingml/2006/main" xmlns:r="http://schemas.openxmlformats.org/officeDocument/2006/relationships" xmlns:p="http://schemas.openxmlformats.org/presentationml/2006/main">
   <p:cSld>
     <p:spTree>
@@ -6087,7 +6195,7 @@
 </p:sld>
 </file>
 
-<file path=ppt/slides/slide26.xml><?xml version="1.0" encoding="utf-8"?>
+<file path=ppt/slides/slide27.xml><?xml version="1.0" encoding="utf-8"?>
 <p:sld xmlns:a="http://schemas.openxmlformats.org/drawingml/2006/main" xmlns:r="http://schemas.openxmlformats.org/officeDocument/2006/relationships" xmlns:p="http://schemas.openxmlformats.org/presentationml/2006/main">
   <p:cSld>
     <p:spTree>
@@ -6245,7 +6353,7 @@
 </p:sld>
 </file>
 
-<file path=ppt/slides/slide27.xml><?xml version="1.0" encoding="utf-8"?>
+<file path=ppt/slides/slide28.xml><?xml version="1.0" encoding="utf-8"?>
 <p:sld xmlns:a="http://schemas.openxmlformats.org/drawingml/2006/main" xmlns:r="http://schemas.openxmlformats.org/officeDocument/2006/relationships" xmlns:p="http://schemas.openxmlformats.org/presentationml/2006/main">
   <p:cSld>
     <p:spTree>
@@ -6352,7 +6460,7 @@
 </p:sld>
 </file>
 
-<file path=ppt/slides/slide28.xml><?xml version="1.0" encoding="utf-8"?>
+<file path=ppt/slides/slide29.xml><?xml version="1.0" encoding="utf-8"?>
 <p:sld xmlns:a="http://schemas.openxmlformats.org/drawingml/2006/main" xmlns:r="http://schemas.openxmlformats.org/officeDocument/2006/relationships" xmlns:p="http://schemas.openxmlformats.org/presentationml/2006/main">
   <p:cSld>
     <p:spTree>
@@ -6459,7 +6567,65 @@
 </p:sld>
 </file>
 
-<file path=ppt/slides/slide29.xml><?xml version="1.0" encoding="utf-8"?>
+<file path=ppt/slides/slide3.xml><?xml version="1.0" encoding="utf-8"?>
+<p:sld xmlns:a="http://schemas.openxmlformats.org/drawingml/2006/main" xmlns:r="http://schemas.openxmlformats.org/officeDocument/2006/relationships" xmlns:p="http://schemas.openxmlformats.org/presentationml/2006/main">
+  <p:cSld>
+    <p:spTree>
+      <p:nvGrpSpPr>
+        <p:cNvPr id="1" name=""/>
+        <p:cNvGrpSpPr/>
+        <p:nvPr/>
+      </p:nvGrpSpPr>
+      <p:grpSpPr>
+        <a:xfrm>
+          <a:off x="0" y="0"/>
+          <a:ext cx="0" cy="0"/>
+          <a:chOff x="0" y="0"/>
+          <a:chExt cx="0" cy="0"/>
+        </a:xfrm>
+      </p:grpSpPr>
+      <p:sp>
+        <p:nvSpPr>
+          <p:cNvPr id="3" name="Content Placeholder 2"/>
+          <p:cNvSpPr>
+            <a:spLocks noGrp="1"/>
+          </p:cNvSpPr>
+          <p:nvPr>
+            <p:ph idx="1"/>
+          </p:nvPr>
+        </p:nvSpPr>
+        <p:spPr/>
+        <p:txBody>
+          <a:bodyPr/>
+          <a:lstStyle/>
+          <a:p>
+            <a:pPr lvl="0" indent="0" marL="0">
+              <a:buNone/>
+            </a:pPr>
+            <a:r>
+              <a:rPr>
+                <a:hlinkClick r:id="rId2"/>
+              </a:rPr>
+              <a:t>https://www.youtube.com/embed/snO68aJTOpM</a:t>
+            </a:r>
+          </a:p>
+          <a:p>
+            <a:pPr lvl="0" indent="0" marL="0">
+              <a:buNone/>
+            </a:pPr>
+            <a:r>
+              <a:rPr/>
+              <a:t>– ctdalilah (2006)</a:t>
+            </a:r>
+          </a:p>
+        </p:txBody>
+      </p:sp>
+    </p:spTree>
+  </p:cSld>
+</p:sld>
+</file>
+
+<file path=ppt/slides/slide30.xml><?xml version="1.0" encoding="utf-8"?>
 <p:sld xmlns:a="http://schemas.openxmlformats.org/drawingml/2006/main" xmlns:r="http://schemas.openxmlformats.org/officeDocument/2006/relationships" xmlns:p="http://schemas.openxmlformats.org/presentationml/2006/main">
   <p:cSld>
     <p:spTree>
@@ -6566,65 +6732,7 @@
 </p:sld>
 </file>
 
-<file path=ppt/slides/slide3.xml><?xml version="1.0" encoding="utf-8"?>
-<p:sld xmlns:a="http://schemas.openxmlformats.org/drawingml/2006/main" xmlns:r="http://schemas.openxmlformats.org/officeDocument/2006/relationships" xmlns:p="http://schemas.openxmlformats.org/presentationml/2006/main">
-  <p:cSld>
-    <p:spTree>
-      <p:nvGrpSpPr>
-        <p:cNvPr id="1" name=""/>
-        <p:cNvGrpSpPr/>
-        <p:nvPr/>
-      </p:nvGrpSpPr>
-      <p:grpSpPr>
-        <a:xfrm>
-          <a:off x="0" y="0"/>
-          <a:ext cx="0" cy="0"/>
-          <a:chOff x="0" y="0"/>
-          <a:chExt cx="0" cy="0"/>
-        </a:xfrm>
-      </p:grpSpPr>
-      <p:sp>
-        <p:nvSpPr>
-          <p:cNvPr id="3" name="Content Placeholder 2"/>
-          <p:cNvSpPr>
-            <a:spLocks noGrp="1"/>
-          </p:cNvSpPr>
-          <p:nvPr>
-            <p:ph idx="1"/>
-          </p:nvPr>
-        </p:nvSpPr>
-        <p:spPr/>
-        <p:txBody>
-          <a:bodyPr/>
-          <a:lstStyle/>
-          <a:p>
-            <a:pPr lvl="0" indent="0" marL="0">
-              <a:buNone/>
-            </a:pPr>
-            <a:r>
-              <a:rPr>
-                <a:hlinkClick r:id="rId2"/>
-              </a:rPr>
-              <a:t>https://www.youtube.com/embed/snO68aJTOpM</a:t>
-            </a:r>
-          </a:p>
-          <a:p>
-            <a:pPr lvl="0" indent="0" marL="0">
-              <a:buNone/>
-            </a:pPr>
-            <a:r>
-              <a:rPr/>
-              <a:t>– ctdalilah (2006)</a:t>
-            </a:r>
-          </a:p>
-        </p:txBody>
-      </p:sp>
-    </p:spTree>
-  </p:cSld>
-</p:sld>
-</file>
-
-<file path=ppt/slides/slide30.xml><?xml version="1.0" encoding="utf-8"?>
+<file path=ppt/slides/slide31.xml><?xml version="1.0" encoding="utf-8"?>
 <p:sld xmlns:a="http://schemas.openxmlformats.org/drawingml/2006/main" xmlns:r="http://schemas.openxmlformats.org/officeDocument/2006/relationships" xmlns:p="http://schemas.openxmlformats.org/presentationml/2006/main">
   <p:cSld>
     <p:spTree>
@@ -6731,7 +6839,7 @@
 </p:sld>
 </file>
 
-<file path=ppt/slides/slide31.xml><?xml version="1.0" encoding="utf-8"?>
+<file path=ppt/slides/slide32.xml><?xml version="1.0" encoding="utf-8"?>
 <p:sld xmlns:a="http://schemas.openxmlformats.org/drawingml/2006/main" xmlns:r="http://schemas.openxmlformats.org/officeDocument/2006/relationships" xmlns:p="http://schemas.openxmlformats.org/presentationml/2006/main">
   <p:cSld>
     <p:spTree>
@@ -6868,7 +6976,7 @@
 </p:sld>
 </file>
 
-<file path=ppt/slides/slide32.xml><?xml version="1.0" encoding="utf-8"?>
+<file path=ppt/slides/slide33.xml><?xml version="1.0" encoding="utf-8"?>
 <p:sld xmlns:a="http://schemas.openxmlformats.org/drawingml/2006/main" xmlns:r="http://schemas.openxmlformats.org/officeDocument/2006/relationships" xmlns:p="http://schemas.openxmlformats.org/presentationml/2006/main">
   <p:cSld>
     <p:spTree>
@@ -7028,7 +7136,7 @@
 </p:sld>
 </file>
 
-<file path=ppt/slides/slide33.xml><?xml version="1.0" encoding="utf-8"?>
+<file path=ppt/slides/slide34.xml><?xml version="1.0" encoding="utf-8"?>
 <p:sld xmlns:a="http://schemas.openxmlformats.org/drawingml/2006/main" xmlns:r="http://schemas.openxmlformats.org/officeDocument/2006/relationships" xmlns:p="http://schemas.openxmlformats.org/presentationml/2006/main">
   <p:cSld>
     <p:spTree>
@@ -7112,7 +7220,7 @@
 </p:sld>
 </file>
 
-<file path=ppt/slides/slide34.xml><?xml version="1.0" encoding="utf-8"?>
+<file path=ppt/slides/slide35.xml><?xml version="1.0" encoding="utf-8"?>
 <p:sld xmlns:a="http://schemas.openxmlformats.org/drawingml/2006/main" xmlns:r="http://schemas.openxmlformats.org/officeDocument/2006/relationships" xmlns:p="http://schemas.openxmlformats.org/presentationml/2006/main">
   <p:cSld>
     <p:spTree>
@@ -7277,7 +7385,7 @@
 </p:sld>
 </file>
 
-<file path=ppt/slides/slide35.xml><?xml version="1.0" encoding="utf-8"?>
+<file path=ppt/slides/slide36.xml><?xml version="1.0" encoding="utf-8"?>
 <p:sld xmlns:a="http://schemas.openxmlformats.org/drawingml/2006/main" xmlns:r="http://schemas.openxmlformats.org/officeDocument/2006/relationships" xmlns:p="http://schemas.openxmlformats.org/presentationml/2006/main">
   <p:cSld>
     <p:spTree>
@@ -7384,7 +7492,7 @@
 </p:sld>
 </file>
 
-<file path=ppt/slides/slide36.xml><?xml version="1.0" encoding="utf-8"?>
+<file path=ppt/slides/slide37.xml><?xml version="1.0" encoding="utf-8"?>
 <p:sld xmlns:a="http://schemas.openxmlformats.org/drawingml/2006/main" xmlns:r="http://schemas.openxmlformats.org/officeDocument/2006/relationships" xmlns:p="http://schemas.openxmlformats.org/presentationml/2006/main">
   <p:cSld>
     <p:spTree>
@@ -7521,7 +7629,7 @@
 </p:sld>
 </file>
 
-<file path=ppt/slides/slide37.xml><?xml version="1.0" encoding="utf-8"?>
+<file path=ppt/slides/slide38.xml><?xml version="1.0" encoding="utf-8"?>
 <p:sld xmlns:a="http://schemas.openxmlformats.org/drawingml/2006/main" xmlns:r="http://schemas.openxmlformats.org/officeDocument/2006/relationships" xmlns:p="http://schemas.openxmlformats.org/presentationml/2006/main">
   <p:cSld>
     <p:spTree>
@@ -7658,7 +7766,7 @@
 </p:sld>
 </file>
 
-<file path=ppt/slides/slide38.xml><?xml version="1.0" encoding="utf-8"?>
+<file path=ppt/slides/slide39.xml><?xml version="1.0" encoding="utf-8"?>
 <p:sld xmlns:a="http://schemas.openxmlformats.org/drawingml/2006/main" xmlns:r="http://schemas.openxmlformats.org/officeDocument/2006/relationships" xmlns:p="http://schemas.openxmlformats.org/presentationml/2006/main">
   <p:cSld>
     <p:spTree>
@@ -7802,7 +7910,65 @@
 </p:sld>
 </file>
 
-<file path=ppt/slides/slide39.xml><?xml version="1.0" encoding="utf-8"?>
+<file path=ppt/slides/slide4.xml><?xml version="1.0" encoding="utf-8"?>
+<p:sld xmlns:a="http://schemas.openxmlformats.org/drawingml/2006/main" xmlns:r="http://schemas.openxmlformats.org/officeDocument/2006/relationships" xmlns:p="http://schemas.openxmlformats.org/presentationml/2006/main">
+  <p:cSld>
+    <p:spTree>
+      <p:nvGrpSpPr>
+        <p:cNvPr id="1" name=""/>
+        <p:cNvGrpSpPr/>
+        <p:nvPr/>
+      </p:nvGrpSpPr>
+      <p:grpSpPr>
+        <a:xfrm>
+          <a:off x="0" y="0"/>
+          <a:ext cx="0" cy="0"/>
+          <a:chOff x="0" y="0"/>
+          <a:chExt cx="0" cy="0"/>
+        </a:xfrm>
+      </p:grpSpPr>
+      <p:sp>
+        <p:nvSpPr>
+          <p:cNvPr id="3" name="Content Placeholder 2"/>
+          <p:cNvSpPr>
+            <a:spLocks noGrp="1"/>
+          </p:cNvSpPr>
+          <p:nvPr>
+            <p:ph idx="1"/>
+          </p:nvPr>
+        </p:nvSpPr>
+        <p:spPr/>
+        <p:txBody>
+          <a:bodyPr/>
+          <a:lstStyle/>
+          <a:p>
+            <a:pPr lvl="0" indent="0" marL="0">
+              <a:buNone/>
+            </a:pPr>
+            <a:r>
+              <a:rPr>
+                <a:hlinkClick r:id="rId2"/>
+              </a:rPr>
+              <a:t>https://www.youtube.com/embed/Qw8E9WnZTQk</a:t>
+            </a:r>
+          </a:p>
+          <a:p>
+            <a:pPr lvl="0" indent="0" marL="0">
+              <a:buNone/>
+            </a:pPr>
+            <a:r>
+              <a:rPr/>
+              <a:t>– Kids Learning Tube (2015) </a:t>
+            </a:r>
+          </a:p>
+        </p:txBody>
+      </p:sp>
+    </p:spTree>
+  </p:cSld>
+</p:sld>
+</file>
+
+<file path=ppt/slides/slide40.xml><?xml version="1.0" encoding="utf-8"?>
 <p:sld xmlns:a="http://schemas.openxmlformats.org/drawingml/2006/main" xmlns:r="http://schemas.openxmlformats.org/officeDocument/2006/relationships" xmlns:p="http://schemas.openxmlformats.org/presentationml/2006/main">
   <p:cSld>
     <p:spTree>
@@ -8020,65 +8186,7 @@
 </p:sld>
 </file>
 
-<file path=ppt/slides/slide4.xml><?xml version="1.0" encoding="utf-8"?>
-<p:sld xmlns:a="http://schemas.openxmlformats.org/drawingml/2006/main" xmlns:r="http://schemas.openxmlformats.org/officeDocument/2006/relationships" xmlns:p="http://schemas.openxmlformats.org/presentationml/2006/main">
-  <p:cSld>
-    <p:spTree>
-      <p:nvGrpSpPr>
-        <p:cNvPr id="1" name=""/>
-        <p:cNvGrpSpPr/>
-        <p:nvPr/>
-      </p:nvGrpSpPr>
-      <p:grpSpPr>
-        <a:xfrm>
-          <a:off x="0" y="0"/>
-          <a:ext cx="0" cy="0"/>
-          <a:chOff x="0" y="0"/>
-          <a:chExt cx="0" cy="0"/>
-        </a:xfrm>
-      </p:grpSpPr>
-      <p:sp>
-        <p:nvSpPr>
-          <p:cNvPr id="3" name="Content Placeholder 2"/>
-          <p:cNvSpPr>
-            <a:spLocks noGrp="1"/>
-          </p:cNvSpPr>
-          <p:nvPr>
-            <p:ph idx="1"/>
-          </p:nvPr>
-        </p:nvSpPr>
-        <p:spPr/>
-        <p:txBody>
-          <a:bodyPr/>
-          <a:lstStyle/>
-          <a:p>
-            <a:pPr lvl="0" indent="0" marL="0">
-              <a:buNone/>
-            </a:pPr>
-            <a:r>
-              <a:rPr>
-                <a:hlinkClick r:id="rId2"/>
-              </a:rPr>
-              <a:t>https://www.youtube.com/embed/Qw8E9WnZTQk</a:t>
-            </a:r>
-          </a:p>
-          <a:p>
-            <a:pPr lvl="0" indent="0" marL="0">
-              <a:buNone/>
-            </a:pPr>
-            <a:r>
-              <a:rPr/>
-              <a:t>– Kids Learning Tube (2015) </a:t>
-            </a:r>
-          </a:p>
-        </p:txBody>
-      </p:sp>
-    </p:spTree>
-  </p:cSld>
-</p:sld>
-</file>
-
-<file path=ppt/slides/slide40.xml><?xml version="1.0" encoding="utf-8"?>
+<file path=ppt/slides/slide41.xml><?xml version="1.0" encoding="utf-8"?>
 <p:sld xmlns:a="http://schemas.openxmlformats.org/drawingml/2006/main" xmlns:r="http://schemas.openxmlformats.org/officeDocument/2006/relationships" xmlns:p="http://schemas.openxmlformats.org/presentationml/2006/main">
   <p:cSld>
     <p:spTree>
@@ -8215,7 +8323,7 @@
 </p:sld>
 </file>
 
-<file path=ppt/slides/slide41.xml><?xml version="1.0" encoding="utf-8"?>
+<file path=ppt/slides/slide42.xml><?xml version="1.0" encoding="utf-8"?>
 <p:sld xmlns:a="http://schemas.openxmlformats.org/drawingml/2006/main" xmlns:r="http://schemas.openxmlformats.org/officeDocument/2006/relationships" xmlns:p="http://schemas.openxmlformats.org/presentationml/2006/main">
   <p:cSld>
     <p:spTree>
@@ -8377,7 +8485,7 @@
 </p:sld>
 </file>
 
-<file path=ppt/slides/slide42.xml><?xml version="1.0" encoding="utf-8"?>
+<file path=ppt/slides/slide43.xml><?xml version="1.0" encoding="utf-8"?>
 <p:sld xmlns:a="http://schemas.openxmlformats.org/drawingml/2006/main" xmlns:r="http://schemas.openxmlformats.org/officeDocument/2006/relationships" xmlns:p="http://schemas.openxmlformats.org/presentationml/2006/main">
   <p:cSld>
     <p:spTree>
@@ -8484,97 +8592,6 @@
 </p:sld>
 </file>
 
-<file path=ppt/slides/slide43.xml><?xml version="1.0" encoding="utf-8"?>
-<p:sld xmlns:a="http://schemas.openxmlformats.org/drawingml/2006/main" xmlns:r="http://schemas.openxmlformats.org/officeDocument/2006/relationships" xmlns:p="http://schemas.openxmlformats.org/presentationml/2006/main">
-  <p:cSld>
-    <p:spTree>
-      <p:nvGrpSpPr>
-        <p:cNvPr id="1" name=""/>
-        <p:cNvGrpSpPr/>
-        <p:nvPr/>
-      </p:nvGrpSpPr>
-      <p:grpSpPr>
-        <a:xfrm>
-          <a:off x="0" y="0"/>
-          <a:ext cx="0" cy="0"/>
-          <a:chOff x="0" y="0"/>
-          <a:chExt cx="0" cy="0"/>
-        </a:xfrm>
-      </p:grpSpPr>
-      <p:sp>
-        <p:nvSpPr>
-          <p:cNvPr id="2" name="Title 1"/>
-          <p:cNvSpPr>
-            <a:spLocks noGrp="1"/>
-          </p:cNvSpPr>
-          <p:nvPr>
-            <p:ph type="title"/>
-          </p:nvPr>
-        </p:nvSpPr>
-        <p:spPr/>
-        <p:txBody>
-          <a:bodyPr/>
-          <a:lstStyle/>
-          <a:p>
-            <a:pPr lvl="0" indent="0" marL="0">
-              <a:buNone/>
-            </a:pPr>
-            <a:r>
-              <a:rPr/>
-              <a:t>Hypothalamus</a:t>
-            </a:r>
-          </a:p>
-        </p:txBody>
-      </p:sp>
-      <p:sp>
-        <p:nvSpPr>
-          <p:cNvPr id="3" name="Content Placeholder 2"/>
-          <p:cNvSpPr>
-            <a:spLocks noGrp="1"/>
-          </p:cNvSpPr>
-          <p:nvPr>
-            <p:ph idx="1"/>
-          </p:nvPr>
-        </p:nvSpPr>
-        <p:spPr/>
-        <p:txBody>
-          <a:bodyPr/>
-          <a:lstStyle/>
-          <a:p>
-            <a:pPr lvl="0"/>
-            <a:r>
-              <a:rPr/>
-              <a:t>Five Fs:</a:t>
-            </a:r>
-          </a:p>
-          <a:p>
-            <a:pPr lvl="1"/>
-            <a:r>
-              <a:rPr/>
-              <a:t>Fighting/fleeing/freezing</a:t>
-            </a:r>
-          </a:p>
-          <a:p>
-            <a:pPr lvl="1"/>
-            <a:r>
-              <a:rPr/>
-              <a:t>Feeding</a:t>
-            </a:r>
-          </a:p>
-          <a:p>
-            <a:pPr lvl="1"/>
-            <a:r>
-              <a:rPr/>
-              <a:t>Reproduction</a:t>
-            </a:r>
-          </a:p>
-        </p:txBody>
-      </p:sp>
-    </p:spTree>
-  </p:cSld>
-</p:sld>
-</file>
-
 <file path=ppt/slides/slide44.xml><?xml version="1.0" encoding="utf-8"?>
 <p:sld xmlns:a="http://schemas.openxmlformats.org/drawingml/2006/main" xmlns:r="http://schemas.openxmlformats.org/officeDocument/2006/relationships" xmlns:p="http://schemas.openxmlformats.org/presentationml/2006/main">
   <p:cSld>
@@ -8635,42 +8652,28 @@
             <a:pPr lvl="0"/>
             <a:r>
               <a:rPr/>
-              <a:t>Controls pituitary gland (“master” gland)</a:t>
+              <a:t>Five Fs:</a:t>
             </a:r>
           </a:p>
           <a:p>
             <a:pPr lvl="1"/>
             <a:r>
               <a:rPr/>
-              <a:t>Anterior pituitary (indirect release of hormones)</a:t>
-            </a:r>
-          </a:p>
-          <a:p>
-            <a:pPr lvl="2"/>
-            <a:r>
-              <a:rPr/>
-              <a:t>e.g., Corticotropin Releasing Hormone (CRH) -&gt; release of cortisol from Adrenal Cortex (adjacent to kidney)</a:t>
+              <a:t>Fighting/fleeing/freezing</a:t>
             </a:r>
           </a:p>
           <a:p>
             <a:pPr lvl="1"/>
             <a:r>
               <a:rPr/>
-              <a:t>Posterior pituitary (direct release of hormones)</a:t>
-            </a:r>
-          </a:p>
-          <a:p>
-            <a:pPr lvl="2"/>
-            <a:r>
-              <a:rPr/>
-              <a:t>Oxytocin</a:t>
-            </a:r>
-          </a:p>
-          <a:p>
-            <a:pPr lvl="2"/>
-            <a:r>
-              <a:rPr/>
-              <a:t>Vasopressin (aka, Arginine Vasopressin – AVP; Anti-diuretic Hormone – ADH)</a:t>
+              <a:t>Feeding</a:t>
+            </a:r>
+          </a:p>
+          <a:p>
+            <a:pPr lvl="1"/>
+            <a:r>
+              <a:rPr/>
+              <a:t>Reproduction</a:t>
             </a:r>
           </a:p>
         </p:txBody>
@@ -8681,6 +8684,111 @@
 </file>
 
 <file path=ppt/slides/slide45.xml><?xml version="1.0" encoding="utf-8"?>
+<p:sld xmlns:a="http://schemas.openxmlformats.org/drawingml/2006/main" xmlns:r="http://schemas.openxmlformats.org/officeDocument/2006/relationships" xmlns:p="http://schemas.openxmlformats.org/presentationml/2006/main">
+  <p:cSld>
+    <p:spTree>
+      <p:nvGrpSpPr>
+        <p:cNvPr id="1" name=""/>
+        <p:cNvGrpSpPr/>
+        <p:nvPr/>
+      </p:nvGrpSpPr>
+      <p:grpSpPr>
+        <a:xfrm>
+          <a:off x="0" y="0"/>
+          <a:ext cx="0" cy="0"/>
+          <a:chOff x="0" y="0"/>
+          <a:chExt cx="0" cy="0"/>
+        </a:xfrm>
+      </p:grpSpPr>
+      <p:sp>
+        <p:nvSpPr>
+          <p:cNvPr id="2" name="Title 1"/>
+          <p:cNvSpPr>
+            <a:spLocks noGrp="1"/>
+          </p:cNvSpPr>
+          <p:nvPr>
+            <p:ph type="title"/>
+          </p:nvPr>
+        </p:nvSpPr>
+        <p:spPr/>
+        <p:txBody>
+          <a:bodyPr/>
+          <a:lstStyle/>
+          <a:p>
+            <a:pPr lvl="0" indent="0" marL="0">
+              <a:buNone/>
+            </a:pPr>
+            <a:r>
+              <a:rPr/>
+              <a:t>Hypothalamus</a:t>
+            </a:r>
+          </a:p>
+        </p:txBody>
+      </p:sp>
+      <p:sp>
+        <p:nvSpPr>
+          <p:cNvPr id="3" name="Content Placeholder 2"/>
+          <p:cNvSpPr>
+            <a:spLocks noGrp="1"/>
+          </p:cNvSpPr>
+          <p:nvPr>
+            <p:ph idx="1"/>
+          </p:nvPr>
+        </p:nvSpPr>
+        <p:spPr/>
+        <p:txBody>
+          <a:bodyPr/>
+          <a:lstStyle/>
+          <a:p>
+            <a:pPr lvl="0"/>
+            <a:r>
+              <a:rPr/>
+              <a:t>Controls pituitary gland (“master” gland)</a:t>
+            </a:r>
+          </a:p>
+          <a:p>
+            <a:pPr lvl="1"/>
+            <a:r>
+              <a:rPr/>
+              <a:t>Anterior pituitary (indirect release of hormones)</a:t>
+            </a:r>
+          </a:p>
+          <a:p>
+            <a:pPr lvl="2"/>
+            <a:r>
+              <a:rPr/>
+              <a:t>e.g., Corticotropin Releasing Hormone (CRH) -&gt; release of cortisol from Adrenal Cortex (adjacent to kidney)</a:t>
+            </a:r>
+          </a:p>
+          <a:p>
+            <a:pPr lvl="1"/>
+            <a:r>
+              <a:rPr/>
+              <a:t>Posterior pituitary (direct release of hormones)</a:t>
+            </a:r>
+          </a:p>
+          <a:p>
+            <a:pPr lvl="2"/>
+            <a:r>
+              <a:rPr/>
+              <a:t>Oxytocin</a:t>
+            </a:r>
+          </a:p>
+          <a:p>
+            <a:pPr lvl="2"/>
+            <a:r>
+              <a:rPr/>
+              <a:t>Vasopressin (aka, Arginine Vasopressin – AVP; Anti-diuretic Hormone – ADH)</a:t>
+            </a:r>
+          </a:p>
+        </p:txBody>
+      </p:sp>
+    </p:spTree>
+  </p:cSld>
+</p:sld>
+</file>
+
+<file path=ppt/slides/slide46.xml><?xml version="1.0" encoding="utf-8"?>
 <p:sld xmlns:a="http://schemas.openxmlformats.org/drawingml/2006/main" xmlns:r="http://schemas.openxmlformats.org/officeDocument/2006/relationships" xmlns:p="http://schemas.openxmlformats.org/presentationml/2006/main">
   <p:cSld>
     <p:spTree>
@@ -8978,7 +9086,7 @@
 </p:sld>
 </file>
 
-<file path=ppt/slides/slide46.xml><?xml version="1.0" encoding="utf-8"?>
+<file path=ppt/slides/slide47.xml><?xml version="1.0" encoding="utf-8"?>
 <p:sld xmlns:a="http://schemas.openxmlformats.org/drawingml/2006/main" xmlns:r="http://schemas.openxmlformats.org/officeDocument/2006/relationships" xmlns:p="http://schemas.openxmlformats.org/presentationml/2006/main">
   <p:cSld>
     <p:spTree>
@@ -9055,7 +9163,7 @@
 </p:sld>
 </file>
 
-<file path=ppt/slides/slide47.xml><?xml version="1.0" encoding="utf-8"?>
+<file path=ppt/slides/slide48.xml><?xml version="1.0" encoding="utf-8"?>
 <p:sld xmlns:a="http://schemas.openxmlformats.org/drawingml/2006/main" xmlns:r="http://schemas.openxmlformats.org/officeDocument/2006/relationships" xmlns:p="http://schemas.openxmlformats.org/presentationml/2006/main">
   <p:cSld>
     <p:spTree>
@@ -9192,7 +9300,7 @@
 </p:sld>
 </file>
 
-<file path=ppt/slides/slide48.xml><?xml version="1.0" encoding="utf-8"?>
+<file path=ppt/slides/slide49.xml><?xml version="1.0" encoding="utf-8"?>
 <p:sld xmlns:a="http://schemas.openxmlformats.org/drawingml/2006/main" xmlns:r="http://schemas.openxmlformats.org/officeDocument/2006/relationships" xmlns:p="http://schemas.openxmlformats.org/presentationml/2006/main">
   <p:cSld>
     <p:spTree>
@@ -9343,7 +9451,118 @@
 </p:sld>
 </file>
 
-<file path=ppt/slides/slide49.xml><?xml version="1.0" encoding="utf-8"?>
+<file path=ppt/slides/slide5.xml><?xml version="1.0" encoding="utf-8"?>
+<p:sld xmlns:a="http://schemas.openxmlformats.org/drawingml/2006/main" xmlns:r="http://schemas.openxmlformats.org/officeDocument/2006/relationships" xmlns:p="http://schemas.openxmlformats.org/presentationml/2006/main">
+  <p:cSld>
+    <p:spTree>
+      <p:nvGrpSpPr>
+        <p:cNvPr id="1" name=""/>
+        <p:cNvGrpSpPr/>
+        <p:nvPr/>
+      </p:nvGrpSpPr>
+      <p:grpSpPr>
+        <a:xfrm>
+          <a:off x="0" y="0"/>
+          <a:ext cx="0" cy="0"/>
+          <a:chOff x="0" y="0"/>
+          <a:chExt cx="0" cy="0"/>
+        </a:xfrm>
+      </p:grpSpPr>
+      <p:sp>
+        <p:nvSpPr>
+          <p:cNvPr id="2" name="Title 1"/>
+          <p:cNvSpPr>
+            <a:spLocks noGrp="1"/>
+          </p:cNvSpPr>
+          <p:nvPr>
+            <p:ph type="title"/>
+          </p:nvPr>
+        </p:nvSpPr>
+        <p:spPr/>
+        <p:txBody>
+          <a:bodyPr/>
+          <a:lstStyle/>
+          <a:p>
+            <a:pPr lvl="0" indent="0" marL="0">
+              <a:buNone/>
+            </a:pPr>
+            <a:r>
+              <a:rPr/>
+              <a:t>Announcements</a:t>
+            </a:r>
+          </a:p>
+        </p:txBody>
+      </p:sp>
+      <p:sp>
+        <p:nvSpPr>
+          <p:cNvPr id="3" name="Content Placeholder 2"/>
+          <p:cNvSpPr>
+            <a:spLocks noGrp="1"/>
+          </p:cNvSpPr>
+          <p:nvPr>
+            <p:ph idx="1"/>
+          </p:nvPr>
+        </p:nvSpPr>
+        <p:spPr/>
+        <p:txBody>
+          <a:bodyPr/>
+          <a:lstStyle/>
+          <a:p>
+            <a:pPr lvl="0"/>
+            <a:r>
+              <a:rPr/>
+              <a:t>Exercise LVL due </a:t>
+            </a:r>
+            <a:r>
+              <a:rPr b="1"/>
+              <a:t>today</a:t>
+            </a:r>
+            <a:r>
+              <a:rPr/>
+              <a:t>.</a:t>
+            </a:r>
+          </a:p>
+          <a:p>
+            <a:pPr lvl="1"/>
+            <a:r>
+              <a:rPr>
+                <a:hlinkClick r:id="rId2"/>
+              </a:rPr>
+              <a:t>Canvas dropbox</a:t>
+            </a:r>
+          </a:p>
+          <a:p>
+            <a:pPr lvl="0"/>
+            <a:r>
+              <a:rPr/>
+              <a:t>Exercise ANAT due </a:t>
+            </a:r>
+            <a:r>
+              <a:rPr b="1"/>
+              <a:t>next Thursday, January 29, 2026</a:t>
+            </a:r>
+            <a:r>
+              <a:rPr/>
+              <a:t>.</a:t>
+            </a:r>
+          </a:p>
+          <a:p>
+            <a:pPr lvl="1"/>
+            <a:r>
+              <a:rPr>
+                <a:hlinkClick r:id="rId3"/>
+              </a:rPr>
+              <a:t>Canvas dropbox</a:t>
+            </a:r>
+          </a:p>
+        </p:txBody>
+      </p:sp>
+    </p:spTree>
+  </p:cSld>
+</p:sld>
+</file>
+
+<file path=ppt/slides/slide50.xml><?xml version="1.0" encoding="utf-8"?>
 <p:sld xmlns:a="http://schemas.openxmlformats.org/drawingml/2006/main" xmlns:r="http://schemas.openxmlformats.org/officeDocument/2006/relationships" xmlns:p="http://schemas.openxmlformats.org/presentationml/2006/main">
   <p:cSld>
     <p:spTree>
@@ -9512,118 +9731,7 @@
 </p:sld>
 </file>
 
-<file path=ppt/slides/slide5.xml><?xml version="1.0" encoding="utf-8"?>
-<p:sld xmlns:a="http://schemas.openxmlformats.org/drawingml/2006/main" xmlns:r="http://schemas.openxmlformats.org/officeDocument/2006/relationships" xmlns:p="http://schemas.openxmlformats.org/presentationml/2006/main">
-  <p:cSld>
-    <p:spTree>
-      <p:nvGrpSpPr>
-        <p:cNvPr id="1" name=""/>
-        <p:cNvGrpSpPr/>
-        <p:nvPr/>
-      </p:nvGrpSpPr>
-      <p:grpSpPr>
-        <a:xfrm>
-          <a:off x="0" y="0"/>
-          <a:ext cx="0" cy="0"/>
-          <a:chOff x="0" y="0"/>
-          <a:chExt cx="0" cy="0"/>
-        </a:xfrm>
-      </p:grpSpPr>
-      <p:sp>
-        <p:nvSpPr>
-          <p:cNvPr id="2" name="Title 1"/>
-          <p:cNvSpPr>
-            <a:spLocks noGrp="1"/>
-          </p:cNvSpPr>
-          <p:nvPr>
-            <p:ph type="title"/>
-          </p:nvPr>
-        </p:nvSpPr>
-        <p:spPr/>
-        <p:txBody>
-          <a:bodyPr/>
-          <a:lstStyle/>
-          <a:p>
-            <a:pPr lvl="0" indent="0" marL="0">
-              <a:buNone/>
-            </a:pPr>
-            <a:r>
-              <a:rPr/>
-              <a:t>Announcements</a:t>
-            </a:r>
-          </a:p>
-        </p:txBody>
-      </p:sp>
-      <p:sp>
-        <p:nvSpPr>
-          <p:cNvPr id="3" name="Content Placeholder 2"/>
-          <p:cNvSpPr>
-            <a:spLocks noGrp="1"/>
-          </p:cNvSpPr>
-          <p:nvPr>
-            <p:ph idx="1"/>
-          </p:nvPr>
-        </p:nvSpPr>
-        <p:spPr/>
-        <p:txBody>
-          <a:bodyPr/>
-          <a:lstStyle/>
-          <a:p>
-            <a:pPr lvl="0"/>
-            <a:r>
-              <a:rPr/>
-              <a:t>Exercise LVL due </a:t>
-            </a:r>
-            <a:r>
-              <a:rPr b="1"/>
-              <a:t>today</a:t>
-            </a:r>
-            <a:r>
-              <a:rPr/>
-              <a:t>.</a:t>
-            </a:r>
-          </a:p>
-          <a:p>
-            <a:pPr lvl="1"/>
-            <a:r>
-              <a:rPr>
-                <a:hlinkClick r:id="rId2"/>
-              </a:rPr>
-              <a:t>Canvas dropbox</a:t>
-            </a:r>
-          </a:p>
-          <a:p>
-            <a:pPr lvl="0"/>
-            <a:r>
-              <a:rPr/>
-              <a:t>Exercise ANAT due </a:t>
-            </a:r>
-            <a:r>
-              <a:rPr b="1"/>
-              <a:t>next Thursday, January 29, 2026</a:t>
-            </a:r>
-            <a:r>
-              <a:rPr/>
-              <a:t>.</a:t>
-            </a:r>
-          </a:p>
-          <a:p>
-            <a:pPr lvl="1"/>
-            <a:r>
-              <a:rPr>
-                <a:hlinkClick r:id="rId3"/>
-              </a:rPr>
-              <a:t>Canvas dropbox</a:t>
-            </a:r>
-          </a:p>
-        </p:txBody>
-      </p:sp>
-    </p:spTree>
-  </p:cSld>
-</p:sld>
-</file>
-
-<file path=ppt/slides/slide50.xml><?xml version="1.0" encoding="utf-8"?>
+<file path=ppt/slides/slide51.xml><?xml version="1.0" encoding="utf-8"?>
 <p:sld xmlns:a="http://schemas.openxmlformats.org/drawingml/2006/main" xmlns:r="http://schemas.openxmlformats.org/officeDocument/2006/relationships" xmlns:p="http://schemas.openxmlformats.org/presentationml/2006/main">
   <p:cSld>
     <p:spTree>
@@ -9781,7 +9889,7 @@
 </p:sld>
 </file>
 
-<file path=ppt/slides/slide51.xml><?xml version="1.0" encoding="utf-8"?>
+<file path=ppt/slides/slide52.xml><?xml version="1.0" encoding="utf-8"?>
 <p:sld xmlns:a="http://schemas.openxmlformats.org/drawingml/2006/main" xmlns:r="http://schemas.openxmlformats.org/officeDocument/2006/relationships" xmlns:p="http://schemas.openxmlformats.org/presentationml/2006/main">
   <p:cSld>
     <p:spTree>
@@ -9918,7 +10026,7 @@
 </p:sld>
 </file>
 
-<file path=ppt/slides/slide52.xml><?xml version="1.0" encoding="utf-8"?>
+<file path=ppt/slides/slide53.xml><?xml version="1.0" encoding="utf-8"?>
 <p:sld xmlns:a="http://schemas.openxmlformats.org/drawingml/2006/main" xmlns:r="http://schemas.openxmlformats.org/officeDocument/2006/relationships" xmlns:p="http://schemas.openxmlformats.org/presentationml/2006/main">
   <p:cSld>
     <p:spTree>
@@ -10062,7 +10170,7 @@
 </p:sld>
 </file>
 
-<file path=ppt/slides/slide53.xml><?xml version="1.0" encoding="utf-8"?>
+<file path=ppt/slides/slide54.xml><?xml version="1.0" encoding="utf-8"?>
 <p:sld xmlns:a="http://schemas.openxmlformats.org/drawingml/2006/main" xmlns:r="http://schemas.openxmlformats.org/officeDocument/2006/relationships" xmlns:p="http://schemas.openxmlformats.org/presentationml/2006/main">
   <p:cSld>
     <p:spTree>
@@ -10248,7 +10356,7 @@
 </p:sld>
 </file>
 
-<file path=ppt/slides/slide54.xml><?xml version="1.0" encoding="utf-8"?>
+<file path=ppt/slides/slide55.xml><?xml version="1.0" encoding="utf-8"?>
 <p:sld xmlns:a="http://schemas.openxmlformats.org/drawingml/2006/main" xmlns:r="http://schemas.openxmlformats.org/officeDocument/2006/relationships" xmlns:p="http://schemas.openxmlformats.org/presentationml/2006/main">
   <p:cSld>
     <p:spTree>
@@ -10399,7 +10507,7 @@
 </p:sld>
 </file>
 
-<file path=ppt/slides/slide55.xml><?xml version="1.0" encoding="utf-8"?>
+<file path=ppt/slides/slide56.xml><?xml version="1.0" encoding="utf-8"?>
 <p:sld xmlns:a="http://schemas.openxmlformats.org/drawingml/2006/main" xmlns:r="http://schemas.openxmlformats.org/officeDocument/2006/relationships" xmlns:p="http://schemas.openxmlformats.org/presentationml/2006/main">
   <p:cSld>
     <p:spTree>
@@ -10506,7 +10614,7 @@
 </p:sld>
 </file>
 
-<file path=ppt/slides/slide56.xml><?xml version="1.0" encoding="utf-8"?>
+<file path=ppt/slides/slide57.xml><?xml version="1.0" encoding="utf-8"?>
 <p:sld xmlns:a="http://schemas.openxmlformats.org/drawingml/2006/main" xmlns:r="http://schemas.openxmlformats.org/officeDocument/2006/relationships" xmlns:p="http://schemas.openxmlformats.org/presentationml/2006/main">
   <p:cSld>
     <p:spTree>
@@ -10613,7 +10721,7 @@
 </p:sld>
 </file>
 
-<file path=ppt/slides/slide57.xml><?xml version="1.0" encoding="utf-8"?>
+<file path=ppt/slides/slide58.xml><?xml version="1.0" encoding="utf-8"?>
 <p:sld xmlns:a="http://schemas.openxmlformats.org/drawingml/2006/main" xmlns:r="http://schemas.openxmlformats.org/officeDocument/2006/relationships" xmlns:p="http://schemas.openxmlformats.org/presentationml/2006/main">
   <p:cSld>
     <p:spTree>
@@ -10771,7 +10879,7 @@
 </p:sld>
 </file>
 
-<file path=ppt/slides/slide58.xml><?xml version="1.0" encoding="utf-8"?>
+<file path=ppt/slides/slide59.xml><?xml version="1.0" encoding="utf-8"?>
 <p:sld xmlns:a="http://schemas.openxmlformats.org/drawingml/2006/main" xmlns:r="http://schemas.openxmlformats.org/officeDocument/2006/relationships" xmlns:p="http://schemas.openxmlformats.org/presentationml/2006/main">
   <p:cSld>
     <p:spTree>
@@ -10938,7 +11046,93 @@
 </p:sld>
 </file>
 
-<file path=ppt/slides/slide59.xml><?xml version="1.0" encoding="utf-8"?>
+<file path=ppt/slides/slide6.xml><?xml version="1.0" encoding="utf-8"?>
+<p:sld xmlns:a="http://schemas.openxmlformats.org/drawingml/2006/main" xmlns:r="http://schemas.openxmlformats.org/officeDocument/2006/relationships" xmlns:p="http://schemas.openxmlformats.org/presentationml/2006/main">
+  <p:cSld>
+    <p:spTree>
+      <p:nvGrpSpPr>
+        <p:cNvPr id="1" name=""/>
+        <p:cNvGrpSpPr/>
+        <p:nvPr/>
+      </p:nvGrpSpPr>
+      <p:grpSpPr>
+        <a:xfrm>
+          <a:off x="0" y="0"/>
+          <a:ext cx="0" cy="0"/>
+          <a:chOff x="0" y="0"/>
+          <a:chExt cx="0" cy="0"/>
+        </a:xfrm>
+      </p:grpSpPr>
+      <p:sp>
+        <p:nvSpPr>
+          <p:cNvPr id="2" name="Title 1"/>
+          <p:cNvSpPr>
+            <a:spLocks noGrp="1"/>
+          </p:cNvSpPr>
+          <p:nvPr>
+            <p:ph type="title"/>
+          </p:nvPr>
+        </p:nvSpPr>
+        <p:spPr/>
+        <p:txBody>
+          <a:bodyPr/>
+          <a:lstStyle/>
+          <a:p>
+            <a:pPr lvl="0" indent="0" marL="0">
+              <a:buNone/>
+            </a:pPr>
+            <a:r>
+              <a:rPr/>
+              <a:t>Today’s topics</a:t>
+            </a:r>
+          </a:p>
+        </p:txBody>
+      </p:sp>
+      <p:sp>
+        <p:nvSpPr>
+          <p:cNvPr id="3" name="Content Placeholder 2"/>
+          <p:cNvSpPr>
+            <a:spLocks noGrp="1"/>
+          </p:cNvSpPr>
+          <p:nvPr>
+            <p:ph idx="1"/>
+          </p:nvPr>
+        </p:nvSpPr>
+        <p:spPr/>
+        <p:txBody>
+          <a:bodyPr/>
+          <a:lstStyle/>
+          <a:p>
+            <a:pPr lvl="0"/>
+            <a:r>
+              <a:rPr/>
+              <a:t>Neuroanatomy</a:t>
+            </a:r>
+          </a:p>
+          <a:p>
+            <a:pPr lvl="0"/>
+            <a:r>
+              <a:rPr/>
+              <a:t>In-class lab</a:t>
+            </a:r>
+          </a:p>
+          <a:p>
+            <a:pPr lvl="1"/>
+            <a:r>
+              <a:rPr>
+                <a:hlinkClick r:id="rId2"/>
+              </a:rPr>
+              <a:t>Exercise ANAT</a:t>
+            </a:r>
+          </a:p>
+        </p:txBody>
+      </p:sp>
+    </p:spTree>
+  </p:cSld>
+</p:sld>
+</file>
+
+<file path=ppt/slides/slide60.xml><?xml version="1.0" encoding="utf-8"?>
 <p:sld xmlns:a="http://schemas.openxmlformats.org/drawingml/2006/main" xmlns:r="http://schemas.openxmlformats.org/officeDocument/2006/relationships" xmlns:p="http://schemas.openxmlformats.org/presentationml/2006/main">
   <p:cSld>
     <p:spTree>
@@ -11380,93 +11574,7 @@
 </p:sld>
 </file>
 
-<file path=ppt/slides/slide6.xml><?xml version="1.0" encoding="utf-8"?>
-<p:sld xmlns:a="http://schemas.openxmlformats.org/drawingml/2006/main" xmlns:r="http://schemas.openxmlformats.org/officeDocument/2006/relationships" xmlns:p="http://schemas.openxmlformats.org/presentationml/2006/main">
-  <p:cSld>
-    <p:spTree>
-      <p:nvGrpSpPr>
-        <p:cNvPr id="1" name=""/>
-        <p:cNvGrpSpPr/>
-        <p:nvPr/>
-      </p:nvGrpSpPr>
-      <p:grpSpPr>
-        <a:xfrm>
-          <a:off x="0" y="0"/>
-          <a:ext cx="0" cy="0"/>
-          <a:chOff x="0" y="0"/>
-          <a:chExt cx="0" cy="0"/>
-        </a:xfrm>
-      </p:grpSpPr>
-      <p:sp>
-        <p:nvSpPr>
-          <p:cNvPr id="2" name="Title 1"/>
-          <p:cNvSpPr>
-            <a:spLocks noGrp="1"/>
-          </p:cNvSpPr>
-          <p:nvPr>
-            <p:ph type="title"/>
-          </p:nvPr>
-        </p:nvSpPr>
-        <p:spPr/>
-        <p:txBody>
-          <a:bodyPr/>
-          <a:lstStyle/>
-          <a:p>
-            <a:pPr lvl="0" indent="0" marL="0">
-              <a:buNone/>
-            </a:pPr>
-            <a:r>
-              <a:rPr/>
-              <a:t>Today’s topics</a:t>
-            </a:r>
-          </a:p>
-        </p:txBody>
-      </p:sp>
-      <p:sp>
-        <p:nvSpPr>
-          <p:cNvPr id="3" name="Content Placeholder 2"/>
-          <p:cNvSpPr>
-            <a:spLocks noGrp="1"/>
-          </p:cNvSpPr>
-          <p:nvPr>
-            <p:ph idx="1"/>
-          </p:nvPr>
-        </p:nvSpPr>
-        <p:spPr/>
-        <p:txBody>
-          <a:bodyPr/>
-          <a:lstStyle/>
-          <a:p>
-            <a:pPr lvl="0"/>
-            <a:r>
-              <a:rPr/>
-              <a:t>Neuroanatomy</a:t>
-            </a:r>
-          </a:p>
-          <a:p>
-            <a:pPr lvl="0"/>
-            <a:r>
-              <a:rPr/>
-              <a:t>In-class lab</a:t>
-            </a:r>
-          </a:p>
-          <a:p>
-            <a:pPr lvl="1"/>
-            <a:r>
-              <a:rPr>
-                <a:hlinkClick r:id="rId2"/>
-              </a:rPr>
-              <a:t>Exercise ANAT</a:t>
-            </a:r>
-          </a:p>
-        </p:txBody>
-      </p:sp>
-    </p:spTree>
-  </p:cSld>
-</p:sld>
-</file>
-
-<file path=ppt/slides/slide60.xml><?xml version="1.0" encoding="utf-8"?>
+<file path=ppt/slides/slide61.xml><?xml version="1.0" encoding="utf-8"?>
 <p:sld xmlns:a="http://schemas.openxmlformats.org/drawingml/2006/main" xmlns:r="http://schemas.openxmlformats.org/officeDocument/2006/relationships" xmlns:p="http://schemas.openxmlformats.org/presentationml/2006/main">
   <p:cSld>
     <p:spTree>
@@ -11573,7 +11681,7 @@
 </p:sld>
 </file>
 
-<file path=ppt/slides/slide61.xml><?xml version="1.0" encoding="utf-8"?>
+<file path=ppt/slides/slide62.xml><?xml version="1.0" encoding="utf-8"?>
 <p:sld xmlns:a="http://schemas.openxmlformats.org/drawingml/2006/main" xmlns:r="http://schemas.openxmlformats.org/officeDocument/2006/relationships" xmlns:p="http://schemas.openxmlformats.org/presentationml/2006/main">
   <p:cSld>
     <p:spTree>
@@ -11692,7 +11800,7 @@
 </p:sld>
 </file>
 
-<file path=ppt/slides/slide62.xml><?xml version="1.0" encoding="utf-8"?>
+<file path=ppt/slides/slide63.xml><?xml version="1.0" encoding="utf-8"?>
 <p:sld xmlns:a="http://schemas.openxmlformats.org/drawingml/2006/main" xmlns:r="http://schemas.openxmlformats.org/officeDocument/2006/relationships" xmlns:p="http://schemas.openxmlformats.org/presentationml/2006/main">
   <p:cSld>
     <p:spTree>
@@ -11859,7 +11967,7 @@
 </p:sld>
 </file>
 
-<file path=ppt/slides/slide63.xml><?xml version="1.0" encoding="utf-8"?>
+<file path=ppt/slides/slide64.xml><?xml version="1.0" encoding="utf-8"?>
 <p:sld xmlns:a="http://schemas.openxmlformats.org/drawingml/2006/main" xmlns:r="http://schemas.openxmlformats.org/officeDocument/2006/relationships" xmlns:p="http://schemas.openxmlformats.org/presentationml/2006/main">
   <p:cSld>
     <p:spTree>
@@ -11966,58 +12074,6 @@
 </p:sld>
 </file>
 
-<file path=ppt/slides/slide64.xml><?xml version="1.0" encoding="utf-8"?>
-<p:sld xmlns:a="http://schemas.openxmlformats.org/drawingml/2006/main" xmlns:r="http://schemas.openxmlformats.org/officeDocument/2006/relationships" xmlns:p="http://schemas.openxmlformats.org/presentationml/2006/main">
-  <p:cSld>
-    <p:spTree>
-      <p:nvGrpSpPr>
-        <p:cNvPr id="1" name=""/>
-        <p:cNvGrpSpPr/>
-        <p:nvPr/>
-      </p:nvGrpSpPr>
-      <p:grpSpPr>
-        <a:xfrm>
-          <a:off x="0" y="0"/>
-          <a:ext cx="0" cy="0"/>
-          <a:chOff x="0" y="0"/>
-          <a:chExt cx="0" cy="0"/>
-        </a:xfrm>
-      </p:grpSpPr>
-      <p:sp>
-        <p:nvSpPr>
-          <p:cNvPr id="2" name="Title 1"/>
-          <p:cNvSpPr>
-            <a:spLocks noGrp="1"/>
-          </p:cNvSpPr>
-          <p:nvPr>
-            <p:ph type="title"/>
-          </p:nvPr>
-        </p:nvSpPr>
-        <p:spPr>
-          <a:xfrm>
-            <a:off x="722313" y="3305176"/>
-            <a:ext cx="7772400" cy="1021556"/>
-          </a:xfrm>
-        </p:spPr>
-        <p:txBody>
-          <a:bodyPr/>
-          <a:lstStyle/>
-          <a:p>
-            <a:pPr lvl="0" indent="0" marL="0">
-              <a:buNone/>
-            </a:pPr>
-            <a:r>
-              <a:rPr/>
-              <a:t>Neuroanatomy lab</a:t>
-            </a:r>
-          </a:p>
-        </p:txBody>
-      </p:sp>
-    </p:spTree>
-  </p:cSld>
-</p:sld>
-</file>
-
 <file path=ppt/slides/slide65.xml><?xml version="1.0" encoding="utf-8"?>
 <p:sld xmlns:a="http://schemas.openxmlformats.org/drawingml/2006/main" xmlns:r="http://schemas.openxmlformats.org/officeDocument/2006/relationships" xmlns:p="http://schemas.openxmlformats.org/presentationml/2006/main">
   <p:cSld>
@@ -12045,7 +12101,12 @@
             <p:ph type="title"/>
           </p:nvPr>
         </p:nvSpPr>
-        <p:spPr/>
+        <p:spPr>
+          <a:xfrm>
+            <a:off x="722313" y="3305176"/>
+            <a:ext cx="7772400" cy="1021556"/>
+          </a:xfrm>
+        </p:spPr>
         <p:txBody>
           <a:bodyPr/>
           <a:lstStyle/>
@@ -12055,44 +12116,7 @@
             </a:pPr>
             <a:r>
               <a:rPr/>
-              <a:t>Overview</a:t>
-            </a:r>
-          </a:p>
-        </p:txBody>
-      </p:sp>
-      <p:sp>
-        <p:nvSpPr>
-          <p:cNvPr id="3" name="Content Placeholder 2"/>
-          <p:cNvSpPr>
-            <a:spLocks noGrp="1"/>
-          </p:cNvSpPr>
-          <p:nvPr>
-            <p:ph idx="1"/>
-          </p:nvPr>
-        </p:nvSpPr>
-        <p:spPr/>
-        <p:txBody>
-          <a:bodyPr/>
-          <a:lstStyle/>
-          <a:p>
-            <a:pPr lvl="0"/>
-            <a:r>
-              <a:rPr/>
-              <a:t>3 groups</a:t>
-            </a:r>
-          </a:p>
-          <a:p>
-            <a:pPr lvl="0"/>
-            <a:r>
-              <a:rPr/>
-              <a:t>Rotate among stations every ~25 min</a:t>
-            </a:r>
-          </a:p>
-          <a:p>
-            <a:pPr lvl="0"/>
-            <a:r>
-              <a:rPr/>
-              <a:t>Identify as many structures as possible</a:t>
+              <a:t>Neuroanatomy lab</a:t>
             </a:r>
           </a:p>
         </p:txBody>
@@ -12129,12 +12153,7 @@
             <p:ph type="title"/>
           </p:nvPr>
         </p:nvSpPr>
-        <p:spPr>
-          <a:xfrm>
-            <a:off x="722313" y="3305176"/>
-            <a:ext cx="7772400" cy="1021556"/>
-          </a:xfrm>
-        </p:spPr>
+        <p:spPr/>
         <p:txBody>
           <a:bodyPr/>
           <a:lstStyle/>
@@ -12144,7 +12163,44 @@
             </a:pPr>
             <a:r>
               <a:rPr/>
-              <a:t>Wrap-up</a:t>
+              <a:t>Overview</a:t>
+            </a:r>
+          </a:p>
+        </p:txBody>
+      </p:sp>
+      <p:sp>
+        <p:nvSpPr>
+          <p:cNvPr id="3" name="Content Placeholder 2"/>
+          <p:cNvSpPr>
+            <a:spLocks noGrp="1"/>
+          </p:cNvSpPr>
+          <p:nvPr>
+            <p:ph idx="1"/>
+          </p:nvPr>
+        </p:nvSpPr>
+        <p:spPr/>
+        <p:txBody>
+          <a:bodyPr/>
+          <a:lstStyle/>
+          <a:p>
+            <a:pPr lvl="0"/>
+            <a:r>
+              <a:rPr/>
+              <a:t>3 groups</a:t>
+            </a:r>
+          </a:p>
+          <a:p>
+            <a:pPr lvl="0"/>
+            <a:r>
+              <a:rPr/>
+              <a:t>Rotate among stations every ~25 min</a:t>
+            </a:r>
+          </a:p>
+          <a:p>
+            <a:pPr lvl="0"/>
+            <a:r>
+              <a:rPr/>
+              <a:t>Identify as many structures as possible</a:t>
             </a:r>
           </a:p>
         </p:txBody>
@@ -12181,7 +12237,12 @@
             <p:ph type="title"/>
           </p:nvPr>
         </p:nvSpPr>
-        <p:spPr/>
+        <p:spPr>
+          <a:xfrm>
+            <a:off x="722313" y="3305176"/>
+            <a:ext cx="7772400" cy="1021556"/>
+          </a:xfrm>
+        </p:spPr>
         <p:txBody>
           <a:bodyPr/>
           <a:lstStyle/>
@@ -12191,65 +12252,7 @@
             </a:pPr>
             <a:r>
               <a:rPr/>
-              <a:t>Main points</a:t>
-            </a:r>
-          </a:p>
-        </p:txBody>
-      </p:sp>
-      <p:sp>
-        <p:nvSpPr>
-          <p:cNvPr id="3" name="Content Placeholder 2"/>
-          <p:cNvSpPr>
-            <a:spLocks noGrp="1"/>
-          </p:cNvSpPr>
-          <p:nvPr>
-            <p:ph idx="1"/>
-          </p:nvPr>
-        </p:nvSpPr>
-        <p:spPr/>
-        <p:txBody>
-          <a:bodyPr/>
-          <a:lstStyle/>
-          <a:p>
-            <a:pPr lvl="0"/>
-            <a:r>
-              <a:rPr/>
-              <a:t>Directional terms</a:t>
-            </a:r>
-          </a:p>
-          <a:p>
-            <a:pPr lvl="0"/>
-            <a:r>
-              <a:rPr/>
-              <a:t>What is it</a:t>
-            </a:r>
-          </a:p>
-          <a:p>
-            <a:pPr lvl="0"/>
-            <a:r>
-              <a:rPr/>
-              <a:t>Where is it</a:t>
-            </a:r>
-          </a:p>
-          <a:p>
-            <a:pPr lvl="1"/>
-            <a:r>
-              <a:rPr/>
-              <a:t>Relative to other things</a:t>
-            </a:r>
-          </a:p>
-          <a:p>
-            <a:pPr lvl="1"/>
-            <a:r>
-              <a:rPr/>
-              <a:t>CNS/PNS</a:t>
-            </a:r>
-          </a:p>
-          <a:p>
-            <a:pPr lvl="1"/>
-            <a:r>
-              <a:rPr/>
-              <a:t>Forebrain/midbrain/hindbrain</a:t>
+              <a:t>Wrap-up</a:t>
             </a:r>
           </a:p>
         </p:txBody>
@@ -12278,6 +12281,31 @@
       </p:grpSpPr>
       <p:sp>
         <p:nvSpPr>
+          <p:cNvPr id="2" name="Title 1"/>
+          <p:cNvSpPr>
+            <a:spLocks noGrp="1"/>
+          </p:cNvSpPr>
+          <p:nvPr>
+            <p:ph type="title"/>
+          </p:nvPr>
+        </p:nvSpPr>
+        <p:spPr/>
+        <p:txBody>
+          <a:bodyPr/>
+          <a:lstStyle/>
+          <a:p>
+            <a:pPr lvl="0" indent="0" marL="0">
+              <a:buNone/>
+            </a:pPr>
+            <a:r>
+              <a:rPr/>
+              <a:t>Main points</a:t>
+            </a:r>
+          </a:p>
+        </p:txBody>
+      </p:sp>
+      <p:sp>
+        <p:nvSpPr>
           <p:cNvPr id="3" name="Content Placeholder 2"/>
           <p:cNvSpPr>
             <a:spLocks noGrp="1"/>
@@ -12294,14 +12322,42 @@
             <a:pPr lvl="0"/>
             <a:r>
               <a:rPr/>
-              <a:t>Cerebral cortex and its subparts</a:t>
+              <a:t>Directional terms</a:t>
             </a:r>
           </a:p>
           <a:p>
             <a:pPr lvl="0"/>
             <a:r>
               <a:rPr/>
-              <a:t>Grey matter vs. white matter</a:t>
+              <a:t>What is it</a:t>
+            </a:r>
+          </a:p>
+          <a:p>
+            <a:pPr lvl="0"/>
+            <a:r>
+              <a:rPr/>
+              <a:t>Where is it</a:t>
+            </a:r>
+          </a:p>
+          <a:p>
+            <a:pPr lvl="1"/>
+            <a:r>
+              <a:rPr/>
+              <a:t>Relative to other things</a:t>
+            </a:r>
+          </a:p>
+          <a:p>
+            <a:pPr lvl="1"/>
+            <a:r>
+              <a:rPr/>
+              <a:t>CNS/PNS</a:t>
+            </a:r>
+          </a:p>
+          <a:p>
+            <a:pPr lvl="1"/>
+            <a:r>
+              <a:rPr/>
+              <a:t>Forebrain/midbrain/hindbrain</a:t>
             </a:r>
           </a:p>
         </p:txBody>
@@ -12330,31 +12386,6 @@
       </p:grpSpPr>
       <p:sp>
         <p:nvSpPr>
-          <p:cNvPr id="2" name="Title 1"/>
-          <p:cNvSpPr>
-            <a:spLocks noGrp="1"/>
-          </p:cNvSpPr>
-          <p:nvPr>
-            <p:ph type="title"/>
-          </p:nvPr>
-        </p:nvSpPr>
-        <p:spPr/>
-        <p:txBody>
-          <a:bodyPr/>
-          <a:lstStyle/>
-          <a:p>
-            <a:pPr lvl="0" indent="0" marL="0">
-              <a:buNone/>
-            </a:pPr>
-            <a:r>
-              <a:rPr/>
-              <a:t>Next time…</a:t>
-            </a:r>
-          </a:p>
-        </p:txBody>
-      </p:sp>
-      <p:sp>
-        <p:nvSpPr>
           <p:cNvPr id="3" name="Content Placeholder 2"/>
           <p:cNvSpPr>
             <a:spLocks noGrp="1"/>
@@ -12370,36 +12401,15 @@
           <a:p>
             <a:pPr lvl="0"/>
             <a:r>
-              <a:rPr>
-                <a:hlinkClick r:id="rId2"/>
-              </a:rPr>
-              <a:t>Action</a:t>
+              <a:rPr/>
+              <a:t>Cerebral cortex and its subparts</a:t>
             </a:r>
           </a:p>
           <a:p>
             <a:pPr lvl="0"/>
             <a:r>
-              <a:rPr i="1"/>
-              <a:t>Due</a:t>
-            </a:r>
-            <a:r>
-              <a:rPr/>
-              <a:t>: </a:t>
-            </a:r>
-            <a:r>
-              <a:rPr>
-                <a:hlinkClick r:id="rId3"/>
-              </a:rPr>
-              <a:t>Exercise ANAT • Neuroanatomy</a:t>
-            </a:r>
-          </a:p>
-          <a:p>
-            <a:pPr lvl="1"/>
-            <a:r>
-              <a:rPr>
-                <a:hlinkClick r:id="rId4"/>
-              </a:rPr>
-              <a:t>Canvas dropbox</a:t>
+              <a:rPr/>
+              <a:t>Grey matter vs. white matter</a:t>
             </a:r>
           </a:p>
         </p:txBody>
@@ -12488,6 +12498,104 @@
             <p:ph type="title"/>
           </p:nvPr>
         </p:nvSpPr>
+        <p:spPr/>
+        <p:txBody>
+          <a:bodyPr/>
+          <a:lstStyle/>
+          <a:p>
+            <a:pPr lvl="0" indent="0" marL="0">
+              <a:buNone/>
+            </a:pPr>
+            <a:r>
+              <a:rPr/>
+              <a:t>Next time…</a:t>
+            </a:r>
+          </a:p>
+        </p:txBody>
+      </p:sp>
+      <p:sp>
+        <p:nvSpPr>
+          <p:cNvPr id="3" name="Content Placeholder 2"/>
+          <p:cNvSpPr>
+            <a:spLocks noGrp="1"/>
+          </p:cNvSpPr>
+          <p:nvPr>
+            <p:ph idx="1"/>
+          </p:nvPr>
+        </p:nvSpPr>
+        <p:spPr/>
+        <p:txBody>
+          <a:bodyPr/>
+          <a:lstStyle/>
+          <a:p>
+            <a:pPr lvl="0"/>
+            <a:r>
+              <a:rPr>
+                <a:hlinkClick r:id="rId2"/>
+              </a:rPr>
+              <a:t>Action</a:t>
+            </a:r>
+          </a:p>
+          <a:p>
+            <a:pPr lvl="0"/>
+            <a:r>
+              <a:rPr i="1"/>
+              <a:t>Due</a:t>
+            </a:r>
+            <a:r>
+              <a:rPr/>
+              <a:t>: </a:t>
+            </a:r>
+            <a:r>
+              <a:rPr>
+                <a:hlinkClick r:id="rId3"/>
+              </a:rPr>
+              <a:t>Exercise ANAT • Neuroanatomy</a:t>
+            </a:r>
+          </a:p>
+          <a:p>
+            <a:pPr lvl="1"/>
+            <a:r>
+              <a:rPr>
+                <a:hlinkClick r:id="rId4"/>
+              </a:rPr>
+              <a:t>Canvas dropbox</a:t>
+            </a:r>
+          </a:p>
+        </p:txBody>
+      </p:sp>
+    </p:spTree>
+  </p:cSld>
+</p:sld>
+</file>
+
+<file path=ppt/slides/slide71.xml><?xml version="1.0" encoding="utf-8"?>
+<p:sld xmlns:a="http://schemas.openxmlformats.org/drawingml/2006/main" xmlns:r="http://schemas.openxmlformats.org/officeDocument/2006/relationships" xmlns:p="http://schemas.openxmlformats.org/presentationml/2006/main">
+  <p:cSld>
+    <p:spTree>
+      <p:nvGrpSpPr>
+        <p:cNvPr id="1" name=""/>
+        <p:cNvGrpSpPr/>
+        <p:nvPr/>
+      </p:nvGrpSpPr>
+      <p:grpSpPr>
+        <a:xfrm>
+          <a:off x="0" y="0"/>
+          <a:ext cx="0" cy="0"/>
+          <a:chOff x="0" y="0"/>
+          <a:chExt cx="0" cy="0"/>
+        </a:xfrm>
+      </p:grpSpPr>
+      <p:sp>
+        <p:nvSpPr>
+          <p:cNvPr id="2" name="Title 1"/>
+          <p:cNvSpPr>
+            <a:spLocks noGrp="1"/>
+          </p:cNvSpPr>
+          <p:nvPr>
+            <p:ph type="title"/>
+          </p:nvPr>
+        </p:nvSpPr>
         <p:spPr>
           <a:xfrm>
             <a:off x="722313" y="3305176"/>
@@ -12513,7 +12621,7 @@
 </p:sld>
 </file>
 
-<file path=ppt/slides/slide71.xml><?xml version="1.0" encoding="utf-8"?>
+<file path=ppt/slides/slide72.xml><?xml version="1.0" encoding="utf-8"?>
 <p:sld xmlns:a="http://schemas.openxmlformats.org/drawingml/2006/main" xmlns:r="http://schemas.openxmlformats.org/officeDocument/2006/relationships" xmlns:p="http://schemas.openxmlformats.org/presentationml/2006/main">
   <p:cSld>
     <p:spTree>
